--- a/public/downloads/praesentation/M03.pptx
+++ b/public/downloads/praesentation/M03.pptx
@@ -16,6 +16,14 @@
     <p:sldId id="264" r:id="rId15"/>
     <p:sldId id="265" r:id="rId16"/>
     <p:sldId id="266" r:id="rId17"/>
+    <p:sldId id="267" r:id="rId18"/>
+    <p:sldId id="268" r:id="rId19"/>
+    <p:sldId id="269" r:id="rId20"/>
+    <p:sldId id="270" r:id="rId21"/>
+    <p:sldId id="271" r:id="rId22"/>
+    <p:sldId id="272" r:id="rId23"/>
+    <p:sldId id="273" r:id="rId24"/>
+    <p:sldId id="274" r:id="rId25"/>
   </p:sldIdLst>
   <p:sldSz cx="12188952" cy="6858000" type="screen4x3"/>
   <p:notesSz cx="6858000" cy="9144000"/>
@@ -3157,8 +3165,8 @@
         </p:nvSpPr>
         <p:spPr>
           <a:xfrm>
-            <a:off x="365760" y="365760"/>
-            <a:ext cx="11430000" cy="457200"/>
+            <a:off x="365760" y="320040"/>
+            <a:ext cx="11430000" cy="411480"/>
           </a:xfrm>
           <a:prstGeom prst="rect">
             <a:avLst/>
@@ -3173,13 +3181,13 @@
           <a:p>
             <a:pPr algn="l"/>
             <a:r>
-              <a:rPr sz="1100" b="0">
+              <a:rPr sz="1100" b="0" i="0">
                 <a:solidFill>
-                  <a:srgbClr val="FFFFFF"/>
+                  <a:srgbClr val="BBCCEE"/>
                 </a:solidFill>
                 <a:latin typeface="Arial"/>
               </a:rPr>
-              <a:t>M03  ·  K-01 Finanzanalyse &amp; Strategieberatung  ·  Stratege  ·  1 Tag (ca. 7 Std.)</a:t>
+              <a:t>M03  ·  K-01 Finanzanalyse &amp; Strategieberatung  ·  Zielstufe: Stratege  ·  1 Tag (ca. 7 Std.)</a:t>
             </a:r>
           </a:p>
         </p:txBody>
@@ -3192,14 +3200,14 @@
         </p:nvSpPr>
         <p:spPr>
           <a:xfrm>
-            <a:off x="365760" y="868680"/>
-            <a:ext cx="7315200" cy="27432"/>
+            <a:off x="365760" y="804672"/>
+            <a:ext cx="8229600" cy="22860"/>
           </a:xfrm>
           <a:prstGeom prst="rect">
             <a:avLst/>
           </a:prstGeom>
           <a:solidFill>
-            <a:srgbClr val="FFFFFF"/>
+            <a:srgbClr val="335CC0"/>
           </a:solidFill>
           <a:ln>
             <a:noFill/>
@@ -3235,8 +3243,8 @@
         </p:nvSpPr>
         <p:spPr>
           <a:xfrm>
-            <a:off x="365760" y="1097280"/>
-            <a:ext cx="11430000" cy="2286000"/>
+            <a:off x="365760" y="1005840"/>
+            <a:ext cx="11430000" cy="2560320"/>
           </a:xfrm>
           <a:prstGeom prst="rect">
             <a:avLst/>
@@ -3251,7 +3259,7 @@
           <a:p>
             <a:pPr algn="l"/>
             <a:r>
-              <a:rPr sz="4000" b="1">
+              <a:rPr sz="4200" b="1" i="0">
                 <a:solidFill>
                   <a:srgbClr val="FFFFFF"/>
                 </a:solidFill>
@@ -3270,8 +3278,8 @@
         </p:nvSpPr>
         <p:spPr>
           <a:xfrm>
-            <a:off x="365760" y="3200400"/>
-            <a:ext cx="9144000" cy="914400"/>
+            <a:off x="365760" y="3383280"/>
+            <a:ext cx="10058400" cy="822960"/>
           </a:xfrm>
           <a:prstGeom prst="rect">
             <a:avLst/>
@@ -3286,7 +3294,7 @@
           <a:p>
             <a:pPr algn="l"/>
             <a:r>
-              <a:rPr sz="2000" b="0">
+              <a:rPr sz="2000" b="0" i="1">
                 <a:solidFill>
                   <a:srgbClr val="CCD6F0"/>
                 </a:solidFill>
@@ -3305,8 +3313,8 @@
         </p:nvSpPr>
         <p:spPr>
           <a:xfrm>
-            <a:off x="365760" y="6217920"/>
-            <a:ext cx="11430000" cy="457200"/>
+            <a:off x="365760" y="6309360"/>
+            <a:ext cx="11430000" cy="365760"/>
           </a:xfrm>
           <a:prstGeom prst="rect">
             <a:avLst/>
@@ -3321,9 +3329,9 @@
           <a:p>
             <a:pPr algn="l"/>
             <a:r>
-              <a:rPr sz="1000" b="0">
+              <a:rPr sz="900" b="0" i="0">
                 <a:solidFill>
-                  <a:srgbClr val="99AACC"/>
+                  <a:srgbClr val="889ACC"/>
                 </a:solidFill>
                 <a:latin typeface="Arial"/>
               </a:rPr>
@@ -3409,8 +3417,8 @@
         </p:nvSpPr>
         <p:spPr>
           <a:xfrm>
-            <a:off x="365760" y="2286000"/>
-            <a:ext cx="11430000" cy="1828800"/>
+            <a:off x="365760" y="2011680"/>
+            <a:ext cx="11430000" cy="2011680"/>
           </a:xfrm>
           <a:prstGeom prst="rect">
             <a:avLst/>
@@ -3425,13 +3433,13 @@
           <a:p>
             <a:pPr algn="l"/>
             <a:r>
-              <a:rPr sz="3600" b="1">
+              <a:rPr sz="3600" b="1" i="0">
                 <a:solidFill>
                   <a:srgbClr val="FFFFFF"/>
                 </a:solidFill>
                 <a:latin typeface="Arial"/>
               </a:rPr>
-              <a:t>Selbstcheck nach 4 Wochen</a:t>
+              <a:t>Praxiscase: Habermaier Präzisionsteile GmbH &amp; Co. KG</a:t>
             </a:r>
           </a:p>
         </p:txBody>
@@ -3450,7 +3458,2625 @@
     <p:bg>
       <p:bgPr>
         <a:solidFill>
-          <a:srgbClr val="003DA5"/>
+          <a:srgbClr val="FFFFFF"/>
+        </a:solidFill>
+        <a:effectLst/>
+      </p:bgPr>
+    </p:bg>
+    <p:spTree>
+      <p:nvGrpSpPr>
+        <p:cNvPr id="1" name=""/>
+        <p:cNvGrpSpPr/>
+        <p:nvPr/>
+      </p:nvGrpSpPr>
+      <p:grpSpPr/>
+      <p:sp>
+        <p:nvSpPr>
+          <p:cNvPr id="2" name="Rectangle 1"/>
+          <p:cNvSpPr/>
+          <p:nvPr/>
+        </p:nvSpPr>
+        <p:spPr>
+          <a:xfrm>
+            <a:off x="0" y="0"/>
+            <a:ext cx="73152" cy="6858000"/>
+          </a:xfrm>
+          <a:prstGeom prst="rect">
+            <a:avLst/>
+          </a:prstGeom>
+          <a:solidFill>
+            <a:srgbClr val="003DA5"/>
+          </a:solidFill>
+          <a:ln>
+            <a:noFill/>
+          </a:ln>
+        </p:spPr>
+        <p:style>
+          <a:lnRef idx="1">
+            <a:schemeClr val="accent1"/>
+          </a:lnRef>
+          <a:fillRef idx="3">
+            <a:schemeClr val="accent1"/>
+          </a:fillRef>
+          <a:effectRef idx="2">
+            <a:schemeClr val="accent1"/>
+          </a:effectRef>
+          <a:fontRef idx="minor">
+            <a:schemeClr val="lt1"/>
+          </a:fontRef>
+        </p:style>
+        <p:txBody>
+          <a:bodyPr rtlCol="0" anchor="ctr"/>
+          <a:lstStyle/>
+          <a:p>
+            <a:pPr algn="ctr"/>
+          </a:p>
+        </p:txBody>
+      </p:sp>
+      <p:sp>
+        <p:nvSpPr>
+          <p:cNvPr id="3" name="TextBox 2"/>
+          <p:cNvSpPr txBox="1"/>
+          <p:nvPr/>
+        </p:nvSpPr>
+        <p:spPr>
+          <a:xfrm>
+            <a:off x="228600" y="182880"/>
+            <a:ext cx="11430000" cy="320040"/>
+          </a:xfrm>
+          <a:prstGeom prst="rect">
+            <a:avLst/>
+          </a:prstGeom>
+          <a:noFill/>
+        </p:spPr>
+        <p:txBody>
+          <a:bodyPr wrap="square">
+            <a:spAutoFit/>
+          </a:bodyPr>
+          <a:lstStyle/>
+          <a:p>
+            <a:pPr algn="l"/>
+            <a:r>
+              <a:rPr sz="900" b="0" i="0">
+                <a:solidFill>
+                  <a:srgbClr val="556575"/>
+                </a:solidFill>
+                <a:latin typeface="Arial"/>
+              </a:rPr>
+              <a:t>M03 · Modulinhalte</a:t>
+            </a:r>
+          </a:p>
+        </p:txBody>
+      </p:sp>
+      <p:sp>
+        <p:nvSpPr>
+          <p:cNvPr id="4" name="TextBox 3"/>
+          <p:cNvSpPr txBox="1"/>
+          <p:nvPr/>
+        </p:nvSpPr>
+        <p:spPr>
+          <a:xfrm>
+            <a:off x="365760" y="274320"/>
+            <a:ext cx="11430000" cy="777240"/>
+          </a:xfrm>
+          <a:prstGeom prst="rect">
+            <a:avLst/>
+          </a:prstGeom>
+          <a:noFill/>
+        </p:spPr>
+        <p:txBody>
+          <a:bodyPr wrap="square">
+            <a:spAutoFit/>
+          </a:bodyPr>
+          <a:lstStyle/>
+          <a:p>
+            <a:pPr algn="l"/>
+            <a:r>
+              <a:rPr sz="2200" b="1" i="0">
+                <a:solidFill>
+                  <a:srgbClr val="003DA5"/>
+                </a:solidFill>
+                <a:latin typeface="Arial"/>
+              </a:rPr>
+              <a:t>Unternehmensprofil</a:t>
+            </a:r>
+          </a:p>
+        </p:txBody>
+      </p:sp>
+      <p:sp>
+        <p:nvSpPr>
+          <p:cNvPr id="5" name="Rectangle 4"/>
+          <p:cNvSpPr/>
+          <p:nvPr/>
+        </p:nvSpPr>
+        <p:spPr>
+          <a:xfrm>
+            <a:off x="365760" y="1005840"/>
+            <a:ext cx="11430000" cy="27432"/>
+          </a:xfrm>
+          <a:prstGeom prst="rect">
+            <a:avLst/>
+          </a:prstGeom>
+          <a:solidFill>
+            <a:srgbClr val="D1D5DB"/>
+          </a:solidFill>
+          <a:ln>
+            <a:noFill/>
+          </a:ln>
+        </p:spPr>
+        <p:style>
+          <a:lnRef idx="1">
+            <a:schemeClr val="accent1"/>
+          </a:lnRef>
+          <a:fillRef idx="3">
+            <a:schemeClr val="accent1"/>
+          </a:fillRef>
+          <a:effectRef idx="2">
+            <a:schemeClr val="accent1"/>
+          </a:effectRef>
+          <a:fontRef idx="minor">
+            <a:schemeClr val="lt1"/>
+          </a:fontRef>
+        </p:style>
+        <p:txBody>
+          <a:bodyPr rtlCol="0" anchor="ctr"/>
+          <a:lstStyle/>
+          <a:p>
+            <a:pPr algn="ctr"/>
+          </a:p>
+        </p:txBody>
+      </p:sp>
+      <p:graphicFrame>
+        <p:nvGraphicFramePr>
+          <p:cNvPr id="6" name="Table 5"/>
+          <p:cNvGraphicFramePr>
+            <a:graphicFrameLocks noGrp="1"/>
+          </p:cNvGraphicFramePr>
+          <p:nvPr/>
+        </p:nvGraphicFramePr>
+        <p:xfrm>
+          <a:off x="365760" y="1143000"/>
+          <a:ext cx="11430000" cy="3328416"/>
+        </p:xfrm>
+        <a:graphic>
+          <a:graphicData uri="http://schemas.openxmlformats.org/drawingml/2006/table">
+            <a:tbl>
+              <a:tblPr firstRow="1" bandRow="1">
+                <a:tableStyleId>{5C22544A-7EE6-4342-B048-85BDC9FD1C3A}</a:tableStyleId>
+              </a:tblPr>
+              <a:tblGrid>
+                <a:gridCol w="5715000"/>
+                <a:gridCol w="5715000"/>
+              </a:tblGrid>
+              <a:tr h="475488">
+                <a:tc>
+                  <a:txBody>
+                    <a:bodyPr wrap="square"/>
+                    <a:lstStyle/>
+                    <a:p>
+                      <a:r>
+                        <a:rPr sz="1100" b="1">
+                          <a:solidFill>
+                            <a:srgbClr val="FFFFFF"/>
+                          </a:solidFill>
+                          <a:latin typeface="Arial"/>
+                        </a:rPr>
+                        <a:t>Merkmal</a:t>
+                      </a:r>
+                    </a:p>
+                  </a:txBody>
+                  <a:tcPr>
+                    <a:solidFill>
+                      <a:srgbClr val="003DA5"/>
+                    </a:solidFill>
+                  </a:tcPr>
+                </a:tc>
+                <a:tc>
+                  <a:txBody>
+                    <a:bodyPr wrap="square"/>
+                    <a:lstStyle/>
+                    <a:p>
+                      <a:r>
+                        <a:rPr sz="1100" b="1">
+                          <a:solidFill>
+                            <a:srgbClr val="FFFFFF"/>
+                          </a:solidFill>
+                          <a:latin typeface="Arial"/>
+                        </a:rPr>
+                        <a:t>Detail</a:t>
+                      </a:r>
+                    </a:p>
+                  </a:txBody>
+                  <a:tcPr>
+                    <a:solidFill>
+                      <a:srgbClr val="003DA5"/>
+                    </a:solidFill>
+                  </a:tcPr>
+                </a:tc>
+              </a:tr>
+              <a:tr h="475488">
+                <a:tc>
+                  <a:txBody>
+                    <a:bodyPr wrap="square"/>
+                    <a:lstStyle/>
+                    <a:p>
+                      <a:r>
+                        <a:rPr sz="1100" b="0">
+                          <a:solidFill>
+                            <a:srgbClr val="1A1A1A"/>
+                          </a:solidFill>
+                          <a:latin typeface="Arial"/>
+                        </a:rPr>
+                        <a:t>Unternehmen</a:t>
+                      </a:r>
+                    </a:p>
+                  </a:txBody>
+                  <a:tcPr>
+                    <a:solidFill>
+                      <a:srgbClr val="FFFFFF"/>
+                    </a:solidFill>
+                  </a:tcPr>
+                </a:tc>
+                <a:tc>
+                  <a:txBody>
+                    <a:bodyPr wrap="square"/>
+                    <a:lstStyle/>
+                    <a:p>
+                      <a:r>
+                        <a:rPr sz="1100" b="0">
+                          <a:solidFill>
+                            <a:srgbClr val="1A1A1A"/>
+                          </a:solidFill>
+                          <a:latin typeface="Arial"/>
+                        </a:rPr>
+                        <a:t>Habermaier Präzisionsteile GmbH &amp; Co. KG</a:t>
+                      </a:r>
+                    </a:p>
+                  </a:txBody>
+                  <a:tcPr>
+                    <a:solidFill>
+                      <a:srgbClr val="FFFFFF"/>
+                    </a:solidFill>
+                  </a:tcPr>
+                </a:tc>
+              </a:tr>
+              <a:tr h="475488">
+                <a:tc>
+                  <a:txBody>
+                    <a:bodyPr wrap="square"/>
+                    <a:lstStyle/>
+                    <a:p>
+                      <a:r>
+                        <a:rPr sz="1100" b="0">
+                          <a:solidFill>
+                            <a:srgbClr val="1A1A1A"/>
+                          </a:solidFill>
+                          <a:latin typeface="Arial"/>
+                        </a:rPr>
+                        <a:t>Branche</a:t>
+                      </a:r>
+                    </a:p>
+                  </a:txBody>
+                  <a:tcPr>
+                    <a:solidFill>
+                      <a:srgbClr val="F4F6FA"/>
+                    </a:solidFill>
+                  </a:tcPr>
+                </a:tc>
+                <a:tc>
+                  <a:txBody>
+                    <a:bodyPr wrap="square"/>
+                    <a:lstStyle/>
+                    <a:p>
+                      <a:r>
+                        <a:rPr sz="1100" b="0">
+                          <a:solidFill>
+                            <a:srgbClr val="1A1A1A"/>
+                          </a:solidFill>
+                          <a:latin typeface="Arial"/>
+                        </a:rPr>
+                        <a:t>Präzisionsmechanik / Zulieferer Maschinenbau und Medizintechnik</a:t>
+                      </a:r>
+                    </a:p>
+                  </a:txBody>
+                  <a:tcPr>
+                    <a:solidFill>
+                      <a:srgbClr val="F4F6FA"/>
+                    </a:solidFill>
+                  </a:tcPr>
+                </a:tc>
+              </a:tr>
+              <a:tr h="475488">
+                <a:tc>
+                  <a:txBody>
+                    <a:bodyPr wrap="square"/>
+                    <a:lstStyle/>
+                    <a:p>
+                      <a:r>
+                        <a:rPr sz="1100" b="0">
+                          <a:solidFill>
+                            <a:srgbClr val="1A1A1A"/>
+                          </a:solidFill>
+                          <a:latin typeface="Arial"/>
+                        </a:rPr>
+                        <a:t>Standort</a:t>
+                      </a:r>
+                    </a:p>
+                  </a:txBody>
+                  <a:tcPr>
+                    <a:solidFill>
+                      <a:srgbClr val="FFFFFF"/>
+                    </a:solidFill>
+                  </a:tcPr>
+                </a:tc>
+                <a:tc>
+                  <a:txBody>
+                    <a:bodyPr wrap="square"/>
+                    <a:lstStyle/>
+                    <a:p>
+                      <a:r>
+                        <a:rPr sz="1100" b="0">
+                          <a:solidFill>
+                            <a:srgbClr val="1A1A1A"/>
+                          </a:solidFill>
+                          <a:latin typeface="Arial"/>
+                        </a:rPr>
+                        <a:t>Landsberg am Lech (Bayern)</a:t>
+                      </a:r>
+                    </a:p>
+                  </a:txBody>
+                  <a:tcPr>
+                    <a:solidFill>
+                      <a:srgbClr val="FFFFFF"/>
+                    </a:solidFill>
+                  </a:tcPr>
+                </a:tc>
+              </a:tr>
+              <a:tr h="475488">
+                <a:tc>
+                  <a:txBody>
+                    <a:bodyPr wrap="square"/>
+                    <a:lstStyle/>
+                    <a:p>
+                      <a:r>
+                        <a:rPr sz="1100" b="0">
+                          <a:solidFill>
+                            <a:srgbClr val="1A1A1A"/>
+                          </a:solidFill>
+                          <a:latin typeface="Arial"/>
+                        </a:rPr>
+                        <a:t>Größe</a:t>
+                      </a:r>
+                    </a:p>
+                  </a:txBody>
+                  <a:tcPr>
+                    <a:solidFill>
+                      <a:srgbClr val="F4F6FA"/>
+                    </a:solidFill>
+                  </a:tcPr>
+                </a:tc>
+                <a:tc>
+                  <a:txBody>
+                    <a:bodyPr wrap="square"/>
+                    <a:lstStyle/>
+                    <a:p>
+                      <a:r>
+                        <a:rPr sz="1100" b="0">
+                          <a:solidFill>
+                            <a:srgbClr val="1A1A1A"/>
+                          </a:solidFill>
+                          <a:latin typeface="Arial"/>
+                        </a:rPr>
+                        <a:t>62 Mitarbeiter, 3 Generationen im Familienbesitz</a:t>
+                      </a:r>
+                    </a:p>
+                  </a:txBody>
+                  <a:tcPr>
+                    <a:solidFill>
+                      <a:srgbClr val="F4F6FA"/>
+                    </a:solidFill>
+                  </a:tcPr>
+                </a:tc>
+              </a:tr>
+              <a:tr h="475488">
+                <a:tc>
+                  <a:txBody>
+                    <a:bodyPr wrap="square"/>
+                    <a:lstStyle/>
+                    <a:p>
+                      <a:r>
+                        <a:rPr sz="1100" b="0">
+                          <a:solidFill>
+                            <a:srgbClr val="1A1A1A"/>
+                          </a:solidFill>
+                          <a:latin typeface="Arial"/>
+                        </a:rPr>
+                        <a:t>Gesellschafter-GF</a:t>
+                      </a:r>
+                    </a:p>
+                  </a:txBody>
+                  <a:tcPr>
+                    <a:solidFill>
+                      <a:srgbClr val="FFFFFF"/>
+                    </a:solidFill>
+                  </a:tcPr>
+                </a:tc>
+                <a:tc>
+                  <a:txBody>
+                    <a:bodyPr wrap="square"/>
+                    <a:lstStyle/>
+                    <a:p>
+                      <a:r>
+                        <a:rPr sz="1100" b="0">
+                          <a:solidFill>
+                            <a:srgbClr val="1A1A1A"/>
+                          </a:solidFill>
+                          <a:latin typeface="Arial"/>
+                        </a:rPr>
+                        <a:t>Stefan Habermaier (47), Diplom-Ingenieur, zweite Generation</a:t>
+                      </a:r>
+                    </a:p>
+                  </a:txBody>
+                  <a:tcPr>
+                    <a:solidFill>
+                      <a:srgbClr val="FFFFFF"/>
+                    </a:solidFill>
+                  </a:tcPr>
+                </a:tc>
+              </a:tr>
+              <a:tr h="475488">
+                <a:tc>
+                  <a:txBody>
+                    <a:bodyPr wrap="square"/>
+                    <a:lstStyle/>
+                    <a:p>
+                      <a:r>
+                        <a:rPr sz="1100" b="0">
+                          <a:solidFill>
+                            <a:srgbClr val="1A1A1A"/>
+                          </a:solidFill>
+                          <a:latin typeface="Arial"/>
+                        </a:rPr>
+                        <a:t>Bankenverbindung</a:t>
+                      </a:r>
+                    </a:p>
+                  </a:txBody>
+                  <a:tcPr>
+                    <a:solidFill>
+                      <a:srgbClr val="F4F6FA"/>
+                    </a:solidFill>
+                  </a:tcPr>
+                </a:tc>
+                <a:tc>
+                  <a:txBody>
+                    <a:bodyPr wrap="square"/>
+                    <a:lstStyle/>
+                    <a:p>
+                      <a:r>
+                        <a:rPr sz="1100" b="0">
+                          <a:solidFill>
+                            <a:srgbClr val="1A1A1A"/>
+                          </a:solidFill>
+                          <a:latin typeface="Arial"/>
+                        </a:rPr>
+                        <a:t>VR-Bank seit 27 Jahren, Hauptbankverbindung</a:t>
+                      </a:r>
+                    </a:p>
+                  </a:txBody>
+                  <a:tcPr>
+                    <a:solidFill>
+                      <a:srgbClr val="F4F6FA"/>
+                    </a:solidFill>
+                  </a:tcPr>
+                </a:tc>
+              </a:tr>
+            </a:tbl>
+          </a:graphicData>
+        </a:graphic>
+      </p:graphicFrame>
+    </p:spTree>
+  </p:cSld>
+  <p:clrMapOvr>
+    <a:masterClrMapping/>
+  </p:clrMapOvr>
+</p:sld>
+</file>
+
+<file path=ppt/slides/slide12.xml><?xml version="1.0" encoding="utf-8"?>
+<p:sld xmlns:a="http://schemas.openxmlformats.org/drawingml/2006/main" xmlns:p="http://schemas.openxmlformats.org/presentationml/2006/main" xmlns:r="http://schemas.openxmlformats.org/officeDocument/2006/relationships">
+  <p:cSld>
+    <p:bg>
+      <p:bgPr>
+        <a:solidFill>
+          <a:srgbClr val="FFFFFF"/>
+        </a:solidFill>
+        <a:effectLst/>
+      </p:bgPr>
+    </p:bg>
+    <p:spTree>
+      <p:nvGrpSpPr>
+        <p:cNvPr id="1" name=""/>
+        <p:cNvGrpSpPr/>
+        <p:nvPr/>
+      </p:nvGrpSpPr>
+      <p:grpSpPr/>
+      <p:sp>
+        <p:nvSpPr>
+          <p:cNvPr id="2" name="Rectangle 1"/>
+          <p:cNvSpPr/>
+          <p:nvPr/>
+        </p:nvSpPr>
+        <p:spPr>
+          <a:xfrm>
+            <a:off x="0" y="0"/>
+            <a:ext cx="73152" cy="6858000"/>
+          </a:xfrm>
+          <a:prstGeom prst="rect">
+            <a:avLst/>
+          </a:prstGeom>
+          <a:solidFill>
+            <a:srgbClr val="003DA5"/>
+          </a:solidFill>
+          <a:ln>
+            <a:noFill/>
+          </a:ln>
+        </p:spPr>
+        <p:style>
+          <a:lnRef idx="1">
+            <a:schemeClr val="accent1"/>
+          </a:lnRef>
+          <a:fillRef idx="3">
+            <a:schemeClr val="accent1"/>
+          </a:fillRef>
+          <a:effectRef idx="2">
+            <a:schemeClr val="accent1"/>
+          </a:effectRef>
+          <a:fontRef idx="minor">
+            <a:schemeClr val="lt1"/>
+          </a:fontRef>
+        </p:style>
+        <p:txBody>
+          <a:bodyPr rtlCol="0" anchor="ctr"/>
+          <a:lstStyle/>
+          <a:p>
+            <a:pPr algn="ctr"/>
+          </a:p>
+        </p:txBody>
+      </p:sp>
+      <p:sp>
+        <p:nvSpPr>
+          <p:cNvPr id="3" name="TextBox 2"/>
+          <p:cNvSpPr txBox="1"/>
+          <p:nvPr/>
+        </p:nvSpPr>
+        <p:spPr>
+          <a:xfrm>
+            <a:off x="228600" y="182880"/>
+            <a:ext cx="11430000" cy="320040"/>
+          </a:xfrm>
+          <a:prstGeom prst="rect">
+            <a:avLst/>
+          </a:prstGeom>
+          <a:noFill/>
+        </p:spPr>
+        <p:txBody>
+          <a:bodyPr wrap="square">
+            <a:spAutoFit/>
+          </a:bodyPr>
+          <a:lstStyle/>
+          <a:p>
+            <a:pPr algn="l"/>
+            <a:r>
+              <a:rPr sz="900" b="0" i="0">
+                <a:solidFill>
+                  <a:srgbClr val="556575"/>
+                </a:solidFill>
+                <a:latin typeface="Arial"/>
+              </a:rPr>
+              <a:t>M03 · Modulinhalte</a:t>
+            </a:r>
+          </a:p>
+        </p:txBody>
+      </p:sp>
+      <p:sp>
+        <p:nvSpPr>
+          <p:cNvPr id="4" name="TextBox 3"/>
+          <p:cNvSpPr txBox="1"/>
+          <p:nvPr/>
+        </p:nvSpPr>
+        <p:spPr>
+          <a:xfrm>
+            <a:off x="365760" y="274320"/>
+            <a:ext cx="11430000" cy="777240"/>
+          </a:xfrm>
+          <a:prstGeom prst="rect">
+            <a:avLst/>
+          </a:prstGeom>
+          <a:noFill/>
+        </p:spPr>
+        <p:txBody>
+          <a:bodyPr wrap="square">
+            <a:spAutoFit/>
+          </a:bodyPr>
+          <a:lstStyle/>
+          <a:p>
+            <a:pPr algn="l"/>
+            <a:r>
+              <a:rPr sz="2200" b="1" i="0">
+                <a:solidFill>
+                  <a:srgbClr val="003DA5"/>
+                </a:solidFill>
+                <a:latin typeface="Arial"/>
+              </a:rPr>
+              <a:t>Finanzkennzahlen (Geschäftsjahre)</a:t>
+            </a:r>
+          </a:p>
+        </p:txBody>
+      </p:sp>
+      <p:sp>
+        <p:nvSpPr>
+          <p:cNvPr id="5" name="Rectangle 4"/>
+          <p:cNvSpPr/>
+          <p:nvPr/>
+        </p:nvSpPr>
+        <p:spPr>
+          <a:xfrm>
+            <a:off x="365760" y="1005840"/>
+            <a:ext cx="11430000" cy="27432"/>
+          </a:xfrm>
+          <a:prstGeom prst="rect">
+            <a:avLst/>
+          </a:prstGeom>
+          <a:solidFill>
+            <a:srgbClr val="D1D5DB"/>
+          </a:solidFill>
+          <a:ln>
+            <a:noFill/>
+          </a:ln>
+        </p:spPr>
+        <p:style>
+          <a:lnRef idx="1">
+            <a:schemeClr val="accent1"/>
+          </a:lnRef>
+          <a:fillRef idx="3">
+            <a:schemeClr val="accent1"/>
+          </a:fillRef>
+          <a:effectRef idx="2">
+            <a:schemeClr val="accent1"/>
+          </a:effectRef>
+          <a:fontRef idx="minor">
+            <a:schemeClr val="lt1"/>
+          </a:fontRef>
+        </p:style>
+        <p:txBody>
+          <a:bodyPr rtlCol="0" anchor="ctr"/>
+          <a:lstStyle/>
+          <a:p>
+            <a:pPr algn="ctr"/>
+          </a:p>
+        </p:txBody>
+      </p:sp>
+      <p:graphicFrame>
+        <p:nvGraphicFramePr>
+          <p:cNvPr id="6" name="Table 5"/>
+          <p:cNvGraphicFramePr>
+            <a:graphicFrameLocks noGrp="1"/>
+          </p:cNvGraphicFramePr>
+          <p:nvPr/>
+        </p:nvGraphicFramePr>
+        <p:xfrm>
+          <a:off x="365760" y="1143000"/>
+          <a:ext cx="11430000" cy="5029200"/>
+        </p:xfrm>
+        <a:graphic>
+          <a:graphicData uri="http://schemas.openxmlformats.org/drawingml/2006/table">
+            <a:tbl>
+              <a:tblPr firstRow="1" bandRow="1">
+                <a:tableStyleId>{5C22544A-7EE6-4342-B048-85BDC9FD1C3A}</a:tableStyleId>
+              </a:tblPr>
+              <a:tblGrid>
+                <a:gridCol w="3810000"/>
+                <a:gridCol w="3810000"/>
+                <a:gridCol w="3810000"/>
+              </a:tblGrid>
+              <a:tr h="457200">
+                <a:tc>
+                  <a:txBody>
+                    <a:bodyPr wrap="square"/>
+                    <a:lstStyle/>
+                    <a:p>
+                      <a:r>
+                        <a:rPr sz="1100" b="1">
+                          <a:solidFill>
+                            <a:srgbClr val="FFFFFF"/>
+                          </a:solidFill>
+                          <a:latin typeface="Arial"/>
+                        </a:rPr>
+                        <a:t>Kennzahl</a:t>
+                      </a:r>
+                    </a:p>
+                  </a:txBody>
+                  <a:tcPr>
+                    <a:solidFill>
+                      <a:srgbClr val="003DA5"/>
+                    </a:solidFill>
+                  </a:tcPr>
+                </a:tc>
+                <a:tc>
+                  <a:txBody>
+                    <a:bodyPr wrap="square"/>
+                    <a:lstStyle/>
+                    <a:p>
+                      <a:r>
+                        <a:rPr sz="1100" b="1">
+                          <a:solidFill>
+                            <a:srgbClr val="FFFFFF"/>
+                          </a:solidFill>
+                          <a:latin typeface="Arial"/>
+                        </a:rPr>
+                        <a:t>Jahr 3 (Ist)</a:t>
+                      </a:r>
+                    </a:p>
+                  </a:txBody>
+                  <a:tcPr>
+                    <a:solidFill>
+                      <a:srgbClr val="003DA5"/>
+                    </a:solidFill>
+                  </a:tcPr>
+                </a:tc>
+                <a:tc>
+                  <a:txBody>
+                    <a:bodyPr wrap="square"/>
+                    <a:lstStyle/>
+                    <a:p>
+                      <a:r>
+                        <a:rPr sz="1100" b="1">
+                          <a:solidFill>
+                            <a:srgbClr val="FFFFFF"/>
+                          </a:solidFill>
+                          <a:latin typeface="Arial"/>
+                        </a:rPr>
+                        <a:t>Jahr 4 (Ist)</a:t>
+                      </a:r>
+                    </a:p>
+                  </a:txBody>
+                  <a:tcPr>
+                    <a:solidFill>
+                      <a:srgbClr val="003DA5"/>
+                    </a:solidFill>
+                  </a:tcPr>
+                </a:tc>
+              </a:tr>
+              <a:tr h="457200">
+                <a:tc>
+                  <a:txBody>
+                    <a:bodyPr wrap="square"/>
+                    <a:lstStyle/>
+                    <a:p>
+                      <a:r>
+                        <a:rPr sz="1100" b="0">
+                          <a:solidFill>
+                            <a:srgbClr val="1A1A1A"/>
+                          </a:solidFill>
+                          <a:latin typeface="Arial"/>
+                        </a:rPr>
+                        <a:t>Umsatz</a:t>
+                      </a:r>
+                    </a:p>
+                  </a:txBody>
+                  <a:tcPr>
+                    <a:solidFill>
+                      <a:srgbClr val="FFFFFF"/>
+                    </a:solidFill>
+                  </a:tcPr>
+                </a:tc>
+                <a:tc>
+                  <a:txBody>
+                    <a:bodyPr wrap="square"/>
+                    <a:lstStyle/>
+                    <a:p>
+                      <a:r>
+                        <a:rPr sz="1100" b="0">
+                          <a:solidFill>
+                            <a:srgbClr val="1A1A1A"/>
+                          </a:solidFill>
+                          <a:latin typeface="Arial"/>
+                        </a:rPr>
+                        <a:t>9,8 Mio. EUR</a:t>
+                      </a:r>
+                    </a:p>
+                  </a:txBody>
+                  <a:tcPr>
+                    <a:solidFill>
+                      <a:srgbClr val="FFFFFF"/>
+                    </a:solidFill>
+                  </a:tcPr>
+                </a:tc>
+                <a:tc>
+                  <a:txBody>
+                    <a:bodyPr wrap="square"/>
+                    <a:lstStyle/>
+                    <a:p>
+                      <a:r>
+                        <a:rPr sz="1100" b="0">
+                          <a:solidFill>
+                            <a:srgbClr val="1A1A1A"/>
+                          </a:solidFill>
+                          <a:latin typeface="Arial"/>
+                        </a:rPr>
+                        <a:t>11,4 Mio. EUR</a:t>
+                      </a:r>
+                    </a:p>
+                  </a:txBody>
+                  <a:tcPr>
+                    <a:solidFill>
+                      <a:srgbClr val="FFFFFF"/>
+                    </a:solidFill>
+                  </a:tcPr>
+                </a:tc>
+              </a:tr>
+              <a:tr h="457200">
+                <a:tc>
+                  <a:txBody>
+                    <a:bodyPr wrap="square"/>
+                    <a:lstStyle/>
+                    <a:p>
+                      <a:r>
+                        <a:rPr sz="1100" b="0">
+                          <a:solidFill>
+                            <a:srgbClr val="1A1A1A"/>
+                          </a:solidFill>
+                          <a:latin typeface="Arial"/>
+                        </a:rPr>
+                        <a:t>EBITDA</a:t>
+                      </a:r>
+                    </a:p>
+                  </a:txBody>
+                  <a:tcPr>
+                    <a:solidFill>
+                      <a:srgbClr val="F4F6FA"/>
+                    </a:solidFill>
+                  </a:tcPr>
+                </a:tc>
+                <a:tc>
+                  <a:txBody>
+                    <a:bodyPr wrap="square"/>
+                    <a:lstStyle/>
+                    <a:p>
+                      <a:r>
+                        <a:rPr sz="1100" b="0">
+                          <a:solidFill>
+                            <a:srgbClr val="1A1A1A"/>
+                          </a:solidFill>
+                          <a:latin typeface="Arial"/>
+                        </a:rPr>
+                        <a:t>1,18 Mio. EUR</a:t>
+                      </a:r>
+                    </a:p>
+                  </a:txBody>
+                  <a:tcPr>
+                    <a:solidFill>
+                      <a:srgbClr val="F4F6FA"/>
+                    </a:solidFill>
+                  </a:tcPr>
+                </a:tc>
+                <a:tc>
+                  <a:txBody>
+                    <a:bodyPr wrap="square"/>
+                    <a:lstStyle/>
+                    <a:p>
+                      <a:r>
+                        <a:rPr sz="1100" b="0">
+                          <a:solidFill>
+                            <a:srgbClr val="1A1A1A"/>
+                          </a:solidFill>
+                          <a:latin typeface="Arial"/>
+                        </a:rPr>
+                        <a:t>1,48 Mio. EUR</a:t>
+                      </a:r>
+                    </a:p>
+                  </a:txBody>
+                  <a:tcPr>
+                    <a:solidFill>
+                      <a:srgbClr val="F4F6FA"/>
+                    </a:solidFill>
+                  </a:tcPr>
+                </a:tc>
+              </a:tr>
+              <a:tr h="457200">
+                <a:tc>
+                  <a:txBody>
+                    <a:bodyPr wrap="square"/>
+                    <a:lstStyle/>
+                    <a:p>
+                      <a:r>
+                        <a:rPr sz="1100" b="0">
+                          <a:solidFill>
+                            <a:srgbClr val="1A1A1A"/>
+                          </a:solidFill>
+                          <a:latin typeface="Arial"/>
+                        </a:rPr>
+                        <a:t>EBITDA-Marge</a:t>
+                      </a:r>
+                    </a:p>
+                  </a:txBody>
+                  <a:tcPr>
+                    <a:solidFill>
+                      <a:srgbClr val="FFFFFF"/>
+                    </a:solidFill>
+                  </a:tcPr>
+                </a:tc>
+                <a:tc>
+                  <a:txBody>
+                    <a:bodyPr wrap="square"/>
+                    <a:lstStyle/>
+                    <a:p>
+                      <a:r>
+                        <a:rPr sz="1100" b="0">
+                          <a:solidFill>
+                            <a:srgbClr val="1A1A1A"/>
+                          </a:solidFill>
+                          <a:latin typeface="Arial"/>
+                        </a:rPr>
+                        <a:t>12,0 %</a:t>
+                      </a:r>
+                    </a:p>
+                  </a:txBody>
+                  <a:tcPr>
+                    <a:solidFill>
+                      <a:srgbClr val="FFFFFF"/>
+                    </a:solidFill>
+                  </a:tcPr>
+                </a:tc>
+                <a:tc>
+                  <a:txBody>
+                    <a:bodyPr wrap="square"/>
+                    <a:lstStyle/>
+                    <a:p>
+                      <a:r>
+                        <a:rPr sz="1100" b="0">
+                          <a:solidFill>
+                            <a:srgbClr val="1A1A1A"/>
+                          </a:solidFill>
+                          <a:latin typeface="Arial"/>
+                        </a:rPr>
+                        <a:t>13,0 %</a:t>
+                      </a:r>
+                    </a:p>
+                  </a:txBody>
+                  <a:tcPr>
+                    <a:solidFill>
+                      <a:srgbClr val="FFFFFF"/>
+                    </a:solidFill>
+                  </a:tcPr>
+                </a:tc>
+              </a:tr>
+              <a:tr h="457200">
+                <a:tc>
+                  <a:txBody>
+                    <a:bodyPr wrap="square"/>
+                    <a:lstStyle/>
+                    <a:p>
+                      <a:r>
+                        <a:rPr sz="1100" b="0">
+                          <a:solidFill>
+                            <a:srgbClr val="1A1A1A"/>
+                          </a:solidFill>
+                          <a:latin typeface="Arial"/>
+                        </a:rPr>
+                        <a:t>Jahresüberschuss</a:t>
+                      </a:r>
+                    </a:p>
+                  </a:txBody>
+                  <a:tcPr>
+                    <a:solidFill>
+                      <a:srgbClr val="F4F6FA"/>
+                    </a:solidFill>
+                  </a:tcPr>
+                </a:tc>
+                <a:tc>
+                  <a:txBody>
+                    <a:bodyPr wrap="square"/>
+                    <a:lstStyle/>
+                    <a:p>
+                      <a:r>
+                        <a:rPr sz="1100" b="0">
+                          <a:solidFill>
+                            <a:srgbClr val="1A1A1A"/>
+                          </a:solidFill>
+                          <a:latin typeface="Arial"/>
+                        </a:rPr>
+                        <a:t>294 TEUR</a:t>
+                      </a:r>
+                    </a:p>
+                  </a:txBody>
+                  <a:tcPr>
+                    <a:solidFill>
+                      <a:srgbClr val="F4F6FA"/>
+                    </a:solidFill>
+                  </a:tcPr>
+                </a:tc>
+                <a:tc>
+                  <a:txBody>
+                    <a:bodyPr wrap="square"/>
+                    <a:lstStyle/>
+                    <a:p>
+                      <a:r>
+                        <a:rPr sz="1100" b="0">
+                          <a:solidFill>
+                            <a:srgbClr val="1A1A1A"/>
+                          </a:solidFill>
+                          <a:latin typeface="Arial"/>
+                        </a:rPr>
+                        <a:t>398 TEUR</a:t>
+                      </a:r>
+                    </a:p>
+                  </a:txBody>
+                  <a:tcPr>
+                    <a:solidFill>
+                      <a:srgbClr val="F4F6FA"/>
+                    </a:solidFill>
+                  </a:tcPr>
+                </a:tc>
+              </a:tr>
+              <a:tr h="457200">
+                <a:tc>
+                  <a:txBody>
+                    <a:bodyPr wrap="square"/>
+                    <a:lstStyle/>
+                    <a:p>
+                      <a:r>
+                        <a:rPr sz="1100" b="0">
+                          <a:solidFill>
+                            <a:srgbClr val="1A1A1A"/>
+                          </a:solidFill>
+                          <a:latin typeface="Arial"/>
+                        </a:rPr>
+                        <a:t>Eigenkapital</a:t>
+                      </a:r>
+                    </a:p>
+                  </a:txBody>
+                  <a:tcPr>
+                    <a:solidFill>
+                      <a:srgbClr val="FFFFFF"/>
+                    </a:solidFill>
+                  </a:tcPr>
+                </a:tc>
+                <a:tc>
+                  <a:txBody>
+                    <a:bodyPr wrap="square"/>
+                    <a:lstStyle/>
+                    <a:p>
+                      <a:r>
+                        <a:rPr sz="1100" b="0">
+                          <a:solidFill>
+                            <a:srgbClr val="1A1A1A"/>
+                          </a:solidFill>
+                          <a:latin typeface="Arial"/>
+                        </a:rPr>
+                        <a:t>2,1 Mio. EUR</a:t>
+                      </a:r>
+                    </a:p>
+                  </a:txBody>
+                  <a:tcPr>
+                    <a:solidFill>
+                      <a:srgbClr val="FFFFFF"/>
+                    </a:solidFill>
+                  </a:tcPr>
+                </a:tc>
+                <a:tc>
+                  <a:txBody>
+                    <a:bodyPr wrap="square"/>
+                    <a:lstStyle/>
+                    <a:p>
+                      <a:r>
+                        <a:rPr sz="1100" b="0">
+                          <a:solidFill>
+                            <a:srgbClr val="1A1A1A"/>
+                          </a:solidFill>
+                          <a:latin typeface="Arial"/>
+                        </a:rPr>
+                        <a:t>2,5 Mio. EUR</a:t>
+                      </a:r>
+                    </a:p>
+                  </a:txBody>
+                  <a:tcPr>
+                    <a:solidFill>
+                      <a:srgbClr val="FFFFFF"/>
+                    </a:solidFill>
+                  </a:tcPr>
+                </a:tc>
+              </a:tr>
+              <a:tr h="457200">
+                <a:tc>
+                  <a:txBody>
+                    <a:bodyPr wrap="square"/>
+                    <a:lstStyle/>
+                    <a:p>
+                      <a:r>
+                        <a:rPr sz="1100" b="0">
+                          <a:solidFill>
+                            <a:srgbClr val="1A1A1A"/>
+                          </a:solidFill>
+                          <a:latin typeface="Arial"/>
+                        </a:rPr>
+                        <a:t>Bilanzsumme</a:t>
+                      </a:r>
+                    </a:p>
+                  </a:txBody>
+                  <a:tcPr>
+                    <a:solidFill>
+                      <a:srgbClr val="F4F6FA"/>
+                    </a:solidFill>
+                  </a:tcPr>
+                </a:tc>
+                <a:tc>
+                  <a:txBody>
+                    <a:bodyPr wrap="square"/>
+                    <a:lstStyle/>
+                    <a:p>
+                      <a:r>
+                        <a:rPr sz="1100" b="0">
+                          <a:solidFill>
+                            <a:srgbClr val="1A1A1A"/>
+                          </a:solidFill>
+                          <a:latin typeface="Arial"/>
+                        </a:rPr>
+                        <a:t>7,6 Mio. EUR</a:t>
+                      </a:r>
+                    </a:p>
+                  </a:txBody>
+                  <a:tcPr>
+                    <a:solidFill>
+                      <a:srgbClr val="F4F6FA"/>
+                    </a:solidFill>
+                  </a:tcPr>
+                </a:tc>
+                <a:tc>
+                  <a:txBody>
+                    <a:bodyPr wrap="square"/>
+                    <a:lstStyle/>
+                    <a:p>
+                      <a:r>
+                        <a:rPr sz="1100" b="0">
+                          <a:solidFill>
+                            <a:srgbClr val="1A1A1A"/>
+                          </a:solidFill>
+                          <a:latin typeface="Arial"/>
+                        </a:rPr>
+                        <a:t>8,1 Mio. EUR</a:t>
+                      </a:r>
+                    </a:p>
+                  </a:txBody>
+                  <a:tcPr>
+                    <a:solidFill>
+                      <a:srgbClr val="F4F6FA"/>
+                    </a:solidFill>
+                  </a:tcPr>
+                </a:tc>
+              </a:tr>
+              <a:tr h="457200">
+                <a:tc>
+                  <a:txBody>
+                    <a:bodyPr wrap="square"/>
+                    <a:lstStyle/>
+                    <a:p>
+                      <a:r>
+                        <a:rPr sz="1100" b="0">
+                          <a:solidFill>
+                            <a:srgbClr val="1A1A1A"/>
+                          </a:solidFill>
+                          <a:latin typeface="Arial"/>
+                        </a:rPr>
+                        <a:t>EK-Quote</a:t>
+                      </a:r>
+                    </a:p>
+                  </a:txBody>
+                  <a:tcPr>
+                    <a:solidFill>
+                      <a:srgbClr val="FFFFFF"/>
+                    </a:solidFill>
+                  </a:tcPr>
+                </a:tc>
+                <a:tc>
+                  <a:txBody>
+                    <a:bodyPr wrap="square"/>
+                    <a:lstStyle/>
+                    <a:p>
+                      <a:r>
+                        <a:rPr sz="1100" b="0">
+                          <a:solidFill>
+                            <a:srgbClr val="1A1A1A"/>
+                          </a:solidFill>
+                          <a:latin typeface="Arial"/>
+                        </a:rPr>
+                        <a:t>27,6 %</a:t>
+                      </a:r>
+                    </a:p>
+                  </a:txBody>
+                  <a:tcPr>
+                    <a:solidFill>
+                      <a:srgbClr val="FFFFFF"/>
+                    </a:solidFill>
+                  </a:tcPr>
+                </a:tc>
+                <a:tc>
+                  <a:txBody>
+                    <a:bodyPr wrap="square"/>
+                    <a:lstStyle/>
+                    <a:p>
+                      <a:r>
+                        <a:rPr sz="1100" b="0">
+                          <a:solidFill>
+                            <a:srgbClr val="1A1A1A"/>
+                          </a:solidFill>
+                          <a:latin typeface="Arial"/>
+                        </a:rPr>
+                        <a:t>30,9 %</a:t>
+                      </a:r>
+                    </a:p>
+                  </a:txBody>
+                  <a:tcPr>
+                    <a:solidFill>
+                      <a:srgbClr val="FFFFFF"/>
+                    </a:solidFill>
+                  </a:tcPr>
+                </a:tc>
+              </a:tr>
+              <a:tr h="457200">
+                <a:tc>
+                  <a:txBody>
+                    <a:bodyPr wrap="square"/>
+                    <a:lstStyle/>
+                    <a:p>
+                      <a:r>
+                        <a:rPr sz="1100" b="0">
+                          <a:solidFill>
+                            <a:srgbClr val="1A1A1A"/>
+                          </a:solidFill>
+                          <a:latin typeface="Arial"/>
+                        </a:rPr>
+                        <a:t>Nettofinanzverbindl.</a:t>
+                      </a:r>
+                    </a:p>
+                  </a:txBody>
+                  <a:tcPr>
+                    <a:solidFill>
+                      <a:srgbClr val="F4F6FA"/>
+                    </a:solidFill>
+                  </a:tcPr>
+                </a:tc>
+                <a:tc>
+                  <a:txBody>
+                    <a:bodyPr wrap="square"/>
+                    <a:lstStyle/>
+                    <a:p>
+                      <a:r>
+                        <a:rPr sz="1100" b="0">
+                          <a:solidFill>
+                            <a:srgbClr val="1A1A1A"/>
+                          </a:solidFill>
+                          <a:latin typeface="Arial"/>
+                        </a:rPr>
+                        <a:t>2,8 Mio. EUR</a:t>
+                      </a:r>
+                    </a:p>
+                  </a:txBody>
+                  <a:tcPr>
+                    <a:solidFill>
+                      <a:srgbClr val="F4F6FA"/>
+                    </a:solidFill>
+                  </a:tcPr>
+                </a:tc>
+                <a:tc>
+                  <a:txBody>
+                    <a:bodyPr wrap="square"/>
+                    <a:lstStyle/>
+                    <a:p>
+                      <a:r>
+                        <a:rPr sz="1100" b="0">
+                          <a:solidFill>
+                            <a:srgbClr val="1A1A1A"/>
+                          </a:solidFill>
+                          <a:latin typeface="Arial"/>
+                        </a:rPr>
+                        <a:t>2,4 Mio. EUR</a:t>
+                      </a:r>
+                    </a:p>
+                  </a:txBody>
+                  <a:tcPr>
+                    <a:solidFill>
+                      <a:srgbClr val="F4F6FA"/>
+                    </a:solidFill>
+                  </a:tcPr>
+                </a:tc>
+              </a:tr>
+              <a:tr h="457200">
+                <a:tc>
+                  <a:txBody>
+                    <a:bodyPr wrap="square"/>
+                    <a:lstStyle/>
+                    <a:p>
+                      <a:r>
+                        <a:rPr sz="1100" b="0">
+                          <a:solidFill>
+                            <a:srgbClr val="1A1A1A"/>
+                          </a:solidFill>
+                          <a:latin typeface="Arial"/>
+                        </a:rPr>
+                        <a:t>Leverage (NFK/EBITDA)</a:t>
+                      </a:r>
+                    </a:p>
+                  </a:txBody>
+                  <a:tcPr>
+                    <a:solidFill>
+                      <a:srgbClr val="FFFFFF"/>
+                    </a:solidFill>
+                  </a:tcPr>
+                </a:tc>
+                <a:tc>
+                  <a:txBody>
+                    <a:bodyPr wrap="square"/>
+                    <a:lstStyle/>
+                    <a:p>
+                      <a:r>
+                        <a:rPr sz="1100" b="0">
+                          <a:solidFill>
+                            <a:srgbClr val="1A1A1A"/>
+                          </a:solidFill>
+                          <a:latin typeface="Arial"/>
+                        </a:rPr>
+                        <a:t>2,37x</a:t>
+                      </a:r>
+                    </a:p>
+                  </a:txBody>
+                  <a:tcPr>
+                    <a:solidFill>
+                      <a:srgbClr val="FFFFFF"/>
+                    </a:solidFill>
+                  </a:tcPr>
+                </a:tc>
+                <a:tc>
+                  <a:txBody>
+                    <a:bodyPr wrap="square"/>
+                    <a:lstStyle/>
+                    <a:p>
+                      <a:r>
+                        <a:rPr sz="1100" b="0">
+                          <a:solidFill>
+                            <a:srgbClr val="1A1A1A"/>
+                          </a:solidFill>
+                          <a:latin typeface="Arial"/>
+                        </a:rPr>
+                        <a:t>1,62x</a:t>
+                      </a:r>
+                    </a:p>
+                  </a:txBody>
+                  <a:tcPr>
+                    <a:solidFill>
+                      <a:srgbClr val="FFFFFF"/>
+                    </a:solidFill>
+                  </a:tcPr>
+                </a:tc>
+              </a:tr>
+              <a:tr h="457200">
+                <a:tc>
+                  <a:txBody>
+                    <a:bodyPr wrap="square"/>
+                    <a:lstStyle/>
+                    <a:p>
+                      <a:r>
+                        <a:rPr sz="1100" b="0">
+                          <a:solidFill>
+                            <a:srgbClr val="1A1A1A"/>
+                          </a:solidFill>
+                          <a:latin typeface="Arial"/>
+                        </a:rPr>
+                        <a:t>Free Cashflow</a:t>
+                      </a:r>
+                    </a:p>
+                  </a:txBody>
+                  <a:tcPr>
+                    <a:solidFill>
+                      <a:srgbClr val="F4F6FA"/>
+                    </a:solidFill>
+                  </a:tcPr>
+                </a:tc>
+                <a:tc>
+                  <a:txBody>
+                    <a:bodyPr wrap="square"/>
+                    <a:lstStyle/>
+                    <a:p>
+                      <a:r>
+                        <a:rPr sz="1100" b="0">
+                          <a:solidFill>
+                            <a:srgbClr val="1A1A1A"/>
+                          </a:solidFill>
+                          <a:latin typeface="Arial"/>
+                        </a:rPr>
+                        <a:t>420 TEUR</a:t>
+                      </a:r>
+                    </a:p>
+                  </a:txBody>
+                  <a:tcPr>
+                    <a:solidFill>
+                      <a:srgbClr val="F4F6FA"/>
+                    </a:solidFill>
+                  </a:tcPr>
+                </a:tc>
+                <a:tc>
+                  <a:txBody>
+                    <a:bodyPr wrap="square"/>
+                    <a:lstStyle/>
+                    <a:p>
+                      <a:r>
+                        <a:rPr sz="1100" b="0">
+                          <a:solidFill>
+                            <a:srgbClr val="1A1A1A"/>
+                          </a:solidFill>
+                          <a:latin typeface="Arial"/>
+                        </a:rPr>
+                        <a:t>590 TEUR</a:t>
+                      </a:r>
+                    </a:p>
+                  </a:txBody>
+                  <a:tcPr>
+                    <a:solidFill>
+                      <a:srgbClr val="F4F6FA"/>
+                    </a:solidFill>
+                  </a:tcPr>
+                </a:tc>
+              </a:tr>
+            </a:tbl>
+          </a:graphicData>
+        </a:graphic>
+      </p:graphicFrame>
+    </p:spTree>
+  </p:cSld>
+  <p:clrMapOvr>
+    <a:masterClrMapping/>
+  </p:clrMapOvr>
+</p:sld>
+</file>
+
+<file path=ppt/slides/slide13.xml><?xml version="1.0" encoding="utf-8"?>
+<p:sld xmlns:a="http://schemas.openxmlformats.org/drawingml/2006/main" xmlns:p="http://schemas.openxmlformats.org/presentationml/2006/main" xmlns:r="http://schemas.openxmlformats.org/officeDocument/2006/relationships">
+  <p:cSld>
+    <p:bg>
+      <p:bgPr>
+        <a:solidFill>
+          <a:srgbClr val="FFFFFF"/>
+        </a:solidFill>
+        <a:effectLst/>
+      </p:bgPr>
+    </p:bg>
+    <p:spTree>
+      <p:nvGrpSpPr>
+        <p:cNvPr id="1" name=""/>
+        <p:cNvGrpSpPr/>
+        <p:nvPr/>
+      </p:nvGrpSpPr>
+      <p:grpSpPr/>
+      <p:sp>
+        <p:nvSpPr>
+          <p:cNvPr id="2" name="Rectangle 1"/>
+          <p:cNvSpPr/>
+          <p:nvPr/>
+        </p:nvSpPr>
+        <p:spPr>
+          <a:xfrm>
+            <a:off x="0" y="0"/>
+            <a:ext cx="73152" cy="6858000"/>
+          </a:xfrm>
+          <a:prstGeom prst="rect">
+            <a:avLst/>
+          </a:prstGeom>
+          <a:solidFill>
+            <a:srgbClr val="003DA5"/>
+          </a:solidFill>
+          <a:ln>
+            <a:noFill/>
+          </a:ln>
+        </p:spPr>
+        <p:style>
+          <a:lnRef idx="1">
+            <a:schemeClr val="accent1"/>
+          </a:lnRef>
+          <a:fillRef idx="3">
+            <a:schemeClr val="accent1"/>
+          </a:fillRef>
+          <a:effectRef idx="2">
+            <a:schemeClr val="accent1"/>
+          </a:effectRef>
+          <a:fontRef idx="minor">
+            <a:schemeClr val="lt1"/>
+          </a:fontRef>
+        </p:style>
+        <p:txBody>
+          <a:bodyPr rtlCol="0" anchor="ctr"/>
+          <a:lstStyle/>
+          <a:p>
+            <a:pPr algn="ctr"/>
+          </a:p>
+        </p:txBody>
+      </p:sp>
+      <p:sp>
+        <p:nvSpPr>
+          <p:cNvPr id="3" name="TextBox 2"/>
+          <p:cNvSpPr txBox="1"/>
+          <p:nvPr/>
+        </p:nvSpPr>
+        <p:spPr>
+          <a:xfrm>
+            <a:off x="228600" y="182880"/>
+            <a:ext cx="11430000" cy="320040"/>
+          </a:xfrm>
+          <a:prstGeom prst="rect">
+            <a:avLst/>
+          </a:prstGeom>
+          <a:noFill/>
+        </p:spPr>
+        <p:txBody>
+          <a:bodyPr wrap="square">
+            <a:spAutoFit/>
+          </a:bodyPr>
+          <a:lstStyle/>
+          <a:p>
+            <a:pPr algn="l"/>
+            <a:r>
+              <a:rPr sz="900" b="0" i="0">
+                <a:solidFill>
+                  <a:srgbClr val="556575"/>
+                </a:solidFill>
+                <a:latin typeface="Arial"/>
+              </a:rPr>
+              <a:t>M03 · Modulinhalte</a:t>
+            </a:r>
+          </a:p>
+        </p:txBody>
+      </p:sp>
+      <p:sp>
+        <p:nvSpPr>
+          <p:cNvPr id="4" name="TextBox 3"/>
+          <p:cNvSpPr txBox="1"/>
+          <p:nvPr/>
+        </p:nvSpPr>
+        <p:spPr>
+          <a:xfrm>
+            <a:off x="365760" y="274320"/>
+            <a:ext cx="11430000" cy="777240"/>
+          </a:xfrm>
+          <a:prstGeom prst="rect">
+            <a:avLst/>
+          </a:prstGeom>
+          <a:noFill/>
+        </p:spPr>
+        <p:txBody>
+          <a:bodyPr wrap="square">
+            <a:spAutoFit/>
+          </a:bodyPr>
+          <a:lstStyle/>
+          <a:p>
+            <a:pPr algn="l"/>
+            <a:r>
+              <a:rPr sz="2200" b="1" i="0">
+                <a:solidFill>
+                  <a:srgbClr val="003DA5"/>
+                </a:solidFill>
+                <a:latin typeface="Arial"/>
+              </a:rPr>
+              <a:t>Strategische Ausgangslage</a:t>
+            </a:r>
+          </a:p>
+        </p:txBody>
+      </p:sp>
+      <p:sp>
+        <p:nvSpPr>
+          <p:cNvPr id="5" name="Rectangle 4"/>
+          <p:cNvSpPr/>
+          <p:nvPr/>
+        </p:nvSpPr>
+        <p:spPr>
+          <a:xfrm>
+            <a:off x="365760" y="1005840"/>
+            <a:ext cx="11430000" cy="27432"/>
+          </a:xfrm>
+          <a:prstGeom prst="rect">
+            <a:avLst/>
+          </a:prstGeom>
+          <a:solidFill>
+            <a:srgbClr val="D1D5DB"/>
+          </a:solidFill>
+          <a:ln>
+            <a:noFill/>
+          </a:ln>
+        </p:spPr>
+        <p:style>
+          <a:lnRef idx="1">
+            <a:schemeClr val="accent1"/>
+          </a:lnRef>
+          <a:fillRef idx="3">
+            <a:schemeClr val="accent1"/>
+          </a:fillRef>
+          <a:effectRef idx="2">
+            <a:schemeClr val="accent1"/>
+          </a:effectRef>
+          <a:fontRef idx="minor">
+            <a:schemeClr val="lt1"/>
+          </a:fontRef>
+        </p:style>
+        <p:txBody>
+          <a:bodyPr rtlCol="0" anchor="ctr"/>
+          <a:lstStyle/>
+          <a:p>
+            <a:pPr algn="ctr"/>
+          </a:p>
+        </p:txBody>
+      </p:sp>
+      <p:sp>
+        <p:nvSpPr>
+          <p:cNvPr id="6" name="TextBox 5"/>
+          <p:cNvSpPr txBox="1"/>
+          <p:nvPr/>
+        </p:nvSpPr>
+        <p:spPr>
+          <a:xfrm>
+            <a:off x="365760" y="1143000"/>
+            <a:ext cx="11430000" cy="5212080"/>
+          </a:xfrm>
+          <a:prstGeom prst="rect">
+            <a:avLst/>
+          </a:prstGeom>
+          <a:noFill/>
+        </p:spPr>
+        <p:txBody>
+          <a:bodyPr wrap="square">
+            <a:spAutoFit/>
+          </a:bodyPr>
+          <a:lstStyle/>
+          <a:p>
+            <a:pPr>
+              <a:spcBef>
+                <a:spcPts val="500"/>
+              </a:spcBef>
+            </a:pPr>
+            <a:r>
+              <a:rPr sz="1500">
+                <a:solidFill>
+                  <a:srgbClr val="003DA5"/>
+                </a:solidFill>
+                <a:latin typeface="Arial"/>
+              </a:rPr>
+              <a:t>▪  </a:t>
+            </a:r>
+            <a:r>
+              <a:rPr sz="1700">
+                <a:solidFill>
+                  <a:srgbClr val="1A1A1A"/>
+                </a:solidFill>
+                <a:latin typeface="Arial"/>
+              </a:rPr>
+              <a:t>Stefan Habermaier hat Sie zum Jahresgespräch eingeladen. Im Vorlauf hat er angedeutet, dass er „größere Pläne" hat. Folgender Sachverhalt zeichnet sich ab:</a:t>
+            </a:r>
+          </a:p>
+          <a:p>
+            <a:pPr>
+              <a:spcBef>
+                <a:spcPts val="500"/>
+              </a:spcBef>
+            </a:pPr>
+            <a:r>
+              <a:rPr sz="1500">
+                <a:solidFill>
+                  <a:srgbClr val="003DA5"/>
+                </a:solidFill>
+                <a:latin typeface="Arial"/>
+              </a:rPr>
+              <a:t>▪  </a:t>
+            </a:r>
+            <a:r>
+              <a:rPr sz="1700">
+                <a:solidFill>
+                  <a:srgbClr val="1A1A1A"/>
+                </a:solidFill>
+                <a:latin typeface="Arial"/>
+              </a:rPr>
+              <a:t>- Ein Medizintechnik-Konzern (Auftragsvolumen derzeit 18 % vom Umsatz) hat eine langfristige Rahmenvereinbarung angeboten, die eine Umsatzsteigerung auf ca. 16…</a:t>
+            </a:r>
+          </a:p>
+        </p:txBody>
+      </p:sp>
+    </p:spTree>
+  </p:cSld>
+  <p:clrMapOvr>
+    <a:masterClrMapping/>
+  </p:clrMapOvr>
+</p:sld>
+</file>
+
+<file path=ppt/slides/slide14.xml><?xml version="1.0" encoding="utf-8"?>
+<p:sld xmlns:a="http://schemas.openxmlformats.org/drawingml/2006/main" xmlns:p="http://schemas.openxmlformats.org/presentationml/2006/main" xmlns:r="http://schemas.openxmlformats.org/officeDocument/2006/relationships">
+  <p:cSld>
+    <p:bg>
+      <p:bgPr>
+        <a:solidFill>
+          <a:srgbClr val="FFFFFF"/>
+        </a:solidFill>
+        <a:effectLst/>
+      </p:bgPr>
+    </p:bg>
+    <p:spTree>
+      <p:nvGrpSpPr>
+        <p:cNvPr id="1" name=""/>
+        <p:cNvGrpSpPr/>
+        <p:nvPr/>
+      </p:nvGrpSpPr>
+      <p:grpSpPr/>
+      <p:sp>
+        <p:nvSpPr>
+          <p:cNvPr id="2" name="Rectangle 1"/>
+          <p:cNvSpPr/>
+          <p:nvPr/>
+        </p:nvSpPr>
+        <p:spPr>
+          <a:xfrm>
+            <a:off x="0" y="0"/>
+            <a:ext cx="73152" cy="6858000"/>
+          </a:xfrm>
+          <a:prstGeom prst="rect">
+            <a:avLst/>
+          </a:prstGeom>
+          <a:solidFill>
+            <a:srgbClr val="003DA5"/>
+          </a:solidFill>
+          <a:ln>
+            <a:noFill/>
+          </a:ln>
+        </p:spPr>
+        <p:style>
+          <a:lnRef idx="1">
+            <a:schemeClr val="accent1"/>
+          </a:lnRef>
+          <a:fillRef idx="3">
+            <a:schemeClr val="accent1"/>
+          </a:fillRef>
+          <a:effectRef idx="2">
+            <a:schemeClr val="accent1"/>
+          </a:effectRef>
+          <a:fontRef idx="minor">
+            <a:schemeClr val="lt1"/>
+          </a:fontRef>
+        </p:style>
+        <p:txBody>
+          <a:bodyPr rtlCol="0" anchor="ctr"/>
+          <a:lstStyle/>
+          <a:p>
+            <a:pPr algn="ctr"/>
+          </a:p>
+        </p:txBody>
+      </p:sp>
+      <p:sp>
+        <p:nvSpPr>
+          <p:cNvPr id="3" name="TextBox 2"/>
+          <p:cNvSpPr txBox="1"/>
+          <p:nvPr/>
+        </p:nvSpPr>
+        <p:spPr>
+          <a:xfrm>
+            <a:off x="228600" y="182880"/>
+            <a:ext cx="11430000" cy="320040"/>
+          </a:xfrm>
+          <a:prstGeom prst="rect">
+            <a:avLst/>
+          </a:prstGeom>
+          <a:noFill/>
+        </p:spPr>
+        <p:txBody>
+          <a:bodyPr wrap="square">
+            <a:spAutoFit/>
+          </a:bodyPr>
+          <a:lstStyle/>
+          <a:p>
+            <a:pPr algn="l"/>
+            <a:r>
+              <a:rPr sz="900" b="0" i="0">
+                <a:solidFill>
+                  <a:srgbClr val="556575"/>
+                </a:solidFill>
+                <a:latin typeface="Arial"/>
+              </a:rPr>
+              <a:t>M03 · Modulinhalte</a:t>
+            </a:r>
+          </a:p>
+        </p:txBody>
+      </p:sp>
+      <p:sp>
+        <p:nvSpPr>
+          <p:cNvPr id="4" name="TextBox 3"/>
+          <p:cNvSpPr txBox="1"/>
+          <p:nvPr/>
+        </p:nvSpPr>
+        <p:spPr>
+          <a:xfrm>
+            <a:off x="365760" y="274320"/>
+            <a:ext cx="11430000" cy="777240"/>
+          </a:xfrm>
+          <a:prstGeom prst="rect">
+            <a:avLst/>
+          </a:prstGeom>
+          <a:noFill/>
+        </p:spPr>
+        <p:txBody>
+          <a:bodyPr wrap="square">
+            <a:spAutoFit/>
+          </a:bodyPr>
+          <a:lstStyle/>
+          <a:p>
+            <a:pPr algn="l"/>
+            <a:r>
+              <a:rPr sz="2200" b="1" i="0">
+                <a:solidFill>
+                  <a:srgbClr val="003DA5"/>
+                </a:solidFill>
+                <a:latin typeface="Arial"/>
+              </a:rPr>
+              <a:t>Aufgabenstellung</a:t>
+            </a:r>
+          </a:p>
+        </p:txBody>
+      </p:sp>
+      <p:sp>
+        <p:nvSpPr>
+          <p:cNvPr id="5" name="Rectangle 4"/>
+          <p:cNvSpPr/>
+          <p:nvPr/>
+        </p:nvSpPr>
+        <p:spPr>
+          <a:xfrm>
+            <a:off x="365760" y="1005840"/>
+            <a:ext cx="11430000" cy="27432"/>
+          </a:xfrm>
+          <a:prstGeom prst="rect">
+            <a:avLst/>
+          </a:prstGeom>
+          <a:solidFill>
+            <a:srgbClr val="D1D5DB"/>
+          </a:solidFill>
+          <a:ln>
+            <a:noFill/>
+          </a:ln>
+        </p:spPr>
+        <p:style>
+          <a:lnRef idx="1">
+            <a:schemeClr val="accent1"/>
+          </a:lnRef>
+          <a:fillRef idx="3">
+            <a:schemeClr val="accent1"/>
+          </a:fillRef>
+          <a:effectRef idx="2">
+            <a:schemeClr val="accent1"/>
+          </a:effectRef>
+          <a:fontRef idx="minor">
+            <a:schemeClr val="lt1"/>
+          </a:fontRef>
+        </p:style>
+        <p:txBody>
+          <a:bodyPr rtlCol="0" anchor="ctr"/>
+          <a:lstStyle/>
+          <a:p>
+            <a:pPr algn="ctr"/>
+          </a:p>
+        </p:txBody>
+      </p:sp>
+      <p:graphicFrame>
+        <p:nvGraphicFramePr>
+          <p:cNvPr id="6" name="Table 5"/>
+          <p:cNvGraphicFramePr>
+            <a:graphicFrameLocks noGrp="1"/>
+          </p:cNvGraphicFramePr>
+          <p:nvPr/>
+        </p:nvGraphicFramePr>
+        <p:xfrm>
+          <a:off x="365760" y="1143000"/>
+          <a:ext cx="11430000" cy="2377440"/>
+        </p:xfrm>
+        <a:graphic>
+          <a:graphicData uri="http://schemas.openxmlformats.org/drawingml/2006/table">
+            <a:tbl>
+              <a:tblPr firstRow="1" bandRow="1">
+                <a:tableStyleId>{5C22544A-7EE6-4342-B048-85BDC9FD1C3A}</a:tableStyleId>
+              </a:tblPr>
+              <a:tblGrid>
+                <a:gridCol w="5715000"/>
+                <a:gridCol w="5715000"/>
+              </a:tblGrid>
+              <a:tr h="475488">
+                <a:tc>
+                  <a:txBody>
+                    <a:bodyPr wrap="square"/>
+                    <a:lstStyle/>
+                    <a:p>
+                      <a:r>
+                        <a:rPr sz="1100" b="1">
+                          <a:solidFill>
+                            <a:srgbClr val="FFFFFF"/>
+                          </a:solidFill>
+                          <a:latin typeface="Arial"/>
+                        </a:rPr>
+                        <a:t>Aufgabe</a:t>
+                      </a:r>
+                    </a:p>
+                  </a:txBody>
+                  <a:tcPr>
+                    <a:solidFill>
+                      <a:srgbClr val="003DA5"/>
+                    </a:solidFill>
+                  </a:tcPr>
+                </a:tc>
+                <a:tc>
+                  <a:txBody>
+                    <a:bodyPr wrap="square"/>
+                    <a:lstStyle/>
+                    <a:p>
+                      <a:r>
+                        <a:rPr sz="1100" b="1">
+                          <a:solidFill>
+                            <a:srgbClr val="FFFFFF"/>
+                          </a:solidFill>
+                          <a:latin typeface="Arial"/>
+                        </a:rPr>
+                        <a:t>Beschreibung</a:t>
+                      </a:r>
+                    </a:p>
+                  </a:txBody>
+                  <a:tcPr>
+                    <a:solidFill>
+                      <a:srgbClr val="003DA5"/>
+                    </a:solidFill>
+                  </a:tcPr>
+                </a:tc>
+              </a:tr>
+              <a:tr h="475488">
+                <a:tc>
+                  <a:txBody>
+                    <a:bodyPr wrap="square"/>
+                    <a:lstStyle/>
+                    <a:p>
+                      <a:r>
+                        <a:rPr sz="1100" b="0">
+                          <a:solidFill>
+                            <a:srgbClr val="1A1A1A"/>
+                          </a:solidFill>
+                          <a:latin typeface="Arial"/>
+                        </a:rPr>
+                        <a:t>A1</a:t>
+                      </a:r>
+                    </a:p>
+                  </a:txBody>
+                  <a:tcPr>
+                    <a:solidFill>
+                      <a:srgbClr val="FFFFFF"/>
+                    </a:solidFill>
+                  </a:tcPr>
+                </a:tc>
+                <a:tc>
+                  <a:txBody>
+                    <a:bodyPr wrap="square"/>
+                    <a:lstStyle/>
+                    <a:p>
+                      <a:r>
+                        <a:rPr sz="1100" b="0">
+                          <a:solidFill>
+                            <a:srgbClr val="1A1A1A"/>
+                          </a:solidFill>
+                          <a:latin typeface="Arial"/>
+                        </a:rPr>
+                        <a:t>Analysieren Sie die aktuelle Finanzsituation. Welche Stärken und Risiken sehen Sie? Berechnen Sie den Verschuldungsgrad nach erfolgter Investition (Szenario: vollständig kreditfinanziert).</a:t>
+                      </a:r>
+                    </a:p>
+                  </a:txBody>
+                  <a:tcPr>
+                    <a:solidFill>
+                      <a:srgbClr val="FFFFFF"/>
+                    </a:solidFill>
+                  </a:tcPr>
+                </a:tc>
+              </a:tr>
+              <a:tr h="475488">
+                <a:tc>
+                  <a:txBody>
+                    <a:bodyPr wrap="square"/>
+                    <a:lstStyle/>
+                    <a:p>
+                      <a:r>
+                        <a:rPr sz="1100" b="0">
+                          <a:solidFill>
+                            <a:srgbClr val="1A1A1A"/>
+                          </a:solidFill>
+                          <a:latin typeface="Arial"/>
+                        </a:rPr>
+                        <a:t>A2</a:t>
+                      </a:r>
+                    </a:p>
+                  </a:txBody>
+                  <a:tcPr>
+                    <a:solidFill>
+                      <a:srgbClr val="F4F6FA"/>
+                    </a:solidFill>
+                  </a:tcPr>
+                </a:tc>
+                <a:tc>
+                  <a:txBody>
+                    <a:bodyPr wrap="square"/>
+                    <a:lstStyle/>
+                    <a:p>
+                      <a:r>
+                        <a:rPr sz="1100" b="0">
+                          <a:solidFill>
+                            <a:srgbClr val="1A1A1A"/>
+                          </a:solidFill>
+                          <a:latin typeface="Arial"/>
+                        </a:rPr>
+                        <a:t>Bewerten Sie die drei strategischen Optionen: (1) Kreditfinanzierung der Investition, (2) Einstieg des Investors + Kreditfinanzierung, (3) Ablösung des stillen Gesellschafters + Eigenkapitalaufbau vor Investition. Welche Option empfehlen Sie und warum?</a:t>
+                      </a:r>
+                    </a:p>
+                  </a:txBody>
+                  <a:tcPr>
+                    <a:solidFill>
+                      <a:srgbClr val="F4F6FA"/>
+                    </a:solidFill>
+                  </a:tcPr>
+                </a:tc>
+              </a:tr>
+              <a:tr h="475488">
+                <a:tc>
+                  <a:txBody>
+                    <a:bodyPr wrap="square"/>
+                    <a:lstStyle/>
+                    <a:p>
+                      <a:r>
+                        <a:rPr sz="1100" b="0">
+                          <a:solidFill>
+                            <a:srgbClr val="1A1A1A"/>
+                          </a:solidFill>
+                          <a:latin typeface="Arial"/>
+                        </a:rPr>
+                        <a:t>A3</a:t>
+                      </a:r>
+                    </a:p>
+                  </a:txBody>
+                  <a:tcPr>
+                    <a:solidFill>
+                      <a:srgbClr val="FFFFFF"/>
+                    </a:solidFill>
+                  </a:tcPr>
+                </a:tc>
+                <a:tc>
+                  <a:txBody>
+                    <a:bodyPr wrap="square"/>
+                    <a:lstStyle/>
+                    <a:p>
+                      <a:r>
+                        <a:rPr sz="1100" b="0">
+                          <a:solidFill>
+                            <a:srgbClr val="1A1A1A"/>
+                          </a:solidFill>
+                          <a:latin typeface="Arial"/>
+                        </a:rPr>
+                        <a:t>Entwickeln Sie eine Gesprächsstrategie für das Jahresgespräch mit Stefan Habermaier. Welche Fragen stellen Sie (SPIN-Systematik)? Wie positionieren Sie die VR-Bank als strategischen Partner gegenüber dem externen Investor? Nutzen Sie die Musterformulierungen unten als Ausgangspunkt.</a:t>
+                      </a:r>
+                    </a:p>
+                  </a:txBody>
+                  <a:tcPr>
+                    <a:solidFill>
+                      <a:srgbClr val="FFFFFF"/>
+                    </a:solidFill>
+                  </a:tcPr>
+                </a:tc>
+              </a:tr>
+              <a:tr h="475488">
+                <a:tc>
+                  <a:txBody>
+                    <a:bodyPr wrap="square"/>
+                    <a:lstStyle/>
+                    <a:p>
+                      <a:r>
+                        <a:rPr sz="1100" b="0">
+                          <a:solidFill>
+                            <a:srgbClr val="1A1A1A"/>
+                          </a:solidFill>
+                          <a:latin typeface="Arial"/>
+                        </a:rPr>
+                        <a:t>A4</a:t>
+                      </a:r>
+                    </a:p>
+                  </a:txBody>
+                  <a:tcPr>
+                    <a:solidFill>
+                      <a:srgbClr val="F4F6FA"/>
+                    </a:solidFill>
+                  </a:tcPr>
+                </a:tc>
+                <a:tc>
+                  <a:txBody>
+                    <a:bodyPr wrap="square"/>
+                    <a:lstStyle/>
+                    <a:p>
+                      <a:r>
+                        <a:rPr sz="1100" b="0">
+                          <a:solidFill>
+                            <a:srgbClr val="1A1A1A"/>
+                          </a:solidFill>
+                          <a:latin typeface="Arial"/>
+                        </a:rPr>
+                        <a:t>Skizzieren Sie einen Finanzierungsplan (Betrag, Instrument, Laufzeit, Tilgung) für Ihr empfohlenes Szenario. Berücksichtigen Sie Fördermitteloptionen (KfW, L-Bank Bayern).</a:t>
+                      </a:r>
+                    </a:p>
+                  </a:txBody>
+                  <a:tcPr>
+                    <a:solidFill>
+                      <a:srgbClr val="F4F6FA"/>
+                    </a:solidFill>
+                  </a:tcPr>
+                </a:tc>
+              </a:tr>
+            </a:tbl>
+          </a:graphicData>
+        </a:graphic>
+      </p:graphicFrame>
+    </p:spTree>
+  </p:cSld>
+  <p:clrMapOvr>
+    <a:masterClrMapping/>
+  </p:clrMapOvr>
+</p:sld>
+</file>
+
+<file path=ppt/slides/slide15.xml><?xml version="1.0" encoding="utf-8"?>
+<p:sld xmlns:a="http://schemas.openxmlformats.org/drawingml/2006/main" xmlns:p="http://schemas.openxmlformats.org/presentationml/2006/main" xmlns:r="http://schemas.openxmlformats.org/officeDocument/2006/relationships">
+  <p:cSld>
+    <p:bg>
+      <p:bgPr>
+        <a:solidFill>
+          <a:srgbClr val="FFFFFF"/>
+        </a:solidFill>
+        <a:effectLst/>
+      </p:bgPr>
+    </p:bg>
+    <p:spTree>
+      <p:nvGrpSpPr>
+        <p:cNvPr id="1" name=""/>
+        <p:cNvGrpSpPr/>
+        <p:nvPr/>
+      </p:nvGrpSpPr>
+      <p:grpSpPr/>
+      <p:sp>
+        <p:nvSpPr>
+          <p:cNvPr id="2" name="Rectangle 1"/>
+          <p:cNvSpPr/>
+          <p:nvPr/>
+        </p:nvSpPr>
+        <p:spPr>
+          <a:xfrm>
+            <a:off x="0" y="0"/>
+            <a:ext cx="73152" cy="6858000"/>
+          </a:xfrm>
+          <a:prstGeom prst="rect">
+            <a:avLst/>
+          </a:prstGeom>
+          <a:solidFill>
+            <a:srgbClr val="003DA5"/>
+          </a:solidFill>
+          <a:ln>
+            <a:noFill/>
+          </a:ln>
+        </p:spPr>
+        <p:style>
+          <a:lnRef idx="1">
+            <a:schemeClr val="accent1"/>
+          </a:lnRef>
+          <a:fillRef idx="3">
+            <a:schemeClr val="accent1"/>
+          </a:fillRef>
+          <a:effectRef idx="2">
+            <a:schemeClr val="accent1"/>
+          </a:effectRef>
+          <a:fontRef idx="minor">
+            <a:schemeClr val="lt1"/>
+          </a:fontRef>
+        </p:style>
+        <p:txBody>
+          <a:bodyPr rtlCol="0" anchor="ctr"/>
+          <a:lstStyle/>
+          <a:p>
+            <a:pPr algn="ctr"/>
+          </a:p>
+        </p:txBody>
+      </p:sp>
+      <p:sp>
+        <p:nvSpPr>
+          <p:cNvPr id="3" name="TextBox 2"/>
+          <p:cNvSpPr txBox="1"/>
+          <p:nvPr/>
+        </p:nvSpPr>
+        <p:spPr>
+          <a:xfrm>
+            <a:off x="228600" y="182880"/>
+            <a:ext cx="11430000" cy="320040"/>
+          </a:xfrm>
+          <a:prstGeom prst="rect">
+            <a:avLst/>
+          </a:prstGeom>
+          <a:noFill/>
+        </p:spPr>
+        <p:txBody>
+          <a:bodyPr wrap="square">
+            <a:spAutoFit/>
+          </a:bodyPr>
+          <a:lstStyle/>
+          <a:p>
+            <a:pPr algn="l"/>
+            <a:r>
+              <a:rPr sz="900" b="0" i="0">
+                <a:solidFill>
+                  <a:srgbClr val="556575"/>
+                </a:solidFill>
+                <a:latin typeface="Arial"/>
+              </a:rPr>
+              <a:t>M03 · Modulinhalte</a:t>
+            </a:r>
+          </a:p>
+        </p:txBody>
+      </p:sp>
+      <p:sp>
+        <p:nvSpPr>
+          <p:cNvPr id="4" name="TextBox 3"/>
+          <p:cNvSpPr txBox="1"/>
+          <p:nvPr/>
+        </p:nvSpPr>
+        <p:spPr>
+          <a:xfrm>
+            <a:off x="365760" y="274320"/>
+            <a:ext cx="11430000" cy="777240"/>
+          </a:xfrm>
+          <a:prstGeom prst="rect">
+            <a:avLst/>
+          </a:prstGeom>
+          <a:noFill/>
+        </p:spPr>
+        <p:txBody>
+          <a:bodyPr wrap="square">
+            <a:spAutoFit/>
+          </a:bodyPr>
+          <a:lstStyle/>
+          <a:p>
+            <a:pPr algn="l"/>
+            <a:r>
+              <a:rPr sz="2200" b="1" i="0">
+                <a:solidFill>
+                  <a:srgbClr val="003DA5"/>
+                </a:solidFill>
+                <a:latin typeface="Arial"/>
+              </a:rPr>
+              <a:t>VR-Bank vs. Investor – Musterformulierungen für A3</a:t>
+            </a:r>
+          </a:p>
+        </p:txBody>
+      </p:sp>
+      <p:sp>
+        <p:nvSpPr>
+          <p:cNvPr id="5" name="Rectangle 4"/>
+          <p:cNvSpPr/>
+          <p:nvPr/>
+        </p:nvSpPr>
+        <p:spPr>
+          <a:xfrm>
+            <a:off x="365760" y="1005840"/>
+            <a:ext cx="11430000" cy="27432"/>
+          </a:xfrm>
+          <a:prstGeom prst="rect">
+            <a:avLst/>
+          </a:prstGeom>
+          <a:solidFill>
+            <a:srgbClr val="D1D5DB"/>
+          </a:solidFill>
+          <a:ln>
+            <a:noFill/>
+          </a:ln>
+        </p:spPr>
+        <p:style>
+          <a:lnRef idx="1">
+            <a:schemeClr val="accent1"/>
+          </a:lnRef>
+          <a:fillRef idx="3">
+            <a:schemeClr val="accent1"/>
+          </a:fillRef>
+          <a:effectRef idx="2">
+            <a:schemeClr val="accent1"/>
+          </a:effectRef>
+          <a:fontRef idx="minor">
+            <a:schemeClr val="lt1"/>
+          </a:fontRef>
+        </p:style>
+        <p:txBody>
+          <a:bodyPr rtlCol="0" anchor="ctr"/>
+          <a:lstStyle/>
+          <a:p>
+            <a:pPr algn="ctr"/>
+          </a:p>
+        </p:txBody>
+      </p:sp>
+      <p:graphicFrame>
+        <p:nvGraphicFramePr>
+          <p:cNvPr id="6" name="Table 5"/>
+          <p:cNvGraphicFramePr>
+            <a:graphicFrameLocks noGrp="1"/>
+          </p:cNvGraphicFramePr>
+          <p:nvPr/>
+        </p:nvGraphicFramePr>
+        <p:xfrm>
+          <a:off x="365760" y="1143000"/>
+          <a:ext cx="11430000" cy="2377440"/>
+        </p:xfrm>
+        <a:graphic>
+          <a:graphicData uri="http://schemas.openxmlformats.org/drawingml/2006/table">
+            <a:tbl>
+              <a:tblPr firstRow="1" bandRow="1">
+                <a:tableStyleId>{5C22544A-7EE6-4342-B048-85BDC9FD1C3A}</a:tableStyleId>
+              </a:tblPr>
+              <a:tblGrid>
+                <a:gridCol w="5715000"/>
+                <a:gridCol w="5715000"/>
+              </a:tblGrid>
+              <a:tr h="475488">
+                <a:tc>
+                  <a:txBody>
+                    <a:bodyPr wrap="square"/>
+                    <a:lstStyle/>
+                    <a:p>
+                      <a:r>
+                        <a:rPr sz="1100" b="1">
+                          <a:solidFill>
+                            <a:srgbClr val="FFFFFF"/>
+                          </a:solidFill>
+                          <a:latin typeface="Arial"/>
+                        </a:rPr>
+                        <a:t>Stärke der VR-Bank</a:t>
+                      </a:r>
+                    </a:p>
+                  </a:txBody>
+                  <a:tcPr>
+                    <a:solidFill>
+                      <a:srgbClr val="003DA5"/>
+                    </a:solidFill>
+                  </a:tcPr>
+                </a:tc>
+                <a:tc>
+                  <a:txBody>
+                    <a:bodyPr wrap="square"/>
+                    <a:lstStyle/>
+                    <a:p>
+                      <a:r>
+                        <a:rPr sz="1100" b="1">
+                          <a:solidFill>
+                            <a:srgbClr val="FFFFFF"/>
+                          </a:solidFill>
+                          <a:latin typeface="Arial"/>
+                        </a:rPr>
+                        <a:t>Musterformulierung</a:t>
+                      </a:r>
+                    </a:p>
+                  </a:txBody>
+                  <a:tcPr>
+                    <a:solidFill>
+                      <a:srgbClr val="003DA5"/>
+                    </a:solidFill>
+                  </a:tcPr>
+                </a:tc>
+              </a:tr>
+              <a:tr h="475488">
+                <a:tc>
+                  <a:txBody>
+                    <a:bodyPr wrap="square"/>
+                    <a:lstStyle/>
+                    <a:p>
+                      <a:r>
+                        <a:rPr sz="1100" b="0">
+                          <a:solidFill>
+                            <a:srgbClr val="1A1A1A"/>
+                          </a:solidFill>
+                          <a:latin typeface="Arial"/>
+                        </a:rPr>
+                        <a:t>Kontinuität &amp; Verlässlichkeit</a:t>
+                      </a:r>
+                    </a:p>
+                  </a:txBody>
+                  <a:tcPr>
+                    <a:solidFill>
+                      <a:srgbClr val="FFFFFF"/>
+                    </a:solidFill>
+                  </a:tcPr>
+                </a:tc>
+                <a:tc>
+                  <a:txBody>
+                    <a:bodyPr wrap="square"/>
+                    <a:lstStyle/>
+                    <a:p>
+                      <a:r>
+                        <a:rPr sz="1100" b="0">
+                          <a:solidFill>
+                            <a:srgbClr val="1A1A1A"/>
+                          </a:solidFill>
+                          <a:latin typeface="Arial"/>
+                        </a:rPr>
+                        <a:t>„Wir begleiten Ihr Unternehmen seit 27 Jahren – durch Hochkonjunktur und durch die Krise 2020. Ein Finanzinvestor hat einen Zeithorizont von 5–7 Jahren; danach kommt der Exit. Wir haben keinen Exit-Druck."</a:t>
+                      </a:r>
+                    </a:p>
+                  </a:txBody>
+                  <a:tcPr>
+                    <a:solidFill>
+                      <a:srgbClr val="FFFFFF"/>
+                    </a:solidFill>
+                  </a:tcPr>
+                </a:tc>
+              </a:tr>
+              <a:tr h="475488">
+                <a:tc>
+                  <a:txBody>
+                    <a:bodyPr wrap="square"/>
+                    <a:lstStyle/>
+                    <a:p>
+                      <a:r>
+                        <a:rPr sz="1100" b="0">
+                          <a:solidFill>
+                            <a:srgbClr val="1A1A1A"/>
+                          </a:solidFill>
+                          <a:latin typeface="Arial"/>
+                        </a:rPr>
+                        <a:t>Keine Verwässerung</a:t>
+                      </a:r>
+                    </a:p>
+                  </a:txBody>
+                  <a:tcPr>
+                    <a:solidFill>
+                      <a:srgbClr val="F4F6FA"/>
+                    </a:solidFill>
+                  </a:tcPr>
+                </a:tc>
+                <a:tc>
+                  <a:txBody>
+                    <a:bodyPr wrap="square"/>
+                    <a:lstStyle/>
+                    <a:p>
+                      <a:r>
+                        <a:rPr sz="1100" b="0">
+                          <a:solidFill>
+                            <a:srgbClr val="1A1A1A"/>
+                          </a:solidFill>
+                          <a:latin typeface="Arial"/>
+                        </a:rPr>
+                        <a:t>„Mit unserer Finanzierungslösung behalten Sie 100 % der Kontrolle. Kein Investor sitzt im Beirat, kein Fremder hat Einblick in Ihre strategischen Pläne."</a:t>
+                      </a:r>
+                    </a:p>
+                  </a:txBody>
+                  <a:tcPr>
+                    <a:solidFill>
+                      <a:srgbClr val="F4F6FA"/>
+                    </a:solidFill>
+                  </a:tcPr>
+                </a:tc>
+              </a:tr>
+              <a:tr h="475488">
+                <a:tc>
+                  <a:txBody>
+                    <a:bodyPr wrap="square"/>
+                    <a:lstStyle/>
+                    <a:p>
+                      <a:r>
+                        <a:rPr sz="1100" b="0">
+                          <a:solidFill>
+                            <a:srgbClr val="1A1A1A"/>
+                          </a:solidFill>
+                          <a:latin typeface="Arial"/>
+                        </a:rPr>
+                        <a:t>Verbundnetzwerk</a:t>
+                      </a:r>
+                    </a:p>
+                  </a:txBody>
+                  <a:tcPr>
+                    <a:solidFill>
+                      <a:srgbClr val="FFFFFF"/>
+                    </a:solidFill>
+                  </a:tcPr>
+                </a:tc>
+                <a:tc>
+                  <a:txBody>
+                    <a:bodyPr wrap="square"/>
+                    <a:lstStyle/>
+                    <a:p>
+                      <a:r>
+                        <a:rPr sz="1100" b="0">
+                          <a:solidFill>
+                            <a:srgbClr val="1A1A1A"/>
+                          </a:solidFill>
+                          <a:latin typeface="Arial"/>
+                        </a:rPr>
+                        <a:t>„Über die DZ BANK haben wir Zugang zu Förderstrukturen und Spezialfinanzierungen, die eine M&amp;A-Boutique nicht anbieten kann. Gleichzeitig sind R+V und Union Investment direkt angebunden – alles aus einer Hand."</a:t>
+                      </a:r>
+                    </a:p>
+                  </a:txBody>
+                  <a:tcPr>
+                    <a:solidFill>
+                      <a:srgbClr val="FFFFFF"/>
+                    </a:solidFill>
+                  </a:tcPr>
+                </a:tc>
+              </a:tr>
+              <a:tr h="475488">
+                <a:tc>
+                  <a:txBody>
+                    <a:bodyPr wrap="square"/>
+                    <a:lstStyle/>
+                    <a:p>
+                      <a:r>
+                        <a:rPr sz="1100" b="0">
+                          <a:solidFill>
+                            <a:srgbClr val="1A1A1A"/>
+                          </a:solidFill>
+                          <a:latin typeface="Arial"/>
+                        </a:rPr>
+                        <a:t>Regionale Verwurzelung</a:t>
+                      </a:r>
+                    </a:p>
+                  </a:txBody>
+                  <a:tcPr>
+                    <a:solidFill>
+                      <a:srgbClr val="F4F6FA"/>
+                    </a:solidFill>
+                  </a:tcPr>
+                </a:tc>
+                <a:tc>
+                  <a:txBody>
+                    <a:bodyPr wrap="square"/>
+                    <a:lstStyle/>
+                    <a:p>
+                      <a:r>
+                        <a:rPr sz="1100" b="0">
+                          <a:solidFill>
+                            <a:srgbClr val="1A1A1A"/>
+                          </a:solidFill>
+                          <a:latin typeface="Arial"/>
+                        </a:rPr>
+                        <a:t>„Wir kennen Ihre Branche, Ihren Markt und Ihre Kunden hier in der Region. Das ist kein Netzwerk auf dem Papier – das sind echte Kontakte, die wir für Sie nutzen können."</a:t>
+                      </a:r>
+                    </a:p>
+                  </a:txBody>
+                  <a:tcPr>
+                    <a:solidFill>
+                      <a:srgbClr val="F4F6FA"/>
+                    </a:solidFill>
+                  </a:tcPr>
+                </a:tc>
+              </a:tr>
+            </a:tbl>
+          </a:graphicData>
+        </a:graphic>
+      </p:graphicFrame>
+    </p:spTree>
+  </p:cSld>
+  <p:clrMapOvr>
+    <a:masterClrMapping/>
+  </p:clrMapOvr>
+</p:sld>
+</file>
+
+<file path=ppt/slides/slide16.xml><?xml version="1.0" encoding="utf-8"?>
+<p:sld xmlns:a="http://schemas.openxmlformats.org/drawingml/2006/main" xmlns:p="http://schemas.openxmlformats.org/presentationml/2006/main" xmlns:r="http://schemas.openxmlformats.org/officeDocument/2006/relationships">
+  <p:cSld>
+    <p:bg>
+      <p:bgPr>
+        <a:solidFill>
+          <a:srgbClr val="1A1A1A"/>
         </a:solidFill>
         <a:effectLst/>
       </p:bgPr>
@@ -3513,8 +6139,8 @@
         </p:nvSpPr>
         <p:spPr>
           <a:xfrm>
-            <a:off x="365760" y="365760"/>
-            <a:ext cx="5486400" cy="365760"/>
+            <a:off x="365760" y="2011680"/>
+            <a:ext cx="11430000" cy="2011680"/>
           </a:xfrm>
           <a:prstGeom prst="rect">
             <a:avLst/>
@@ -3529,199 +6155,13 @@
           <a:p>
             <a:pPr algn="l"/>
             <a:r>
-              <a:rPr sz="1000" b="1">
-                <a:solidFill>
-                  <a:srgbClr val="CCD6F0"/>
-                </a:solidFill>
-                <a:latin typeface="Arial"/>
-              </a:rPr>
-              <a:t>PRAXISTRANSFER</a:t>
-            </a:r>
-          </a:p>
-        </p:txBody>
-      </p:sp>
-      <p:sp>
-        <p:nvSpPr>
-          <p:cNvPr id="4" name="TextBox 3"/>
-          <p:cNvSpPr txBox="1"/>
-          <p:nvPr/>
-        </p:nvSpPr>
-        <p:spPr>
-          <a:xfrm>
-            <a:off x="365760" y="640080"/>
-            <a:ext cx="9144000" cy="914400"/>
-          </a:xfrm>
-          <a:prstGeom prst="rect">
-            <a:avLst/>
-          </a:prstGeom>
-          <a:noFill/>
-        </p:spPr>
-        <p:txBody>
-          <a:bodyPr wrap="square">
-            <a:spAutoFit/>
-          </a:bodyPr>
-          <a:lstStyle/>
-          <a:p>
-            <a:pPr algn="l"/>
-            <a:r>
-              <a:rPr sz="2800" b="1">
+              <a:rPr sz="3600" b="1" i="0">
                 <a:solidFill>
                   <a:srgbClr val="FFFFFF"/>
                 </a:solidFill>
                 <a:latin typeface="Arial"/>
               </a:rPr>
-              <a:t>Was nehmen Sie mit?</a:t>
-            </a:r>
-          </a:p>
-        </p:txBody>
-      </p:sp>
-      <p:sp>
-        <p:nvSpPr>
-          <p:cNvPr id="5" name="Rectangle 4"/>
-          <p:cNvSpPr/>
-          <p:nvPr/>
-        </p:nvSpPr>
-        <p:spPr>
-          <a:xfrm>
-            <a:off x="365760" y="1463040"/>
-            <a:ext cx="7315200" cy="27432"/>
-          </a:xfrm>
-          <a:prstGeom prst="rect">
-            <a:avLst/>
-          </a:prstGeom>
-          <a:solidFill>
-            <a:srgbClr val="335CC0"/>
-          </a:solidFill>
-          <a:ln>
-            <a:noFill/>
-          </a:ln>
-        </p:spPr>
-        <p:style>
-          <a:lnRef idx="1">
-            <a:schemeClr val="accent1"/>
-          </a:lnRef>
-          <a:fillRef idx="3">
-            <a:schemeClr val="accent1"/>
-          </a:fillRef>
-          <a:effectRef idx="2">
-            <a:schemeClr val="accent1"/>
-          </a:effectRef>
-          <a:fontRef idx="minor">
-            <a:schemeClr val="lt1"/>
-          </a:fontRef>
-        </p:style>
-        <p:txBody>
-          <a:bodyPr rtlCol="0" anchor="ctr"/>
-          <a:lstStyle/>
-          <a:p>
-            <a:pPr algn="ctr"/>
-          </a:p>
-        </p:txBody>
-      </p:sp>
-      <p:sp>
-        <p:nvSpPr>
-          <p:cNvPr id="6" name="TextBox 5"/>
-          <p:cNvSpPr txBox="1"/>
-          <p:nvPr/>
-        </p:nvSpPr>
-        <p:spPr>
-          <a:xfrm>
-            <a:off x="365760" y="1645920"/>
-            <a:ext cx="11430000" cy="4114800"/>
-          </a:xfrm>
-          <a:prstGeom prst="rect">
-            <a:avLst/>
-          </a:prstGeom>
-          <a:noFill/>
-        </p:spPr>
-        <p:txBody>
-          <a:bodyPr wrap="square">
-            <a:spAutoFit/>
-          </a:bodyPr>
-          <a:lstStyle/>
-          <a:p>
-            <a:pPr>
-              <a:spcBef>
-                <a:spcPts val="400"/>
-              </a:spcBef>
-            </a:pPr>
-            <a:r>
-              <a:rPr sz="1600">
-                <a:solidFill>
-                  <a:srgbClr val="E05B00"/>
-                </a:solidFill>
-                <a:latin typeface="Arial"/>
-              </a:rPr>
-              <a:t>▪  </a:t>
-            </a:r>
-            <a:r>
-              <a:rPr sz="1800">
-                <a:solidFill>
-                  <a:srgbClr val="FFFFFF"/>
-                </a:solidFill>
-                <a:latin typeface="Arial"/>
-              </a:rPr>
-              <a:t>Transferaufgabe: Wenden Sie das Gelernte in den nächsten 14 Tagen bei einem konkreten Kunden an.</a:t>
-            </a:r>
-          </a:p>
-          <a:p>
-            <a:pPr>
-              <a:spcBef>
-                <a:spcPts val="400"/>
-              </a:spcBef>
-            </a:pPr>
-            <a:r>
-              <a:rPr sz="1600">
-                <a:solidFill>
-                  <a:srgbClr val="E05B00"/>
-                </a:solidFill>
-                <a:latin typeface="Arial"/>
-              </a:rPr>
-              <a:t>▪  </a:t>
-            </a:r>
-            <a:r>
-              <a:rPr sz="1800">
-                <a:solidFill>
-                  <a:srgbClr val="FFFFFF"/>
-                </a:solidFill>
-                <a:latin typeface="Arial"/>
-              </a:rPr>
-              <a:t>Selbstcheck nach 4 Wochen: Was hat sich verändert?</a:t>
-            </a:r>
-          </a:p>
-        </p:txBody>
-      </p:sp>
-      <p:sp>
-        <p:nvSpPr>
-          <p:cNvPr id="7" name="TextBox 6"/>
-          <p:cNvSpPr txBox="1"/>
-          <p:nvPr/>
-        </p:nvSpPr>
-        <p:spPr>
-          <a:xfrm>
-            <a:off x="365760" y="6309360"/>
-            <a:ext cx="11430000" cy="365760"/>
-          </a:xfrm>
-          <a:prstGeom prst="rect">
-            <a:avLst/>
-          </a:prstGeom>
-          <a:noFill/>
-        </p:spPr>
-        <p:txBody>
-          <a:bodyPr wrap="square">
-            <a:spAutoFit/>
-          </a:bodyPr>
-          <a:lstStyle/>
-          <a:p>
-            <a:pPr algn="l"/>
-            <a:r>
-              <a:rPr sz="900" b="0">
-                <a:solidFill>
-                  <a:srgbClr val="99AACC"/>
-                </a:solidFill>
-                <a:latin typeface="Arial"/>
-              </a:rPr>
-              <a:t>M03 · Der strategische Finanzdialog  ·  v1.1  ·  Benedikt Zoller Coaching</a:t>
+              <a:t>Liquiditäts- und Wachstumsplanung</a:t>
             </a:r>
           </a:p>
         </p:txBody>
@@ -3734,13 +6174,13 @@
 </p:sld>
 </file>
 
-<file path=ppt/slides/slide2.xml><?xml version="1.0" encoding="utf-8"?>
+<file path=ppt/slides/slide17.xml><?xml version="1.0" encoding="utf-8"?>
 <p:sld xmlns:a="http://schemas.openxmlformats.org/drawingml/2006/main" xmlns:p="http://schemas.openxmlformats.org/presentationml/2006/main" xmlns:r="http://schemas.openxmlformats.org/officeDocument/2006/relationships">
   <p:cSld>
     <p:bg>
       <p:bgPr>
         <a:solidFill>
-          <a:srgbClr val="F5F7FA"/>
+          <a:srgbClr val="FFFFFF"/>
         </a:solidFill>
         <a:effectLst/>
       </p:bgPr>
@@ -3797,20 +6237,90 @@
       </p:sp>
       <p:sp>
         <p:nvSpPr>
-          <p:cNvPr id="3" name="Rectangle 2"/>
+          <p:cNvPr id="3" name="TextBox 2"/>
+          <p:cNvSpPr txBox="1"/>
+          <p:nvPr/>
+        </p:nvSpPr>
+        <p:spPr>
+          <a:xfrm>
+            <a:off x="228600" y="182880"/>
+            <a:ext cx="11430000" cy="320040"/>
+          </a:xfrm>
+          <a:prstGeom prst="rect">
+            <a:avLst/>
+          </a:prstGeom>
+          <a:noFill/>
+        </p:spPr>
+        <p:txBody>
+          <a:bodyPr wrap="square">
+            <a:spAutoFit/>
+          </a:bodyPr>
+          <a:lstStyle/>
+          <a:p>
+            <a:pPr algn="l"/>
+            <a:r>
+              <a:rPr sz="900" b="0" i="0">
+                <a:solidFill>
+                  <a:srgbClr val="556575"/>
+                </a:solidFill>
+                <a:latin typeface="Arial"/>
+              </a:rPr>
+              <a:t>M03 · Modulinhalte</a:t>
+            </a:r>
+          </a:p>
+        </p:txBody>
+      </p:sp>
+      <p:sp>
+        <p:nvSpPr>
+          <p:cNvPr id="4" name="TextBox 3"/>
+          <p:cNvSpPr txBox="1"/>
+          <p:nvPr/>
+        </p:nvSpPr>
+        <p:spPr>
+          <a:xfrm>
+            <a:off x="365760" y="274320"/>
+            <a:ext cx="11430000" cy="777240"/>
+          </a:xfrm>
+          <a:prstGeom prst="rect">
+            <a:avLst/>
+          </a:prstGeom>
+          <a:noFill/>
+        </p:spPr>
+        <p:txBody>
+          <a:bodyPr wrap="square">
+            <a:spAutoFit/>
+          </a:bodyPr>
+          <a:lstStyle/>
+          <a:p>
+            <a:pPr algn="l"/>
+            <a:r>
+              <a:rPr sz="2200" b="1" i="0">
+                <a:solidFill>
+                  <a:srgbClr val="003DA5"/>
+                </a:solidFill>
+                <a:latin typeface="Arial"/>
+              </a:rPr>
+              <a:t>Working Capital und Cash Conversion Cycle</a:t>
+            </a:r>
+          </a:p>
+        </p:txBody>
+      </p:sp>
+      <p:sp>
+        <p:nvSpPr>
+          <p:cNvPr id="5" name="Rectangle 4"/>
           <p:cNvSpPr/>
           <p:nvPr/>
         </p:nvSpPr>
         <p:spPr>
           <a:xfrm>
-            <a:off x="365760" y="868680"/>
-            <a:ext cx="7315200" cy="27432"/>
+            <a:off x="365760" y="1005840"/>
+            <a:ext cx="11430000" cy="27432"/>
           </a:xfrm>
           <a:prstGeom prst="rect">
             <a:avLst/>
           </a:prstGeom>
           <a:solidFill>
-            <a:srgbClr val="E5E7EB"/>
+            <a:srgbClr val="D1D5DB"/>
           </a:solidFill>
           <a:ln>
             <a:noFill/>
@@ -3838,224 +6348,373 @@
           </a:p>
         </p:txBody>
       </p:sp>
-      <p:sp>
-        <p:nvSpPr>
-          <p:cNvPr id="4" name="TextBox 3"/>
-          <p:cNvSpPr txBox="1"/>
+      <p:graphicFrame>
+        <p:nvGraphicFramePr>
+          <p:cNvPr id="6" name="Table 5"/>
+          <p:cNvGraphicFramePr>
+            <a:graphicFrameLocks noGrp="1"/>
+          </p:cNvGraphicFramePr>
           <p:nvPr/>
-        </p:nvSpPr>
-        <p:spPr>
-          <a:xfrm>
-            <a:off x="365760" y="320040"/>
-            <a:ext cx="3657600" cy="365760"/>
-          </a:xfrm>
-          <a:prstGeom prst="rect">
-            <a:avLst/>
-          </a:prstGeom>
-          <a:noFill/>
-        </p:spPr>
-        <p:txBody>
-          <a:bodyPr wrap="square">
-            <a:spAutoFit/>
-          </a:bodyPr>
-          <a:lstStyle/>
-          <a:p>
-            <a:pPr algn="l"/>
-            <a:r>
-              <a:rPr sz="1000" b="1">
-                <a:solidFill>
-                  <a:srgbClr val="003DA5"/>
-                </a:solidFill>
-                <a:latin typeface="Arial"/>
-              </a:rPr>
-              <a:t>LERNZIELE</a:t>
-            </a:r>
-          </a:p>
-        </p:txBody>
-      </p:sp>
-      <p:sp>
-        <p:nvSpPr>
-          <p:cNvPr id="5" name="TextBox 4"/>
-          <p:cNvSpPr txBox="1"/>
-          <p:nvPr/>
-        </p:nvSpPr>
-        <p:spPr>
-          <a:xfrm>
-            <a:off x="365760" y="502920"/>
-            <a:ext cx="9144000" cy="548640"/>
-          </a:xfrm>
-          <a:prstGeom prst="rect">
-            <a:avLst/>
-          </a:prstGeom>
-          <a:noFill/>
-        </p:spPr>
-        <p:txBody>
-          <a:bodyPr wrap="square">
-            <a:spAutoFit/>
-          </a:bodyPr>
-          <a:lstStyle/>
-          <a:p>
-            <a:pPr algn="l"/>
-            <a:r>
-              <a:rPr sz="2200" b="1">
-                <a:solidFill>
-                  <a:srgbClr val="1A1A1A"/>
-                </a:solidFill>
-                <a:latin typeface="Arial"/>
-              </a:rPr>
-              <a:t>Was Sie nach diesem Modul können.</a:t>
-            </a:r>
-          </a:p>
-        </p:txBody>
-      </p:sp>
-      <p:sp>
-        <p:nvSpPr>
-          <p:cNvPr id="6" name="TextBox 5"/>
-          <p:cNvSpPr txBox="1"/>
-          <p:nvPr/>
-        </p:nvSpPr>
-        <p:spPr>
-          <a:xfrm>
-            <a:off x="365760" y="1188720"/>
-            <a:ext cx="11430000" cy="5303520"/>
-          </a:xfrm>
-          <a:prstGeom prst="rect">
-            <a:avLst/>
-          </a:prstGeom>
-          <a:noFill/>
-        </p:spPr>
-        <p:txBody>
-          <a:bodyPr wrap="square">
-            <a:spAutoFit/>
-          </a:bodyPr>
-          <a:lstStyle/>
-          <a:p>
-            <a:pPr>
-              <a:spcBef>
-                <a:spcPts val="400"/>
-              </a:spcBef>
-            </a:pPr>
-            <a:r>
-              <a:rPr sz="1400">
-                <a:solidFill>
-                  <a:srgbClr val="003DA5"/>
-                </a:solidFill>
-                <a:latin typeface="Arial"/>
-              </a:rPr>
-              <a:t>▪  </a:t>
-            </a:r>
-            <a:r>
-              <a:rPr sz="1600">
-                <a:solidFill>
-                  <a:srgbClr val="1A1A1A"/>
-                </a:solidFill>
-                <a:latin typeface="Arial"/>
-              </a:rPr>
-              <a:t>Kapitalstruktur eines mittelständischen Unternehmens analysieren und Optimierungspotenziale identifizieren</a:t>
-            </a:r>
-          </a:p>
-          <a:p>
-            <a:pPr>
-              <a:spcBef>
-                <a:spcPts val="400"/>
-              </a:spcBef>
-            </a:pPr>
-            <a:r>
-              <a:rPr sz="1400">
-                <a:solidFill>
-                  <a:srgbClr val="003DA5"/>
-                </a:solidFill>
-                <a:latin typeface="Arial"/>
-              </a:rPr>
-              <a:t>▪  </a:t>
-            </a:r>
-            <a:r>
-              <a:rPr sz="1600">
-                <a:solidFill>
-                  <a:srgbClr val="1A1A1A"/>
-                </a:solidFill>
-                <a:latin typeface="Arial"/>
-              </a:rPr>
-              <a:t>Alternative Finanzierungsstrategien (Bankkredit, Mezzanine, Beteiligungskapital) nach Kosten, Flexibilität und strategischer Passung bewerten</a:t>
-            </a:r>
-          </a:p>
-          <a:p>
-            <a:pPr>
-              <a:spcBef>
-                <a:spcPts val="400"/>
-              </a:spcBef>
-            </a:pPr>
-            <a:r>
-              <a:rPr sz="1400">
-                <a:solidFill>
-                  <a:srgbClr val="003DA5"/>
-                </a:solidFill>
-                <a:latin typeface="Arial"/>
-              </a:rPr>
-              <a:t>▪  </a:t>
-            </a:r>
-            <a:r>
-              <a:rPr sz="1600">
-                <a:solidFill>
-                  <a:srgbClr val="1A1A1A"/>
-                </a:solidFill>
-                <a:latin typeface="Arial"/>
-              </a:rPr>
-              <a:t>Unternehmenswerttreiber (Wachstum, Marge, Kapitaleffizienz) analysieren und strategische Handlungsempfehlungen ableiten</a:t>
-            </a:r>
-          </a:p>
-          <a:p>
-            <a:pPr>
-              <a:spcBef>
-                <a:spcPts val="400"/>
-              </a:spcBef>
-            </a:pPr>
-            <a:r>
-              <a:rPr sz="1400">
-                <a:solidFill>
-                  <a:srgbClr val="003DA5"/>
-                </a:solidFill>
-                <a:latin typeface="Arial"/>
-              </a:rPr>
-              <a:t>▪  </a:t>
-            </a:r>
-            <a:r>
-              <a:rPr sz="1600">
-                <a:solidFill>
-                  <a:srgbClr val="1A1A1A"/>
-                </a:solidFill>
-                <a:latin typeface="Arial"/>
-              </a:rPr>
-              <a:t>Strategischen Finanzierungsplan einschließlich Meilensteinplanung und Risikobewertung entwickeln</a:t>
-            </a:r>
-          </a:p>
-          <a:p>
-            <a:pPr>
-              <a:spcBef>
-                <a:spcPts val="400"/>
-              </a:spcBef>
-            </a:pPr>
-            <a:r>
-              <a:rPr sz="1400">
-                <a:solidFill>
-                  <a:srgbClr val="003DA5"/>
-                </a:solidFill>
-                <a:latin typeface="Arial"/>
-              </a:rPr>
-              <a:t>▪  </a:t>
-            </a:r>
-            <a:r>
-              <a:rPr sz="1600">
-                <a:solidFill>
-                  <a:srgbClr val="1A1A1A"/>
-                </a:solidFill>
-                <a:latin typeface="Arial"/>
-              </a:rPr>
-              <a:t>Beurteilen, wann eine Bankfinanzierung ihre Grenzen erreicht und alternative Kapitalquellen strategisch sinnvoll sind</a:t>
-            </a:r>
-          </a:p>
-        </p:txBody>
-      </p:sp>
+        </p:nvGraphicFramePr>
+        <p:xfrm>
+          <a:off x="365760" y="1143000"/>
+          <a:ext cx="11430000" cy="2377440"/>
+        </p:xfrm>
+        <a:graphic>
+          <a:graphicData uri="http://schemas.openxmlformats.org/drawingml/2006/table">
+            <a:tbl>
+              <a:tblPr firstRow="1" bandRow="1">
+                <a:tableStyleId>{5C22544A-7EE6-4342-B048-85BDC9FD1C3A}</a:tableStyleId>
+              </a:tblPr>
+              <a:tblGrid>
+                <a:gridCol w="3810000"/>
+                <a:gridCol w="3810000"/>
+                <a:gridCol w="3810000"/>
+              </a:tblGrid>
+              <a:tr h="475488">
+                <a:tc>
+                  <a:txBody>
+                    <a:bodyPr wrap="square"/>
+                    <a:lstStyle/>
+                    <a:p>
+                      <a:r>
+                        <a:rPr sz="1100" b="1">
+                          <a:solidFill>
+                            <a:srgbClr val="FFFFFF"/>
+                          </a:solidFill>
+                          <a:latin typeface="Arial"/>
+                        </a:rPr>
+                        <a:t>Komponente</a:t>
+                      </a:r>
+                    </a:p>
+                  </a:txBody>
+                  <a:tcPr>
+                    <a:solidFill>
+                      <a:srgbClr val="003DA5"/>
+                    </a:solidFill>
+                  </a:tcPr>
+                </a:tc>
+                <a:tc>
+                  <a:txBody>
+                    <a:bodyPr wrap="square"/>
+                    <a:lstStyle/>
+                    <a:p>
+                      <a:r>
+                        <a:rPr sz="1100" b="1">
+                          <a:solidFill>
+                            <a:srgbClr val="FFFFFF"/>
+                          </a:solidFill>
+                          <a:latin typeface="Arial"/>
+                        </a:rPr>
+                        <a:t>Formel / Beschreibung</a:t>
+                      </a:r>
+                    </a:p>
+                  </a:txBody>
+                  <a:tcPr>
+                    <a:solidFill>
+                      <a:srgbClr val="003DA5"/>
+                    </a:solidFill>
+                  </a:tcPr>
+                </a:tc>
+                <a:tc>
+                  <a:txBody>
+                    <a:bodyPr wrap="square"/>
+                    <a:lstStyle/>
+                    <a:p>
+                      <a:r>
+                        <a:rPr sz="1100" b="1">
+                          <a:solidFill>
+                            <a:srgbClr val="FFFFFF"/>
+                          </a:solidFill>
+                          <a:latin typeface="Arial"/>
+                        </a:rPr>
+                        <a:t>Optimierungsansatz</a:t>
+                      </a:r>
+                    </a:p>
+                  </a:txBody>
+                  <a:tcPr>
+                    <a:solidFill>
+                      <a:srgbClr val="003DA5"/>
+                    </a:solidFill>
+                  </a:tcPr>
+                </a:tc>
+              </a:tr>
+              <a:tr h="475488">
+                <a:tc>
+                  <a:txBody>
+                    <a:bodyPr wrap="square"/>
+                    <a:lstStyle/>
+                    <a:p>
+                      <a:r>
+                        <a:rPr sz="1100" b="0">
+                          <a:solidFill>
+                            <a:srgbClr val="1A1A1A"/>
+                          </a:solidFill>
+                          <a:latin typeface="Arial"/>
+                        </a:rPr>
+                        <a:t>Debitorenlaufzeit (DSO)</a:t>
+                      </a:r>
+                    </a:p>
+                  </a:txBody>
+                  <a:tcPr>
+                    <a:solidFill>
+                      <a:srgbClr val="FFFFFF"/>
+                    </a:solidFill>
+                  </a:tcPr>
+                </a:tc>
+                <a:tc>
+                  <a:txBody>
+                    <a:bodyPr wrap="square"/>
+                    <a:lstStyle/>
+                    <a:p>
+                      <a:r>
+                        <a:rPr sz="1100" b="0">
+                          <a:solidFill>
+                            <a:srgbClr val="1A1A1A"/>
+                          </a:solidFill>
+                          <a:latin typeface="Arial"/>
+                        </a:rPr>
+                        <a:t>Forderungen / (Umsatz / 365)</a:t>
+                      </a:r>
+                    </a:p>
+                  </a:txBody>
+                  <a:tcPr>
+                    <a:solidFill>
+                      <a:srgbClr val="FFFFFF"/>
+                    </a:solidFill>
+                  </a:tcPr>
+                </a:tc>
+                <a:tc>
+                  <a:txBody>
+                    <a:bodyPr wrap="square"/>
+                    <a:lstStyle/>
+                    <a:p>
+                      <a:r>
+                        <a:rPr sz="1100" b="0">
+                          <a:solidFill>
+                            <a:srgbClr val="1A1A1A"/>
+                          </a:solidFill>
+                          <a:latin typeface="Arial"/>
+                        </a:rPr>
+                        <a:t>Zahlungsziele verkürzen, Factoring</a:t>
+                      </a:r>
+                    </a:p>
+                  </a:txBody>
+                  <a:tcPr>
+                    <a:solidFill>
+                      <a:srgbClr val="FFFFFF"/>
+                    </a:solidFill>
+                  </a:tcPr>
+                </a:tc>
+              </a:tr>
+              <a:tr h="475488">
+                <a:tc>
+                  <a:txBody>
+                    <a:bodyPr wrap="square"/>
+                    <a:lstStyle/>
+                    <a:p>
+                      <a:r>
+                        <a:rPr sz="1100" b="0">
+                          <a:solidFill>
+                            <a:srgbClr val="1A1A1A"/>
+                          </a:solidFill>
+                          <a:latin typeface="Arial"/>
+                        </a:rPr>
+                        <a:t>Kreditorenlaufzeit (DPO)</a:t>
+                      </a:r>
+                    </a:p>
+                  </a:txBody>
+                  <a:tcPr>
+                    <a:solidFill>
+                      <a:srgbClr val="F4F6FA"/>
+                    </a:solidFill>
+                  </a:tcPr>
+                </a:tc>
+                <a:tc>
+                  <a:txBody>
+                    <a:bodyPr wrap="square"/>
+                    <a:lstStyle/>
+                    <a:p>
+                      <a:r>
+                        <a:rPr sz="1100" b="0">
+                          <a:solidFill>
+                            <a:srgbClr val="1A1A1A"/>
+                          </a:solidFill>
+                          <a:latin typeface="Arial"/>
+                        </a:rPr>
+                        <a:t>Verbindlichkeiten / (Wareneinkauf / 365)</a:t>
+                      </a:r>
+                    </a:p>
+                  </a:txBody>
+                  <a:tcPr>
+                    <a:solidFill>
+                      <a:srgbClr val="F4F6FA"/>
+                    </a:solidFill>
+                  </a:tcPr>
+                </a:tc>
+                <a:tc>
+                  <a:txBody>
+                    <a:bodyPr wrap="square"/>
+                    <a:lstStyle/>
+                    <a:p>
+                      <a:r>
+                        <a:rPr sz="1100" b="0">
+                          <a:solidFill>
+                            <a:srgbClr val="1A1A1A"/>
+                          </a:solidFill>
+                          <a:latin typeface="Arial"/>
+                        </a:rPr>
+                        <a:t>Zahlungsziele bei Lieferanten verlängern</a:t>
+                      </a:r>
+                    </a:p>
+                  </a:txBody>
+                  <a:tcPr>
+                    <a:solidFill>
+                      <a:srgbClr val="F4F6FA"/>
+                    </a:solidFill>
+                  </a:tcPr>
+                </a:tc>
+              </a:tr>
+              <a:tr h="475488">
+                <a:tc>
+                  <a:txBody>
+                    <a:bodyPr wrap="square"/>
+                    <a:lstStyle/>
+                    <a:p>
+                      <a:r>
+                        <a:rPr sz="1100" b="0">
+                          <a:solidFill>
+                            <a:srgbClr val="1A1A1A"/>
+                          </a:solidFill>
+                          <a:latin typeface="Arial"/>
+                        </a:rPr>
+                        <a:t>Lagerdauer (DIO)</a:t>
+                      </a:r>
+                    </a:p>
+                  </a:txBody>
+                  <a:tcPr>
+                    <a:solidFill>
+                      <a:srgbClr val="FFFFFF"/>
+                    </a:solidFill>
+                  </a:tcPr>
+                </a:tc>
+                <a:tc>
+                  <a:txBody>
+                    <a:bodyPr wrap="square"/>
+                    <a:lstStyle/>
+                    <a:p>
+                      <a:r>
+                        <a:rPr sz="1100" b="0">
+                          <a:solidFill>
+                            <a:srgbClr val="1A1A1A"/>
+                          </a:solidFill>
+                          <a:latin typeface="Arial"/>
+                        </a:rPr>
+                        <a:t>Vorräte / (COGS / 365)</a:t>
+                      </a:r>
+                    </a:p>
+                  </a:txBody>
+                  <a:tcPr>
+                    <a:solidFill>
+                      <a:srgbClr val="FFFFFF"/>
+                    </a:solidFill>
+                  </a:tcPr>
+                </a:tc>
+                <a:tc>
+                  <a:txBody>
+                    <a:bodyPr wrap="square"/>
+                    <a:lstStyle/>
+                    <a:p>
+                      <a:r>
+                        <a:rPr sz="1100" b="0">
+                          <a:solidFill>
+                            <a:srgbClr val="1A1A1A"/>
+                          </a:solidFill>
+                          <a:latin typeface="Arial"/>
+                        </a:rPr>
+                        <a:t>Lagerbestand optimieren, Just-in-time</a:t>
+                      </a:r>
+                    </a:p>
+                  </a:txBody>
+                  <a:tcPr>
+                    <a:solidFill>
+                      <a:srgbClr val="FFFFFF"/>
+                    </a:solidFill>
+                  </a:tcPr>
+                </a:tc>
+              </a:tr>
+              <a:tr h="475488">
+                <a:tc>
+                  <a:txBody>
+                    <a:bodyPr wrap="square"/>
+                    <a:lstStyle/>
+                    <a:p>
+                      <a:r>
+                        <a:rPr sz="1100" b="0">
+                          <a:solidFill>
+                            <a:srgbClr val="1A1A1A"/>
+                          </a:solidFill>
+                          <a:latin typeface="Arial"/>
+                        </a:rPr>
+                        <a:t>Cash Conversion Cycle (CCC)</a:t>
+                      </a:r>
+                    </a:p>
+                  </a:txBody>
+                  <a:tcPr>
+                    <a:solidFill>
+                      <a:srgbClr val="F4F6FA"/>
+                    </a:solidFill>
+                  </a:tcPr>
+                </a:tc>
+                <a:tc>
+                  <a:txBody>
+                    <a:bodyPr wrap="square"/>
+                    <a:lstStyle/>
+                    <a:p>
+                      <a:r>
+                        <a:rPr sz="1100" b="0">
+                          <a:solidFill>
+                            <a:srgbClr val="1A1A1A"/>
+                          </a:solidFill>
+                          <a:latin typeface="Arial"/>
+                        </a:rPr>
+                        <a:t>DSO + DIO − DPO</a:t>
+                      </a:r>
+                    </a:p>
+                  </a:txBody>
+                  <a:tcPr>
+                    <a:solidFill>
+                      <a:srgbClr val="F4F6FA"/>
+                    </a:solidFill>
+                  </a:tcPr>
+                </a:tc>
+                <a:tc>
+                  <a:txBody>
+                    <a:bodyPr wrap="square"/>
+                    <a:lstStyle/>
+                    <a:p>
+                      <a:r>
+                        <a:rPr sz="1100" b="0">
+                          <a:solidFill>
+                            <a:srgbClr val="1A1A1A"/>
+                          </a:solidFill>
+                          <a:latin typeface="Arial"/>
+                        </a:rPr>
+                        <a:t>Ziel: CCC minimieren = Liquiditätsbedarf sinkt</a:t>
+                      </a:r>
+                    </a:p>
+                  </a:txBody>
+                  <a:tcPr>
+                    <a:solidFill>
+                      <a:srgbClr val="F4F6FA"/>
+                    </a:solidFill>
+                  </a:tcPr>
+                </a:tc>
+              </a:tr>
+            </a:tbl>
+          </a:graphicData>
+        </a:graphic>
+      </p:graphicFrame>
     </p:spTree>
   </p:cSld>
   <p:clrMapOvr>
@@ -4064,7 +6723,7 @@
 </p:sld>
 </file>
 
-<file path=ppt/slides/slide3.xml><?xml version="1.0" encoding="utf-8"?>
+<file path=ppt/slides/slide18.xml><?xml version="1.0" encoding="utf-8"?>
 <p:sld xmlns:a="http://schemas.openxmlformats.org/drawingml/2006/main" xmlns:p="http://schemas.openxmlformats.org/presentationml/2006/main" xmlns:r="http://schemas.openxmlformats.org/officeDocument/2006/relationships">
   <p:cSld>
     <p:bg>
@@ -4133,8 +6792,8 @@
         </p:nvSpPr>
         <p:spPr>
           <a:xfrm>
-            <a:off x="365760" y="274320"/>
-            <a:ext cx="11430000" cy="822960"/>
+            <a:off x="228600" y="182880"/>
+            <a:ext cx="11430000" cy="320040"/>
           </a:xfrm>
           <a:prstGeom prst="rect">
             <a:avLst/>
@@ -4149,33 +6808,68 @@
           <a:p>
             <a:pPr algn="l"/>
             <a:r>
-              <a:rPr sz="2200" b="1">
+              <a:rPr sz="900" b="0" i="0">
+                <a:solidFill>
+                  <a:srgbClr val="556575"/>
+                </a:solidFill>
+                <a:latin typeface="Arial"/>
+              </a:rPr>
+              <a:t>M03 · Modulinhalte</a:t>
+            </a:r>
+          </a:p>
+        </p:txBody>
+      </p:sp>
+      <p:sp>
+        <p:nvSpPr>
+          <p:cNvPr id="4" name="TextBox 3"/>
+          <p:cNvSpPr txBox="1"/>
+          <p:nvPr/>
+        </p:nvSpPr>
+        <p:spPr>
+          <a:xfrm>
+            <a:off x="365760" y="274320"/>
+            <a:ext cx="11430000" cy="777240"/>
+          </a:xfrm>
+          <a:prstGeom prst="rect">
+            <a:avLst/>
+          </a:prstGeom>
+          <a:noFill/>
+        </p:spPr>
+        <p:txBody>
+          <a:bodyPr wrap="square">
+            <a:spAutoFit/>
+          </a:bodyPr>
+          <a:lstStyle/>
+          <a:p>
+            <a:pPr algn="l"/>
+            <a:r>
+              <a:rPr sz="2200" b="1" i="0">
                 <a:solidFill>
                   <a:srgbClr val="003DA5"/>
                 </a:solidFill>
                 <a:latin typeface="Arial"/>
               </a:rPr>
-              <a:t>Zentrale Werttreiber im Mittelstand</a:t>
-            </a:r>
-          </a:p>
-        </p:txBody>
-      </p:sp>
-      <p:sp>
-        <p:nvSpPr>
-          <p:cNvPr id="4" name="Rectangle 3"/>
+              <a:t>Instrumente der Wachstumsfinanzierung</a:t>
+            </a:r>
+          </a:p>
+        </p:txBody>
+      </p:sp>
+      <p:sp>
+        <p:nvSpPr>
+          <p:cNvPr id="5" name="Rectangle 4"/>
           <p:cNvSpPr/>
           <p:nvPr/>
         </p:nvSpPr>
         <p:spPr>
           <a:xfrm>
-            <a:off x="365760" y="1051560"/>
+            <a:off x="365760" y="1005840"/>
             <a:ext cx="11430000" cy="27432"/>
           </a:xfrm>
           <a:prstGeom prst="rect">
             <a:avLst/>
           </a:prstGeom>
           <a:solidFill>
-            <a:srgbClr val="E5E7EB"/>
+            <a:srgbClr val="D1D5DB"/>
           </a:solidFill>
           <a:ln>
             <a:noFill/>
@@ -4203,89 +6897,373 @@
           </a:p>
         </p:txBody>
       </p:sp>
-      <p:sp>
-        <p:nvSpPr>
-          <p:cNvPr id="5" name="TextBox 4"/>
-          <p:cNvSpPr txBox="1"/>
+      <p:graphicFrame>
+        <p:nvGraphicFramePr>
+          <p:cNvPr id="6" name="Table 5"/>
+          <p:cNvGraphicFramePr>
+            <a:graphicFrameLocks noGrp="1"/>
+          </p:cNvGraphicFramePr>
           <p:nvPr/>
-        </p:nvSpPr>
-        <p:spPr>
-          <a:xfrm>
-            <a:off x="365760" y="1234440"/>
-            <a:ext cx="11430000" cy="5212080"/>
-          </a:xfrm>
-          <a:prstGeom prst="rect">
-            <a:avLst/>
-          </a:prstGeom>
-          <a:noFill/>
-        </p:spPr>
-        <p:txBody>
-          <a:bodyPr wrap="square">
-            <a:spAutoFit/>
-          </a:bodyPr>
-          <a:lstStyle/>
-          <a:p>
-            <a:pPr>
-              <a:spcBef>
-                <a:spcPts val="400"/>
-              </a:spcBef>
-            </a:pPr>
-            <a:r>
-              <a:rPr sz="1500">
-                <a:solidFill>
-                  <a:srgbClr val="003DA5"/>
-                </a:solidFill>
-                <a:latin typeface="Arial"/>
-              </a:rPr>
-              <a:t>▪  </a:t>
-            </a:r>
-            <a:r>
-              <a:rPr sz="1700">
-                <a:solidFill>
-                  <a:srgbClr val="1A1A1A"/>
-                </a:solidFill>
-                <a:latin typeface="Arial"/>
-              </a:rPr>
-              <a:t>(vgl.)</a:t>
-            </a:r>
-          </a:p>
-        </p:txBody>
-      </p:sp>
-      <p:sp>
-        <p:nvSpPr>
-          <p:cNvPr id="6" name="TextBox 5"/>
-          <p:cNvSpPr txBox="1"/>
-          <p:nvPr/>
-        </p:nvSpPr>
-        <p:spPr>
-          <a:xfrm>
-            <a:off x="11704320" y="6492240"/>
-            <a:ext cx="365760" cy="274320"/>
-          </a:xfrm>
-          <a:prstGeom prst="rect">
-            <a:avLst/>
-          </a:prstGeom>
-          <a:noFill/>
-        </p:spPr>
-        <p:txBody>
-          <a:bodyPr wrap="square">
-            <a:spAutoFit/>
-          </a:bodyPr>
-          <a:lstStyle/>
-          <a:p>
-            <a:pPr algn="r"/>
-            <a:r>
-              <a:rPr sz="1000" b="0">
-                <a:solidFill>
-                  <a:srgbClr val="6B7280"/>
-                </a:solidFill>
-                <a:latin typeface="Arial"/>
-              </a:rPr>
-              <a:t>1</a:t>
-            </a:r>
-          </a:p>
-        </p:txBody>
-      </p:sp>
+        </p:nvGraphicFramePr>
+        <p:xfrm>
+          <a:off x="365760" y="1143000"/>
+          <a:ext cx="11430000" cy="2377440"/>
+        </p:xfrm>
+        <a:graphic>
+          <a:graphicData uri="http://schemas.openxmlformats.org/drawingml/2006/table">
+            <a:tbl>
+              <a:tblPr firstRow="1" bandRow="1">
+                <a:tableStyleId>{5C22544A-7EE6-4342-B048-85BDC9FD1C3A}</a:tableStyleId>
+              </a:tblPr>
+              <a:tblGrid>
+                <a:gridCol w="3810000"/>
+                <a:gridCol w="3810000"/>
+                <a:gridCol w="3810000"/>
+              </a:tblGrid>
+              <a:tr h="475488">
+                <a:tc>
+                  <a:txBody>
+                    <a:bodyPr wrap="square"/>
+                    <a:lstStyle/>
+                    <a:p>
+                      <a:r>
+                        <a:rPr sz="1100" b="1">
+                          <a:solidFill>
+                            <a:srgbClr val="FFFFFF"/>
+                          </a:solidFill>
+                          <a:latin typeface="Arial"/>
+                        </a:rPr>
+                        <a:t>Instrument</a:t>
+                      </a:r>
+                    </a:p>
+                  </a:txBody>
+                  <a:tcPr>
+                    <a:solidFill>
+                      <a:srgbClr val="003DA5"/>
+                    </a:solidFill>
+                  </a:tcPr>
+                </a:tc>
+                <a:tc>
+                  <a:txBody>
+                    <a:bodyPr wrap="square"/>
+                    <a:lstStyle/>
+                    <a:p>
+                      <a:r>
+                        <a:rPr sz="1100" b="1">
+                          <a:solidFill>
+                            <a:srgbClr val="FFFFFF"/>
+                          </a:solidFill>
+                          <a:latin typeface="Arial"/>
+                        </a:rPr>
+                        <a:t>Einsatzbereich</a:t>
+                      </a:r>
+                    </a:p>
+                  </a:txBody>
+                  <a:tcPr>
+                    <a:solidFill>
+                      <a:srgbClr val="003DA5"/>
+                    </a:solidFill>
+                  </a:tcPr>
+                </a:tc>
+                <a:tc>
+                  <a:txBody>
+                    <a:bodyPr wrap="square"/>
+                    <a:lstStyle/>
+                    <a:p>
+                      <a:r>
+                        <a:rPr sz="1100" b="1">
+                          <a:solidFill>
+                            <a:srgbClr val="FFFFFF"/>
+                          </a:solidFill>
+                          <a:latin typeface="Arial"/>
+                        </a:rPr>
+                        <a:t>Typische Merkmale</a:t>
+                      </a:r>
+                    </a:p>
+                  </a:txBody>
+                  <a:tcPr>
+                    <a:solidFill>
+                      <a:srgbClr val="003DA5"/>
+                    </a:solidFill>
+                  </a:tcPr>
+                </a:tc>
+              </a:tr>
+              <a:tr h="475488">
+                <a:tc>
+                  <a:txBody>
+                    <a:bodyPr wrap="square"/>
+                    <a:lstStyle/>
+                    <a:p>
+                      <a:r>
+                        <a:rPr sz="1100" b="0">
+                          <a:solidFill>
+                            <a:srgbClr val="1A1A1A"/>
+                          </a:solidFill>
+                          <a:latin typeface="Arial"/>
+                        </a:rPr>
+                        <a:t>Kontokorrentlinie</a:t>
+                      </a:r>
+                    </a:p>
+                  </a:txBody>
+                  <a:tcPr>
+                    <a:solidFill>
+                      <a:srgbClr val="FFFFFF"/>
+                    </a:solidFill>
+                  </a:tcPr>
+                </a:tc>
+                <a:tc>
+                  <a:txBody>
+                    <a:bodyPr wrap="square"/>
+                    <a:lstStyle/>
+                    <a:p>
+                      <a:r>
+                        <a:rPr sz="1100" b="0">
+                          <a:solidFill>
+                            <a:srgbClr val="1A1A1A"/>
+                          </a:solidFill>
+                          <a:latin typeface="Arial"/>
+                        </a:rPr>
+                        <a:t>Saisonale / kurzfristige Schwankungen</a:t>
+                      </a:r>
+                    </a:p>
+                  </a:txBody>
+                  <a:tcPr>
+                    <a:solidFill>
+                      <a:srgbClr val="FFFFFF"/>
+                    </a:solidFill>
+                  </a:tcPr>
+                </a:tc>
+                <a:tc>
+                  <a:txBody>
+                    <a:bodyPr wrap="square"/>
+                    <a:lstStyle/>
+                    <a:p>
+                      <a:r>
+                        <a:rPr sz="1100" b="0">
+                          <a:solidFill>
+                            <a:srgbClr val="1A1A1A"/>
+                          </a:solidFill>
+                          <a:latin typeface="Arial"/>
+                        </a:rPr>
+                        <a:t>Revolving, tagesgenaue Inanspruchnahme</a:t>
+                      </a:r>
+                    </a:p>
+                  </a:txBody>
+                  <a:tcPr>
+                    <a:solidFill>
+                      <a:srgbClr val="FFFFFF"/>
+                    </a:solidFill>
+                  </a:tcPr>
+                </a:tc>
+              </a:tr>
+              <a:tr h="475488">
+                <a:tc>
+                  <a:txBody>
+                    <a:bodyPr wrap="square"/>
+                    <a:lstStyle/>
+                    <a:p>
+                      <a:r>
+                        <a:rPr sz="1100" b="0">
+                          <a:solidFill>
+                            <a:srgbClr val="1A1A1A"/>
+                          </a:solidFill>
+                          <a:latin typeface="Arial"/>
+                        </a:rPr>
+                        <a:t>Betriebsmittelkredit</a:t>
+                      </a:r>
+                    </a:p>
+                  </a:txBody>
+                  <a:tcPr>
+                    <a:solidFill>
+                      <a:srgbClr val="F4F6FA"/>
+                    </a:solidFill>
+                  </a:tcPr>
+                </a:tc>
+                <a:tc>
+                  <a:txBody>
+                    <a:bodyPr wrap="square"/>
+                    <a:lstStyle/>
+                    <a:p>
+                      <a:r>
+                        <a:rPr sz="1100" b="0">
+                          <a:solidFill>
+                            <a:srgbClr val="1A1A1A"/>
+                          </a:solidFill>
+                          <a:latin typeface="Arial"/>
+                        </a:rPr>
+                        <a:t>Struktureller Working-Capital-Anstieg</a:t>
+                      </a:r>
+                    </a:p>
+                  </a:txBody>
+                  <a:tcPr>
+                    <a:solidFill>
+                      <a:srgbClr val="F4F6FA"/>
+                    </a:solidFill>
+                  </a:tcPr>
+                </a:tc>
+                <a:tc>
+                  <a:txBody>
+                    <a:bodyPr wrap="square"/>
+                    <a:lstStyle/>
+                    <a:p>
+                      <a:r>
+                        <a:rPr sz="1100" b="0">
+                          <a:solidFill>
+                            <a:srgbClr val="1A1A1A"/>
+                          </a:solidFill>
+                          <a:latin typeface="Arial"/>
+                        </a:rPr>
+                        <a:t>Laufzeit 1–3 Jahre, feste Tranche</a:t>
+                      </a:r>
+                    </a:p>
+                  </a:txBody>
+                  <a:tcPr>
+                    <a:solidFill>
+                      <a:srgbClr val="F4F6FA"/>
+                    </a:solidFill>
+                  </a:tcPr>
+                </a:tc>
+              </a:tr>
+              <a:tr h="475488">
+                <a:tc>
+                  <a:txBody>
+                    <a:bodyPr wrap="square"/>
+                    <a:lstStyle/>
+                    <a:p>
+                      <a:r>
+                        <a:rPr sz="1100" b="0">
+                          <a:solidFill>
+                            <a:srgbClr val="1A1A1A"/>
+                          </a:solidFill>
+                          <a:latin typeface="Arial"/>
+                        </a:rPr>
+                        <a:t>Factoring</a:t>
+                      </a:r>
+                    </a:p>
+                  </a:txBody>
+                  <a:tcPr>
+                    <a:solidFill>
+                      <a:srgbClr val="FFFFFF"/>
+                    </a:solidFill>
+                  </a:tcPr>
+                </a:tc>
+                <a:tc>
+                  <a:txBody>
+                    <a:bodyPr wrap="square"/>
+                    <a:lstStyle/>
+                    <a:p>
+                      <a:r>
+                        <a:rPr sz="1100" b="0">
+                          <a:solidFill>
+                            <a:srgbClr val="1A1A1A"/>
+                          </a:solidFill>
+                          <a:latin typeface="Arial"/>
+                        </a:rPr>
+                        <a:t>Sofortige Liquidität aus Forderungen</a:t>
+                      </a:r>
+                    </a:p>
+                  </a:txBody>
+                  <a:tcPr>
+                    <a:solidFill>
+                      <a:srgbClr val="FFFFFF"/>
+                    </a:solidFill>
+                  </a:tcPr>
+                </a:tc>
+                <a:tc>
+                  <a:txBody>
+                    <a:bodyPr wrap="square"/>
+                    <a:lstStyle/>
+                    <a:p>
+                      <a:r>
+                        <a:rPr sz="1100" b="0">
+                          <a:solidFill>
+                            <a:srgbClr val="1A1A1A"/>
+                          </a:solidFill>
+                          <a:latin typeface="Arial"/>
+                        </a:rPr>
+                        <a:t>DSO auf 0–2 Tage; Kosten 0,8–2,0 % p.a.</a:t>
+                      </a:r>
+                    </a:p>
+                  </a:txBody>
+                  <a:tcPr>
+                    <a:solidFill>
+                      <a:srgbClr val="FFFFFF"/>
+                    </a:solidFill>
+                  </a:tcPr>
+                </a:tc>
+              </a:tr>
+              <a:tr h="475488">
+                <a:tc>
+                  <a:txBody>
+                    <a:bodyPr wrap="square"/>
+                    <a:lstStyle/>
+                    <a:p>
+                      <a:r>
+                        <a:rPr sz="1100" b="0">
+                          <a:solidFill>
+                            <a:srgbClr val="1A1A1A"/>
+                          </a:solidFill>
+                          <a:latin typeface="Arial"/>
+                        </a:rPr>
+                        <a:t>Investitionskredit</a:t>
+                      </a:r>
+                    </a:p>
+                  </a:txBody>
+                  <a:tcPr>
+                    <a:solidFill>
+                      <a:srgbClr val="F4F6FA"/>
+                    </a:solidFill>
+                  </a:tcPr>
+                </a:tc>
+                <a:tc>
+                  <a:txBody>
+                    <a:bodyPr wrap="square"/>
+                    <a:lstStyle/>
+                    <a:p>
+                      <a:r>
+                        <a:rPr sz="1100" b="0">
+                          <a:solidFill>
+                            <a:srgbClr val="1A1A1A"/>
+                          </a:solidFill>
+                          <a:latin typeface="Arial"/>
+                        </a:rPr>
+                        <a:t>Maschinen, Anlagen, Gebäude</a:t>
+                      </a:r>
+                    </a:p>
+                  </a:txBody>
+                  <a:tcPr>
+                    <a:solidFill>
+                      <a:srgbClr val="F4F6FA"/>
+                    </a:solidFill>
+                  </a:tcPr>
+                </a:tc>
+                <a:tc>
+                  <a:txBody>
+                    <a:bodyPr wrap="square"/>
+                    <a:lstStyle/>
+                    <a:p>
+                      <a:r>
+                        <a:rPr sz="1100" b="0">
+                          <a:solidFill>
+                            <a:srgbClr val="1A1A1A"/>
+                          </a:solidFill>
+                          <a:latin typeface="Arial"/>
+                        </a:rPr>
+                        <a:t>Laufzeit 5–15 Jahre, ggf. Fördermittel</a:t>
+                      </a:r>
+                    </a:p>
+                  </a:txBody>
+                  <a:tcPr>
+                    <a:solidFill>
+                      <a:srgbClr val="F4F6FA"/>
+                    </a:solidFill>
+                  </a:tcPr>
+                </a:tc>
+              </a:tr>
+            </a:tbl>
+          </a:graphicData>
+        </a:graphic>
+      </p:graphicFrame>
     </p:spTree>
   </p:cSld>
   <p:clrMapOvr>
@@ -4294,13 +7272,303 @@
 </p:sld>
 </file>
 
-<file path=ppt/slides/slide4.xml><?xml version="1.0" encoding="utf-8"?>
+<file path=ppt/slides/slide19.xml><?xml version="1.0" encoding="utf-8"?>
 <p:sld xmlns:a="http://schemas.openxmlformats.org/drawingml/2006/main" xmlns:p="http://schemas.openxmlformats.org/presentationml/2006/main" xmlns:r="http://schemas.openxmlformats.org/officeDocument/2006/relationships">
   <p:cSld>
     <p:bg>
       <p:bgPr>
         <a:solidFill>
-          <a:srgbClr val="FFFFFF"/>
+          <a:srgbClr val="003DA5"/>
+        </a:solidFill>
+        <a:effectLst/>
+      </p:bgPr>
+    </p:bg>
+    <p:spTree>
+      <p:nvGrpSpPr>
+        <p:cNvPr id="1" name=""/>
+        <p:cNvGrpSpPr/>
+        <p:nvPr/>
+      </p:nvGrpSpPr>
+      <p:grpSpPr/>
+      <p:sp>
+        <p:nvSpPr>
+          <p:cNvPr id="2" name="Rectangle 1"/>
+          <p:cNvSpPr/>
+          <p:nvPr/>
+        </p:nvSpPr>
+        <p:spPr>
+          <a:xfrm>
+            <a:off x="0" y="0"/>
+            <a:ext cx="73152" cy="6858000"/>
+          </a:xfrm>
+          <a:prstGeom prst="rect">
+            <a:avLst/>
+          </a:prstGeom>
+          <a:solidFill>
+            <a:srgbClr val="E05B00"/>
+          </a:solidFill>
+          <a:ln>
+            <a:noFill/>
+          </a:ln>
+        </p:spPr>
+        <p:style>
+          <a:lnRef idx="1">
+            <a:schemeClr val="accent1"/>
+          </a:lnRef>
+          <a:fillRef idx="3">
+            <a:schemeClr val="accent1"/>
+          </a:fillRef>
+          <a:effectRef idx="2">
+            <a:schemeClr val="accent1"/>
+          </a:effectRef>
+          <a:fontRef idx="minor">
+            <a:schemeClr val="lt1"/>
+          </a:fontRef>
+        </p:style>
+        <p:txBody>
+          <a:bodyPr rtlCol="0" anchor="ctr"/>
+          <a:lstStyle/>
+          <a:p>
+            <a:pPr algn="ctr"/>
+          </a:p>
+        </p:txBody>
+      </p:sp>
+      <p:sp>
+        <p:nvSpPr>
+          <p:cNvPr id="3" name="TextBox 2"/>
+          <p:cNvSpPr txBox="1"/>
+          <p:nvPr/>
+        </p:nvSpPr>
+        <p:spPr>
+          <a:xfrm>
+            <a:off x="365760" y="347472"/>
+            <a:ext cx="7315200" cy="384048"/>
+          </a:xfrm>
+          <a:prstGeom prst="rect">
+            <a:avLst/>
+          </a:prstGeom>
+          <a:noFill/>
+        </p:spPr>
+        <p:txBody>
+          <a:bodyPr wrap="square">
+            <a:spAutoFit/>
+          </a:bodyPr>
+          <a:lstStyle/>
+          <a:p>
+            <a:pPr algn="l"/>
+            <a:r>
+              <a:rPr sz="900" b="1" i="0">
+                <a:solidFill>
+                  <a:srgbClr val="CCD6F0"/>
+                </a:solidFill>
+                <a:latin typeface="Arial"/>
+              </a:rPr>
+              <a:t>PRAXISTRANSFER &amp; NÄCHSTE SCHRITTE</a:t>
+            </a:r>
+          </a:p>
+        </p:txBody>
+      </p:sp>
+      <p:sp>
+        <p:nvSpPr>
+          <p:cNvPr id="4" name="Rectangle 3"/>
+          <p:cNvSpPr/>
+          <p:nvPr/>
+        </p:nvSpPr>
+        <p:spPr>
+          <a:xfrm>
+            <a:off x="365760" y="804672"/>
+            <a:ext cx="8229600" cy="22860"/>
+          </a:xfrm>
+          <a:prstGeom prst="rect">
+            <a:avLst/>
+          </a:prstGeom>
+          <a:solidFill>
+            <a:srgbClr val="335CC0"/>
+          </a:solidFill>
+          <a:ln>
+            <a:noFill/>
+          </a:ln>
+        </p:spPr>
+        <p:style>
+          <a:lnRef idx="1">
+            <a:schemeClr val="accent1"/>
+          </a:lnRef>
+          <a:fillRef idx="3">
+            <a:schemeClr val="accent1"/>
+          </a:fillRef>
+          <a:effectRef idx="2">
+            <a:schemeClr val="accent1"/>
+          </a:effectRef>
+          <a:fontRef idx="minor">
+            <a:schemeClr val="lt1"/>
+          </a:fontRef>
+        </p:style>
+        <p:txBody>
+          <a:bodyPr rtlCol="0" anchor="ctr"/>
+          <a:lstStyle/>
+          <a:p>
+            <a:pPr algn="ctr"/>
+          </a:p>
+        </p:txBody>
+      </p:sp>
+      <p:sp>
+        <p:nvSpPr>
+          <p:cNvPr id="5" name="TextBox 4"/>
+          <p:cNvSpPr txBox="1"/>
+          <p:nvPr/>
+        </p:nvSpPr>
+        <p:spPr>
+          <a:xfrm>
+            <a:off x="365760" y="960120"/>
+            <a:ext cx="9144000" cy="914400"/>
+          </a:xfrm>
+          <a:prstGeom prst="rect">
+            <a:avLst/>
+          </a:prstGeom>
+          <a:noFill/>
+        </p:spPr>
+        <p:txBody>
+          <a:bodyPr wrap="square">
+            <a:spAutoFit/>
+          </a:bodyPr>
+          <a:lstStyle/>
+          <a:p>
+            <a:pPr algn="l"/>
+            <a:r>
+              <a:rPr sz="3000" b="1" i="0">
+                <a:solidFill>
+                  <a:srgbClr val="FFFFFF"/>
+                </a:solidFill>
+                <a:latin typeface="Arial"/>
+              </a:rPr>
+              <a:t>Was nehmen Sie mit?</a:t>
+            </a:r>
+          </a:p>
+        </p:txBody>
+      </p:sp>
+      <p:sp>
+        <p:nvSpPr>
+          <p:cNvPr id="6" name="TextBox 5"/>
+          <p:cNvSpPr txBox="1"/>
+          <p:nvPr/>
+        </p:nvSpPr>
+        <p:spPr>
+          <a:xfrm>
+            <a:off x="365760" y="2103120"/>
+            <a:ext cx="11430000" cy="4114800"/>
+          </a:xfrm>
+          <a:prstGeom prst="rect">
+            <a:avLst/>
+          </a:prstGeom>
+          <a:noFill/>
+        </p:spPr>
+        <p:txBody>
+          <a:bodyPr wrap="square">
+            <a:spAutoFit/>
+          </a:bodyPr>
+          <a:lstStyle/>
+          <a:p>
+            <a:pPr>
+              <a:spcBef>
+                <a:spcPts val="500"/>
+              </a:spcBef>
+            </a:pPr>
+            <a:r>
+              <a:rPr sz="1600">
+                <a:solidFill>
+                  <a:srgbClr val="E05B00"/>
+                </a:solidFill>
+                <a:latin typeface="Arial"/>
+              </a:rPr>
+              <a:t>▪  </a:t>
+            </a:r>
+            <a:r>
+              <a:rPr sz="1800">
+                <a:solidFill>
+                  <a:srgbClr val="FFFFFF"/>
+                </a:solidFill>
+                <a:latin typeface="Arial"/>
+              </a:rPr>
+              <a:t>Transferaufgabe: Wenden Sie das Gelernte in den nächsten 14 Tagen bei einem konkreten Kunden an.</a:t>
+            </a:r>
+          </a:p>
+          <a:p>
+            <a:pPr>
+              <a:spcBef>
+                <a:spcPts val="500"/>
+              </a:spcBef>
+            </a:pPr>
+            <a:r>
+              <a:rPr sz="1600">
+                <a:solidFill>
+                  <a:srgbClr val="E05B00"/>
+                </a:solidFill>
+                <a:latin typeface="Arial"/>
+              </a:rPr>
+              <a:t>▪  </a:t>
+            </a:r>
+            <a:r>
+              <a:rPr sz="1800">
+                <a:solidFill>
+                  <a:srgbClr val="FFFFFF"/>
+                </a:solidFill>
+                <a:latin typeface="Arial"/>
+              </a:rPr>
+              <a:t>Selbstcheck nach 4 Wochen: Bewerten Sie Ihre Fortschritte ehrlich.</a:t>
+            </a:r>
+          </a:p>
+        </p:txBody>
+      </p:sp>
+      <p:sp>
+        <p:nvSpPr>
+          <p:cNvPr id="7" name="TextBox 6"/>
+          <p:cNvSpPr txBox="1"/>
+          <p:nvPr/>
+        </p:nvSpPr>
+        <p:spPr>
+          <a:xfrm>
+            <a:off x="365760" y="6309360"/>
+            <a:ext cx="11430000" cy="365760"/>
+          </a:xfrm>
+          <a:prstGeom prst="rect">
+            <a:avLst/>
+          </a:prstGeom>
+          <a:noFill/>
+        </p:spPr>
+        <p:txBody>
+          <a:bodyPr wrap="square">
+            <a:spAutoFit/>
+          </a:bodyPr>
+          <a:lstStyle/>
+          <a:p>
+            <a:pPr algn="l"/>
+            <a:r>
+              <a:rPr sz="900" b="0" i="0">
+                <a:solidFill>
+                  <a:srgbClr val="889ACC"/>
+                </a:solidFill>
+                <a:latin typeface="Arial"/>
+              </a:rPr>
+              <a:t>M03 · Der strategische Finanzdialog  ·  v1.1  ·  Benedikt Zoller Coaching</a:t>
+            </a:r>
+          </a:p>
+        </p:txBody>
+      </p:sp>
+    </p:spTree>
+  </p:cSld>
+  <p:clrMapOvr>
+    <a:masterClrMapping/>
+  </p:clrMapOvr>
+</p:sld>
+</file>
+
+<file path=ppt/slides/slide2.xml><?xml version="1.0" encoding="utf-8"?>
+<p:sld xmlns:a="http://schemas.openxmlformats.org/drawingml/2006/main" xmlns:p="http://schemas.openxmlformats.org/presentationml/2006/main" xmlns:r="http://schemas.openxmlformats.org/officeDocument/2006/relationships">
+  <p:cSld>
+    <p:bg>
+      <p:bgPr>
+        <a:solidFill>
+          <a:srgbClr val="F4F6FA"/>
         </a:solidFill>
         <a:effectLst/>
       </p:bgPr>
@@ -4357,55 +7625,20 @@
       </p:sp>
       <p:sp>
         <p:nvSpPr>
-          <p:cNvPr id="3" name="TextBox 2"/>
-          <p:cNvSpPr txBox="1"/>
+          <p:cNvPr id="3" name="Rectangle 2"/>
+          <p:cNvSpPr/>
           <p:nvPr/>
         </p:nvSpPr>
         <p:spPr>
           <a:xfrm>
-            <a:off x="365760" y="274320"/>
-            <a:ext cx="11430000" cy="822960"/>
-          </a:xfrm>
-          <a:prstGeom prst="rect">
-            <a:avLst/>
-          </a:prstGeom>
-          <a:noFill/>
-        </p:spPr>
-        <p:txBody>
-          <a:bodyPr wrap="square">
-            <a:spAutoFit/>
-          </a:bodyPr>
-          <a:lstStyle/>
-          <a:p>
-            <a:pPr algn="l"/>
-            <a:r>
-              <a:rPr sz="2200" b="1">
-                <a:solidFill>
-                  <a:srgbClr val="003DA5"/>
-                </a:solidFill>
-                <a:latin typeface="Arial"/>
-              </a:rPr>
-              <a:t>Die fünf Kernszenarien</a:t>
-            </a:r>
-          </a:p>
-        </p:txBody>
-      </p:sp>
-      <p:sp>
-        <p:nvSpPr>
-          <p:cNvPr id="4" name="Rectangle 3"/>
-          <p:cNvSpPr/>
-          <p:nvPr/>
-        </p:nvSpPr>
-        <p:spPr>
-          <a:xfrm>
-            <a:off x="365760" y="1051560"/>
-            <a:ext cx="11430000" cy="27432"/>
+            <a:off x="228600" y="804672"/>
+            <a:ext cx="11612880" cy="22860"/>
           </a:xfrm>
           <a:prstGeom prst="rect">
             <a:avLst/>
           </a:prstGeom>
           <a:solidFill>
-            <a:srgbClr val="E5E7EB"/>
+            <a:srgbClr val="D1D5DB"/>
           </a:solidFill>
           <a:ln>
             <a:noFill/>
@@ -4435,14 +7668,14 @@
       </p:sp>
       <p:sp>
         <p:nvSpPr>
-          <p:cNvPr id="5" name="TextBox 4"/>
+          <p:cNvPr id="4" name="TextBox 3"/>
           <p:cNvSpPr txBox="1"/>
           <p:nvPr/>
         </p:nvSpPr>
         <p:spPr>
           <a:xfrm>
-            <a:off x="365760" y="1234440"/>
-            <a:ext cx="11430000" cy="5212080"/>
+            <a:off x="365760" y="320040"/>
+            <a:ext cx="4572000" cy="347472"/>
           </a:xfrm>
           <a:prstGeom prst="rect">
             <a:avLst/>
@@ -4455,9 +7688,79 @@
           </a:bodyPr>
           <a:lstStyle/>
           <a:p>
+            <a:pPr algn="l"/>
+            <a:r>
+              <a:rPr sz="900" b="1" i="0">
+                <a:solidFill>
+                  <a:srgbClr val="003DA5"/>
+                </a:solidFill>
+                <a:latin typeface="Arial"/>
+              </a:rPr>
+              <a:t>LERNZIELE</a:t>
+            </a:r>
+          </a:p>
+        </p:txBody>
+      </p:sp>
+      <p:sp>
+        <p:nvSpPr>
+          <p:cNvPr id="5" name="TextBox 4"/>
+          <p:cNvSpPr txBox="1"/>
+          <p:nvPr/>
+        </p:nvSpPr>
+        <p:spPr>
+          <a:xfrm>
+            <a:off x="365760" y="502920"/>
+            <a:ext cx="10058400" cy="640080"/>
+          </a:xfrm>
+          <a:prstGeom prst="rect">
+            <a:avLst/>
+          </a:prstGeom>
+          <a:noFill/>
+        </p:spPr>
+        <p:txBody>
+          <a:bodyPr wrap="square">
+            <a:spAutoFit/>
+          </a:bodyPr>
+          <a:lstStyle/>
+          <a:p>
+            <a:pPr algn="l"/>
+            <a:r>
+              <a:rPr sz="2400" b="1" i="0">
+                <a:solidFill>
+                  <a:srgbClr val="1A1A1A"/>
+                </a:solidFill>
+                <a:latin typeface="Arial"/>
+              </a:rPr>
+              <a:t>Was Sie nach diesem Modul können.</a:t>
+            </a:r>
+          </a:p>
+        </p:txBody>
+      </p:sp>
+      <p:sp>
+        <p:nvSpPr>
+          <p:cNvPr id="6" name="TextBox 5"/>
+          <p:cNvSpPr txBox="1"/>
+          <p:nvPr/>
+        </p:nvSpPr>
+        <p:spPr>
+          <a:xfrm>
+            <a:off x="365760" y="1234440"/>
+            <a:ext cx="11430000" cy="5303520"/>
+          </a:xfrm>
+          <a:prstGeom prst="rect">
+            <a:avLst/>
+          </a:prstGeom>
+          <a:noFill/>
+        </p:spPr>
+        <p:txBody>
+          <a:bodyPr wrap="square">
+            <a:spAutoFit/>
+          </a:bodyPr>
+          <a:lstStyle/>
+          <a:p>
             <a:pPr>
               <a:spcBef>
-                <a:spcPts val="400"/>
+                <a:spcPts val="500"/>
               </a:spcBef>
             </a:pPr>
             <a:r>
@@ -4476,13 +7779,13 @@
                 </a:solidFill>
                 <a:latin typeface="Arial"/>
               </a:rPr>
-              <a:t>So starten Sie Ihren ersten Fördermittelantrag: (1) Thema in agree unter „Fördermittelcheck" prüfen, (2) L-Bank Bayern…</a:t>
+              <a:t>Kapitalstruktur eines mittelständischen Unternehmens analysieren und Optimierungspotenziale identifizieren</a:t>
             </a:r>
           </a:p>
           <a:p>
             <a:pPr>
               <a:spcBef>
-                <a:spcPts val="400"/>
+                <a:spcPts val="500"/>
               </a:spcBef>
             </a:pPr>
             <a:r>
@@ -4501,42 +7804,82 @@
                 </a:solidFill>
                 <a:latin typeface="Arial"/>
               </a:rPr>
-              <a:t>Exkurs für exportorientierte Betriebe: Internationalisierung (Export-/Importfinanzierung, Währungsrisiken, ausländische…</a:t>
-            </a:r>
-          </a:p>
-        </p:txBody>
-      </p:sp>
-      <p:sp>
-        <p:nvSpPr>
-          <p:cNvPr id="6" name="TextBox 5"/>
-          <p:cNvSpPr txBox="1"/>
-          <p:nvPr/>
-        </p:nvSpPr>
-        <p:spPr>
-          <a:xfrm>
-            <a:off x="11704320" y="6492240"/>
-            <a:ext cx="365760" cy="274320"/>
-          </a:xfrm>
-          <a:prstGeom prst="rect">
-            <a:avLst/>
-          </a:prstGeom>
-          <a:noFill/>
-        </p:spPr>
-        <p:txBody>
-          <a:bodyPr wrap="square">
-            <a:spAutoFit/>
-          </a:bodyPr>
-          <a:lstStyle/>
-          <a:p>
-            <a:pPr algn="r"/>
-            <a:r>
-              <a:rPr sz="1000" b="0">
+              <a:t>Alternative Finanzierungsstrategien (Bankkredit, Mezzanine, Beteiligungskapital) nach Kosten, Flexibilität und strategischer Passung bewerten</a:t>
+            </a:r>
+          </a:p>
+          <a:p>
+            <a:pPr>
+              <a:spcBef>
+                <a:spcPts val="500"/>
+              </a:spcBef>
+            </a:pPr>
+            <a:r>
+              <a:rPr sz="1500">
                 <a:solidFill>
-                  <a:srgbClr val="6B7280"/>
+                  <a:srgbClr val="003DA5"/>
                 </a:solidFill>
                 <a:latin typeface="Arial"/>
               </a:rPr>
-              <a:t>2</a:t>
+              <a:t>▪  </a:t>
+            </a:r>
+            <a:r>
+              <a:rPr sz="1700">
+                <a:solidFill>
+                  <a:srgbClr val="1A1A1A"/>
+                </a:solidFill>
+                <a:latin typeface="Arial"/>
+              </a:rPr>
+              <a:t>Unternehmenswerttreiber (Wachstum, Marge, Kapitaleffizienz) analysieren und strategische Handlungsempfehlungen ableiten</a:t>
+            </a:r>
+          </a:p>
+          <a:p>
+            <a:pPr>
+              <a:spcBef>
+                <a:spcPts val="500"/>
+              </a:spcBef>
+            </a:pPr>
+            <a:r>
+              <a:rPr sz="1500">
+                <a:solidFill>
+                  <a:srgbClr val="003DA5"/>
+                </a:solidFill>
+                <a:latin typeface="Arial"/>
+              </a:rPr>
+              <a:t>▪  </a:t>
+            </a:r>
+            <a:r>
+              <a:rPr sz="1700">
+                <a:solidFill>
+                  <a:srgbClr val="1A1A1A"/>
+                </a:solidFill>
+                <a:latin typeface="Arial"/>
+              </a:rPr>
+              <a:t>Strategischen Finanzierungsplan einschließlich Meilensteinplanung und Risikobewertung entwickeln</a:t>
+            </a:r>
+          </a:p>
+          <a:p>
+            <a:pPr>
+              <a:spcBef>
+                <a:spcPts val="500"/>
+              </a:spcBef>
+            </a:pPr>
+            <a:r>
+              <a:rPr sz="1500">
+                <a:solidFill>
+                  <a:srgbClr val="003DA5"/>
+                </a:solidFill>
+                <a:latin typeface="Arial"/>
+              </a:rPr>
+              <a:t>▪  </a:t>
+            </a:r>
+            <a:r>
+              <a:rPr sz="1700">
+                <a:solidFill>
+                  <a:srgbClr val="1A1A1A"/>
+                </a:solidFill>
+                <a:latin typeface="Arial"/>
+              </a:rPr>
+              <a:t>Beurteilen, wann eine Bankfinanzierung ihre Grenzen erreicht und alternative Kapitalquellen strategisch sinnvoll sind</a:t>
             </a:r>
           </a:p>
         </p:txBody>
@@ -4549,7 +7892,111 @@
 </p:sld>
 </file>
 
-<file path=ppt/slides/slide5.xml><?xml version="1.0" encoding="utf-8"?>
+<file path=ppt/slides/slide3.xml><?xml version="1.0" encoding="utf-8"?>
+<p:sld xmlns:a="http://schemas.openxmlformats.org/drawingml/2006/main" xmlns:p="http://schemas.openxmlformats.org/presentationml/2006/main" xmlns:r="http://schemas.openxmlformats.org/officeDocument/2006/relationships">
+  <p:cSld>
+    <p:bg>
+      <p:bgPr>
+        <a:solidFill>
+          <a:srgbClr val="1A1A1A"/>
+        </a:solidFill>
+        <a:effectLst/>
+      </p:bgPr>
+    </p:bg>
+    <p:spTree>
+      <p:nvGrpSpPr>
+        <p:cNvPr id="1" name=""/>
+        <p:cNvGrpSpPr/>
+        <p:nvPr/>
+      </p:nvGrpSpPr>
+      <p:grpSpPr/>
+      <p:sp>
+        <p:nvSpPr>
+          <p:cNvPr id="2" name="Rectangle 1"/>
+          <p:cNvSpPr/>
+          <p:nvPr/>
+        </p:nvSpPr>
+        <p:spPr>
+          <a:xfrm>
+            <a:off x="0" y="0"/>
+            <a:ext cx="73152" cy="6858000"/>
+          </a:xfrm>
+          <a:prstGeom prst="rect">
+            <a:avLst/>
+          </a:prstGeom>
+          <a:solidFill>
+            <a:srgbClr val="E05B00"/>
+          </a:solidFill>
+          <a:ln>
+            <a:noFill/>
+          </a:ln>
+        </p:spPr>
+        <p:style>
+          <a:lnRef idx="1">
+            <a:schemeClr val="accent1"/>
+          </a:lnRef>
+          <a:fillRef idx="3">
+            <a:schemeClr val="accent1"/>
+          </a:fillRef>
+          <a:effectRef idx="2">
+            <a:schemeClr val="accent1"/>
+          </a:effectRef>
+          <a:fontRef idx="minor">
+            <a:schemeClr val="lt1"/>
+          </a:fontRef>
+        </p:style>
+        <p:txBody>
+          <a:bodyPr rtlCol="0" anchor="ctr"/>
+          <a:lstStyle/>
+          <a:p>
+            <a:pPr algn="ctr"/>
+          </a:p>
+        </p:txBody>
+      </p:sp>
+      <p:sp>
+        <p:nvSpPr>
+          <p:cNvPr id="3" name="TextBox 2"/>
+          <p:cNvSpPr txBox="1"/>
+          <p:nvPr/>
+        </p:nvSpPr>
+        <p:spPr>
+          <a:xfrm>
+            <a:off x="365760" y="2011680"/>
+            <a:ext cx="11430000" cy="2011680"/>
+          </a:xfrm>
+          <a:prstGeom prst="rect">
+            <a:avLst/>
+          </a:prstGeom>
+          <a:noFill/>
+        </p:spPr>
+        <p:txBody>
+          <a:bodyPr wrap="square">
+            <a:spAutoFit/>
+          </a:bodyPr>
+          <a:lstStyle/>
+          <a:p>
+            <a:pPr algn="l"/>
+            <a:r>
+              <a:rPr sz="3600" b="1" i="0">
+                <a:solidFill>
+                  <a:srgbClr val="FFFFFF"/>
+                </a:solidFill>
+                <a:latin typeface="Arial"/>
+              </a:rPr>
+              <a:t>Vom Bilanzgespräch zum Strategiegespräch</a:t>
+            </a:r>
+          </a:p>
+        </p:txBody>
+      </p:sp>
+    </p:spTree>
+  </p:cSld>
+  <p:clrMapOvr>
+    <a:masterClrMapping/>
+  </p:clrMapOvr>
+</p:sld>
+</file>
+
+<file path=ppt/slides/slide4.xml><?xml version="1.0" encoding="utf-8"?>
 <p:sld xmlns:a="http://schemas.openxmlformats.org/drawingml/2006/main" xmlns:p="http://schemas.openxmlformats.org/presentationml/2006/main" xmlns:r="http://schemas.openxmlformats.org/officeDocument/2006/relationships">
   <p:cSld>
     <p:bg>
@@ -4618,8 +8065,8 @@
         </p:nvSpPr>
         <p:spPr>
           <a:xfrm>
-            <a:off x="365760" y="274320"/>
-            <a:ext cx="11430000" cy="822960"/>
+            <a:off x="228600" y="182880"/>
+            <a:ext cx="11430000" cy="320040"/>
           </a:xfrm>
           <a:prstGeom prst="rect">
             <a:avLst/>
@@ -4634,33 +8081,68 @@
           <a:p>
             <a:pPr algn="l"/>
             <a:r>
-              <a:rPr sz="2200" b="1">
+              <a:rPr sz="900" b="0" i="0">
+                <a:solidFill>
+                  <a:srgbClr val="556575"/>
+                </a:solidFill>
+                <a:latin typeface="Arial"/>
+              </a:rPr>
+              <a:t>M03 · Modulinhalte</a:t>
+            </a:r>
+          </a:p>
+        </p:txBody>
+      </p:sp>
+      <p:sp>
+        <p:nvSpPr>
+          <p:cNvPr id="4" name="TextBox 3"/>
+          <p:cNvSpPr txBox="1"/>
+          <p:nvPr/>
+        </p:nvSpPr>
+        <p:spPr>
+          <a:xfrm>
+            <a:off x="365760" y="274320"/>
+            <a:ext cx="11430000" cy="777240"/>
+          </a:xfrm>
+          <a:prstGeom prst="rect">
+            <a:avLst/>
+          </a:prstGeom>
+          <a:noFill/>
+        </p:spPr>
+        <p:txBody>
+          <a:bodyPr wrap="square">
+            <a:spAutoFit/>
+          </a:bodyPr>
+          <a:lstStyle/>
+          <a:p>
+            <a:pPr algn="l"/>
+            <a:r>
+              <a:rPr sz="2200" b="1" i="0">
                 <a:solidFill>
                   <a:srgbClr val="003DA5"/>
                 </a:solidFill>
                 <a:latin typeface="Arial"/>
               </a:rPr>
-              <a:t>Strategische Ausgangslage</a:t>
-            </a:r>
-          </a:p>
-        </p:txBody>
-      </p:sp>
-      <p:sp>
-        <p:nvSpPr>
-          <p:cNvPr id="4" name="Rectangle 3"/>
+              <a:t>Die drei Ebenen des strategischen Finanzdialogs</a:t>
+            </a:r>
+          </a:p>
+        </p:txBody>
+      </p:sp>
+      <p:sp>
+        <p:nvSpPr>
+          <p:cNvPr id="5" name="Rectangle 4"/>
           <p:cNvSpPr/>
           <p:nvPr/>
         </p:nvSpPr>
         <p:spPr>
           <a:xfrm>
-            <a:off x="365760" y="1051560"/>
+            <a:off x="365760" y="1005840"/>
             <a:ext cx="11430000" cy="27432"/>
           </a:xfrm>
           <a:prstGeom prst="rect">
             <a:avLst/>
           </a:prstGeom>
           <a:solidFill>
-            <a:srgbClr val="E5E7EB"/>
+            <a:srgbClr val="D1D5DB"/>
           </a:solidFill>
           <a:ln>
             <a:noFill/>
@@ -4688,16 +8170,384 @@
           </a:p>
         </p:txBody>
       </p:sp>
-      <p:sp>
-        <p:nvSpPr>
-          <p:cNvPr id="5" name="TextBox 4"/>
+      <p:graphicFrame>
+        <p:nvGraphicFramePr>
+          <p:cNvPr id="6" name="Table 5"/>
+          <p:cNvGraphicFramePr>
+            <a:graphicFrameLocks noGrp="1"/>
+          </p:cNvGraphicFramePr>
+          <p:nvPr/>
+        </p:nvGraphicFramePr>
+        <p:xfrm>
+          <a:off x="365760" y="1143000"/>
+          <a:ext cx="11430000" cy="1901952"/>
+        </p:xfrm>
+        <a:graphic>
+          <a:graphicData uri="http://schemas.openxmlformats.org/drawingml/2006/table">
+            <a:tbl>
+              <a:tblPr firstRow="1" bandRow="1">
+                <a:tableStyleId>{5C22544A-7EE6-4342-B048-85BDC9FD1C3A}</a:tableStyleId>
+              </a:tblPr>
+              <a:tblGrid>
+                <a:gridCol w="3810000"/>
+                <a:gridCol w="3810000"/>
+                <a:gridCol w="3810000"/>
+              </a:tblGrid>
+              <a:tr h="475488">
+                <a:tc>
+                  <a:txBody>
+                    <a:bodyPr wrap="square"/>
+                    <a:lstStyle/>
+                    <a:p>
+                      <a:r>
+                        <a:rPr sz="1100" b="1">
+                          <a:solidFill>
+                            <a:srgbClr val="FFFFFF"/>
+                          </a:solidFill>
+                          <a:latin typeface="Arial"/>
+                        </a:rPr>
+                        <a:t>Ebene</a:t>
+                      </a:r>
+                    </a:p>
+                  </a:txBody>
+                  <a:tcPr>
+                    <a:solidFill>
+                      <a:srgbClr val="003DA5"/>
+                    </a:solidFill>
+                  </a:tcPr>
+                </a:tc>
+                <a:tc>
+                  <a:txBody>
+                    <a:bodyPr wrap="square"/>
+                    <a:lstStyle/>
+                    <a:p>
+                      <a:r>
+                        <a:rPr sz="1100" b="1">
+                          <a:solidFill>
+                            <a:srgbClr val="FFFFFF"/>
+                          </a:solidFill>
+                          <a:latin typeface="Arial"/>
+                        </a:rPr>
+                        <a:t>Fragetyp</a:t>
+                      </a:r>
+                    </a:p>
+                  </a:txBody>
+                  <a:tcPr>
+                    <a:solidFill>
+                      <a:srgbClr val="003DA5"/>
+                    </a:solidFill>
+                  </a:tcPr>
+                </a:tc>
+                <a:tc>
+                  <a:txBody>
+                    <a:bodyPr wrap="square"/>
+                    <a:lstStyle/>
+                    <a:p>
+                      <a:r>
+                        <a:rPr sz="1100" b="1">
+                          <a:solidFill>
+                            <a:srgbClr val="FFFFFF"/>
+                          </a:solidFill>
+                          <a:latin typeface="Arial"/>
+                        </a:rPr>
+                        <a:t>Beispiel</a:t>
+                      </a:r>
+                    </a:p>
+                  </a:txBody>
+                  <a:tcPr>
+                    <a:solidFill>
+                      <a:srgbClr val="003DA5"/>
+                    </a:solidFill>
+                  </a:tcPr>
+                </a:tc>
+              </a:tr>
+              <a:tr h="475488">
+                <a:tc>
+                  <a:txBody>
+                    <a:bodyPr wrap="square"/>
+                    <a:lstStyle/>
+                    <a:p>
+                      <a:r>
+                        <a:rPr sz="1100" b="0">
+                          <a:solidFill>
+                            <a:srgbClr val="1A1A1A"/>
+                          </a:solidFill>
+                          <a:latin typeface="Arial"/>
+                        </a:rPr>
+                        <a:t>1 Operativ</a:t>
+                      </a:r>
+                    </a:p>
+                  </a:txBody>
+                  <a:tcPr>
+                    <a:solidFill>
+                      <a:srgbClr val="FFFFFF"/>
+                    </a:solidFill>
+                  </a:tcPr>
+                </a:tc>
+                <a:tc>
+                  <a:txBody>
+                    <a:bodyPr wrap="square"/>
+                    <a:lstStyle/>
+                    <a:p>
+                      <a:r>
+                        <a:rPr sz="1100" b="0">
+                          <a:solidFill>
+                            <a:srgbClr val="1A1A1A"/>
+                          </a:solidFill>
+                          <a:latin typeface="Arial"/>
+                        </a:rPr>
+                        <a:t>Sachstandsfragen (Was ist?)</a:t>
+                      </a:r>
+                    </a:p>
+                  </a:txBody>
+                  <a:tcPr>
+                    <a:solidFill>
+                      <a:srgbClr val="FFFFFF"/>
+                    </a:solidFill>
+                  </a:tcPr>
+                </a:tc>
+                <a:tc>
+                  <a:txBody>
+                    <a:bodyPr wrap="square"/>
+                    <a:lstStyle/>
+                    <a:p>
+                      <a:r>
+                        <a:rPr sz="1100" b="0">
+                          <a:solidFill>
+                            <a:srgbClr val="1A1A1A"/>
+                          </a:solidFill>
+                          <a:latin typeface="Arial"/>
+                        </a:rPr>
+                        <a:t>Wie entwickelt sich Ihr Auftragsbestand im nächsten Quartal?</a:t>
+                      </a:r>
+                    </a:p>
+                  </a:txBody>
+                  <a:tcPr>
+                    <a:solidFill>
+                      <a:srgbClr val="FFFFFF"/>
+                    </a:solidFill>
+                  </a:tcPr>
+                </a:tc>
+              </a:tr>
+              <a:tr h="475488">
+                <a:tc>
+                  <a:txBody>
+                    <a:bodyPr wrap="square"/>
+                    <a:lstStyle/>
+                    <a:p>
+                      <a:r>
+                        <a:rPr sz="1100" b="0">
+                          <a:solidFill>
+                            <a:srgbClr val="1A1A1A"/>
+                          </a:solidFill>
+                          <a:latin typeface="Arial"/>
+                        </a:rPr>
+                        <a:t>2 Taktisch</a:t>
+                      </a:r>
+                    </a:p>
+                  </a:txBody>
+                  <a:tcPr>
+                    <a:solidFill>
+                      <a:srgbClr val="F4F6FA"/>
+                    </a:solidFill>
+                  </a:tcPr>
+                </a:tc>
+                <a:tc>
+                  <a:txBody>
+                    <a:bodyPr wrap="square"/>
+                    <a:lstStyle/>
+                    <a:p>
+                      <a:r>
+                        <a:rPr sz="1100" b="0">
+                          <a:solidFill>
+                            <a:srgbClr val="1A1A1A"/>
+                          </a:solidFill>
+                          <a:latin typeface="Arial"/>
+                        </a:rPr>
+                        <a:t>Implikationsfragen (Was bedeutet das?)</a:t>
+                      </a:r>
+                    </a:p>
+                  </a:txBody>
+                  <a:tcPr>
+                    <a:solidFill>
+                      <a:srgbClr val="F4F6FA"/>
+                    </a:solidFill>
+                  </a:tcPr>
+                </a:tc>
+                <a:tc>
+                  <a:txBody>
+                    <a:bodyPr wrap="square"/>
+                    <a:lstStyle/>
+                    <a:p>
+                      <a:r>
+                        <a:rPr sz="1100" b="0">
+                          <a:solidFill>
+                            <a:srgbClr val="1A1A1A"/>
+                          </a:solidFill>
+                          <a:latin typeface="Arial"/>
+                        </a:rPr>
+                        <a:t>Wenn die Marge weiter sinkt – welche Investitionen müssen Sie dann verschieben?</a:t>
+                      </a:r>
+                    </a:p>
+                  </a:txBody>
+                  <a:tcPr>
+                    <a:solidFill>
+                      <a:srgbClr val="F4F6FA"/>
+                    </a:solidFill>
+                  </a:tcPr>
+                </a:tc>
+              </a:tr>
+              <a:tr h="475488">
+                <a:tc>
+                  <a:txBody>
+                    <a:bodyPr wrap="square"/>
+                    <a:lstStyle/>
+                    <a:p>
+                      <a:r>
+                        <a:rPr sz="1100" b="0">
+                          <a:solidFill>
+                            <a:srgbClr val="1A1A1A"/>
+                          </a:solidFill>
+                          <a:latin typeface="Arial"/>
+                        </a:rPr>
+                        <a:t>3 Strategisch</a:t>
+                      </a:r>
+                    </a:p>
+                  </a:txBody>
+                  <a:tcPr>
+                    <a:solidFill>
+                      <a:srgbClr val="FFFFFF"/>
+                    </a:solidFill>
+                  </a:tcPr>
+                </a:tc>
+                <a:tc>
+                  <a:txBody>
+                    <a:bodyPr wrap="square"/>
+                    <a:lstStyle/>
+                    <a:p>
+                      <a:r>
+                        <a:rPr sz="1100" b="0">
+                          <a:solidFill>
+                            <a:srgbClr val="1A1A1A"/>
+                          </a:solidFill>
+                          <a:latin typeface="Arial"/>
+                        </a:rPr>
+                        <a:t>Zukunftsfragen (Wo wollen Sie hin?)</a:t>
+                      </a:r>
+                    </a:p>
+                  </a:txBody>
+                  <a:tcPr>
+                    <a:solidFill>
+                      <a:srgbClr val="FFFFFF"/>
+                    </a:solidFill>
+                  </a:tcPr>
+                </a:tc>
+                <a:tc>
+                  <a:txBody>
+                    <a:bodyPr wrap="square"/>
+                    <a:lstStyle/>
+                    <a:p>
+                      <a:r>
+                        <a:rPr sz="1100" b="0">
+                          <a:solidFill>
+                            <a:srgbClr val="1A1A1A"/>
+                          </a:solidFill>
+                          <a:latin typeface="Arial"/>
+                        </a:rPr>
+                        <a:t>Was wäre der nächste Schritt, wenn Ihre Eigenkapitalquote 30 % überschreitet?</a:t>
+                      </a:r>
+                    </a:p>
+                  </a:txBody>
+                  <a:tcPr>
+                    <a:solidFill>
+                      <a:srgbClr val="FFFFFF"/>
+                    </a:solidFill>
+                  </a:tcPr>
+                </a:tc>
+              </a:tr>
+            </a:tbl>
+          </a:graphicData>
+        </a:graphic>
+      </p:graphicFrame>
+    </p:spTree>
+  </p:cSld>
+  <p:clrMapOvr>
+    <a:masterClrMapping/>
+  </p:clrMapOvr>
+</p:sld>
+</file>
+
+<file path=ppt/slides/slide5.xml><?xml version="1.0" encoding="utf-8"?>
+<p:sld xmlns:a="http://schemas.openxmlformats.org/drawingml/2006/main" xmlns:p="http://schemas.openxmlformats.org/presentationml/2006/main" xmlns:r="http://schemas.openxmlformats.org/officeDocument/2006/relationships">
+  <p:cSld>
+    <p:bg>
+      <p:bgPr>
+        <a:solidFill>
+          <a:srgbClr val="1A1A1A"/>
+        </a:solidFill>
+        <a:effectLst/>
+      </p:bgPr>
+    </p:bg>
+    <p:spTree>
+      <p:nvGrpSpPr>
+        <p:cNvPr id="1" name=""/>
+        <p:cNvGrpSpPr/>
+        <p:nvPr/>
+      </p:nvGrpSpPr>
+      <p:grpSpPr/>
+      <p:sp>
+        <p:nvSpPr>
+          <p:cNvPr id="2" name="Rectangle 1"/>
+          <p:cNvSpPr/>
+          <p:nvPr/>
+        </p:nvSpPr>
+        <p:spPr>
+          <a:xfrm>
+            <a:off x="0" y="0"/>
+            <a:ext cx="73152" cy="6858000"/>
+          </a:xfrm>
+          <a:prstGeom prst="rect">
+            <a:avLst/>
+          </a:prstGeom>
+          <a:solidFill>
+            <a:srgbClr val="E05B00"/>
+          </a:solidFill>
+          <a:ln>
+            <a:noFill/>
+          </a:ln>
+        </p:spPr>
+        <p:style>
+          <a:lnRef idx="1">
+            <a:schemeClr val="accent1"/>
+          </a:lnRef>
+          <a:fillRef idx="3">
+            <a:schemeClr val="accent1"/>
+          </a:fillRef>
+          <a:effectRef idx="2">
+            <a:schemeClr val="accent1"/>
+          </a:effectRef>
+          <a:fontRef idx="minor">
+            <a:schemeClr val="lt1"/>
+          </a:fontRef>
+        </p:style>
+        <p:txBody>
+          <a:bodyPr rtlCol="0" anchor="ctr"/>
+          <a:lstStyle/>
+          <a:p>
+            <a:pPr algn="ctr"/>
+          </a:p>
+        </p:txBody>
+      </p:sp>
+      <p:sp>
+        <p:nvSpPr>
+          <p:cNvPr id="3" name="TextBox 2"/>
           <p:cNvSpPr txBox="1"/>
           <p:nvPr/>
         </p:nvSpPr>
         <p:spPr>
           <a:xfrm>
-            <a:off x="365760" y="1234440"/>
-            <a:ext cx="11430000" cy="5212080"/>
+            <a:off x="365760" y="2011680"/>
+            <a:ext cx="11430000" cy="2011680"/>
           </a:xfrm>
           <a:prstGeom prst="rect">
             <a:avLst/>
@@ -4710,113 +8560,15 @@
           </a:bodyPr>
           <a:lstStyle/>
           <a:p>
-            <a:pPr>
-              <a:spcBef>
-                <a:spcPts val="400"/>
-              </a:spcBef>
-            </a:pPr>
-            <a:r>
-              <a:rPr sz="1500">
+            <a:pPr algn="l"/>
+            <a:r>
+              <a:rPr sz="3600" b="1" i="0">
                 <a:solidFill>
-                  <a:srgbClr val="003DA5"/>
+                  <a:srgbClr val="FFFFFF"/>
                 </a:solidFill>
                 <a:latin typeface="Arial"/>
               </a:rPr>
-              <a:t>▪  </a:t>
-            </a:r>
-            <a:r>
-              <a:rPr sz="1700">
-                <a:solidFill>
-                  <a:srgbClr val="1A1A1A"/>
-                </a:solidFill>
-                <a:latin typeface="Arial"/>
-              </a:rPr>
-              <a:t>Ein Medizintechnik-Konzern (Auftragsvolumen derzeit 18 % vom Umsatz) hat eine langfristige Rahmenvereinbarung angeboten, die eine Umsatzsteigerung auf ca. 16 Mio. EUR ermöglicht – aber einen zweiten CNC-Bearbeitungszentrums-Park (Investitionsbedarf: 3,2 Mio. EUR) voraussetzt.</a:t>
-            </a:r>
-          </a:p>
-          <a:p>
-            <a:pPr>
-              <a:spcBef>
-                <a:spcPts val="400"/>
-              </a:spcBef>
-            </a:pPr>
-            <a:r>
-              <a:rPr sz="1500">
-                <a:solidFill>
-                  <a:srgbClr val="003DA5"/>
-                </a:solidFill>
-                <a:latin typeface="Arial"/>
-              </a:rPr>
-              <a:t>▪  </a:t>
-            </a:r>
-            <a:r>
-              <a:rPr sz="1700">
-                <a:solidFill>
-                  <a:srgbClr val="1A1A1A"/>
-                </a:solidFill>
-                <a:latin typeface="Arial"/>
-              </a:rPr>
-              <a:t>Gleichzeitig hat ein süddeutscher Stratege-Investor Interesse an einer Minderheitsbeteiligung von 25,1 % signalisiert (Bewertung: 8x EBITDA = ca. 11,8 Mio. EUR Unternehmenswert).</a:t>
-            </a:r>
-          </a:p>
-          <a:p>
-            <a:pPr>
-              <a:spcBef>
-                <a:spcPts val="400"/>
-              </a:spcBef>
-            </a:pPr>
-            <a:r>
-              <a:rPr sz="1500">
-                <a:solidFill>
-                  <a:srgbClr val="003DA5"/>
-                </a:solidFill>
-                <a:latin typeface="Arial"/>
-              </a:rPr>
-              <a:t>▪  </a:t>
-            </a:r>
-            <a:r>
-              <a:rPr sz="1700">
-                <a:solidFill>
-                  <a:srgbClr val="1A1A1A"/>
-                </a:solidFill>
-                <a:latin typeface="Arial"/>
-              </a:rPr>
-              <a:t>Stefan Habermaiers älterer Bruder (typisch stiller Gesellschafter, 15 % Anteil, ohne Stimmrecht und Verlustbeteiligung) möchte seinen Anteil mittelfristig veräußern. (Praxishinweis: Bei atypisch stiller Beteiligung mit Verlustbeteiligung wäre steuerlich und rechtlich ein Steuerberater/Rechtsanwalt frühzeitig einzuschalten – das Signal für den Berater ist die Frage nach Stimmrecht und Verlustbeteiligung.)</a:t>
-            </a:r>
-          </a:p>
-        </p:txBody>
-      </p:sp>
-      <p:sp>
-        <p:nvSpPr>
-          <p:cNvPr id="6" name="TextBox 5"/>
-          <p:cNvSpPr txBox="1"/>
-          <p:nvPr/>
-        </p:nvSpPr>
-        <p:spPr>
-          <a:xfrm>
-            <a:off x="11704320" y="6492240"/>
-            <a:ext cx="365760" cy="274320"/>
-          </a:xfrm>
-          <a:prstGeom prst="rect">
-            <a:avLst/>
-          </a:prstGeom>
-          <a:noFill/>
-        </p:spPr>
-        <p:txBody>
-          <a:bodyPr wrap="square">
-            <a:spAutoFit/>
-          </a:bodyPr>
-          <a:lstStyle/>
-          <a:p>
-            <a:pPr algn="r"/>
-            <a:r>
-              <a:rPr sz="1000" b="0">
-                <a:solidFill>
-                  <a:srgbClr val="6B7280"/>
-                </a:solidFill>
-                <a:latin typeface="Arial"/>
-              </a:rPr>
-              <a:t>3</a:t>
+              <a:t>Kapitalstruktur und Werttreiber verstehen</a:t>
             </a:r>
           </a:p>
         </p:txBody>
@@ -4898,8 +8650,8 @@
         </p:nvSpPr>
         <p:spPr>
           <a:xfrm>
-            <a:off x="365760" y="274320"/>
-            <a:ext cx="11430000" cy="822960"/>
+            <a:off x="228600" y="182880"/>
+            <a:ext cx="11430000" cy="320040"/>
           </a:xfrm>
           <a:prstGeom prst="rect">
             <a:avLst/>
@@ -4914,33 +8666,68 @@
           <a:p>
             <a:pPr algn="l"/>
             <a:r>
-              <a:rPr sz="2200" b="1">
+              <a:rPr sz="900" b="0" i="0">
+                <a:solidFill>
+                  <a:srgbClr val="556575"/>
+                </a:solidFill>
+                <a:latin typeface="Arial"/>
+              </a:rPr>
+              <a:t>M03 · Modulinhalte</a:t>
+            </a:r>
+          </a:p>
+        </p:txBody>
+      </p:sp>
+      <p:sp>
+        <p:nvSpPr>
+          <p:cNvPr id="4" name="TextBox 3"/>
+          <p:cNvSpPr txBox="1"/>
+          <p:nvPr/>
+        </p:nvSpPr>
+        <p:spPr>
+          <a:xfrm>
+            <a:off x="365760" y="274320"/>
+            <a:ext cx="11430000" cy="777240"/>
+          </a:xfrm>
+          <a:prstGeom prst="rect">
+            <a:avLst/>
+          </a:prstGeom>
+          <a:noFill/>
+        </p:spPr>
+        <p:txBody>
+          <a:bodyPr wrap="square">
+            <a:spAutoFit/>
+          </a:bodyPr>
+          <a:lstStyle/>
+          <a:p>
+            <a:pPr algn="l"/>
+            <a:r>
+              <a:rPr sz="2200" b="1" i="0">
                 <a:solidFill>
                   <a:srgbClr val="003DA5"/>
                 </a:solidFill>
                 <a:latin typeface="Arial"/>
               </a:rPr>
-              <a:t>Working Capital und Cash Conversion Cycle</a:t>
-            </a:r>
-          </a:p>
-        </p:txBody>
-      </p:sp>
-      <p:sp>
-        <p:nvSpPr>
-          <p:cNvPr id="4" name="Rectangle 3"/>
+              <a:t>Zentrale Werttreiber im Mittelstand</a:t>
+            </a:r>
+          </a:p>
+        </p:txBody>
+      </p:sp>
+      <p:sp>
+        <p:nvSpPr>
+          <p:cNvPr id="5" name="Rectangle 4"/>
           <p:cNvSpPr/>
           <p:nvPr/>
         </p:nvSpPr>
         <p:spPr>
           <a:xfrm>
-            <a:off x="365760" y="1051560"/>
+            <a:off x="365760" y="1005840"/>
             <a:ext cx="11430000" cy="27432"/>
           </a:xfrm>
           <a:prstGeom prst="rect">
             <a:avLst/>
           </a:prstGeom>
           <a:solidFill>
-            <a:srgbClr val="E5E7EB"/>
+            <a:srgbClr val="D1D5DB"/>
           </a:solidFill>
           <a:ln>
             <a:noFill/>
@@ -4968,139 +8755,509 @@
           </a:p>
         </p:txBody>
       </p:sp>
-      <p:sp>
-        <p:nvSpPr>
-          <p:cNvPr id="5" name="TextBox 4"/>
-          <p:cNvSpPr txBox="1"/>
+      <p:graphicFrame>
+        <p:nvGraphicFramePr>
+          <p:cNvPr id="6" name="Table 5"/>
+          <p:cNvGraphicFramePr>
+            <a:graphicFrameLocks noGrp="1"/>
+          </p:cNvGraphicFramePr>
           <p:nvPr/>
-        </p:nvSpPr>
-        <p:spPr>
-          <a:xfrm>
-            <a:off x="365760" y="1234440"/>
-            <a:ext cx="11430000" cy="5212080"/>
-          </a:xfrm>
-          <a:prstGeom prst="rect">
-            <a:avLst/>
-          </a:prstGeom>
-          <a:noFill/>
-        </p:spPr>
-        <p:txBody>
-          <a:bodyPr wrap="square">
-            <a:spAutoFit/>
-          </a:bodyPr>
-          <a:lstStyle/>
-          <a:p>
-            <a:pPr>
-              <a:spcBef>
-                <a:spcPts val="400"/>
-              </a:spcBef>
-            </a:pPr>
-            <a:r>
-              <a:rPr sz="1500">
-                <a:solidFill>
-                  <a:srgbClr val="003DA5"/>
-                </a:solidFill>
-                <a:latin typeface="Arial"/>
-              </a:rPr>
-              <a:t>▪  </a:t>
-            </a:r>
-            <a:r>
-              <a:rPr sz="1700">
-                <a:solidFill>
-                  <a:srgbClr val="1A1A1A"/>
-                </a:solidFill>
-                <a:latin typeface="Arial"/>
-              </a:rPr>
-              <a:t>Formel Betriebsmittelbedarf: Betriebsmittelbedarf = Umsatzwachstum (EUR) × CCC (Tage) / 365</a:t>
-            </a:r>
-          </a:p>
-          <a:p>
-            <a:pPr>
-              <a:spcBef>
-                <a:spcPts val="400"/>
-              </a:spcBef>
-            </a:pPr>
-            <a:r>
-              <a:rPr sz="1500">
-                <a:solidFill>
-                  <a:srgbClr val="003DA5"/>
-                </a:solidFill>
-                <a:latin typeface="Arial"/>
-              </a:rPr>
-              <a:t>▪  </a:t>
-            </a:r>
-            <a:r>
-              <a:rPr sz="1700">
-                <a:solidFill>
-                  <a:srgbClr val="1A1A1A"/>
-                </a:solidFill>
-                <a:latin typeface="Arial"/>
-              </a:rPr>
-              <a:t>Praxisfaustregel: Wenn keine CCC-Daten vorliegen: Umsatzwachstum × 15–20 % als grober Betriebsmittelbedarf. Die CCC-…</a:t>
-            </a:r>
-          </a:p>
-          <a:p>
-            <a:pPr>
-              <a:spcBef>
-                <a:spcPts val="400"/>
-              </a:spcBef>
-            </a:pPr>
-            <a:r>
-              <a:rPr sz="1500">
-                <a:solidFill>
-                  <a:srgbClr val="003DA5"/>
-                </a:solidFill>
-                <a:latin typeface="Arial"/>
-              </a:rPr>
-              <a:t>▪  </a:t>
-            </a:r>
-            <a:r>
-              <a:rPr sz="1700">
-                <a:solidFill>
-                  <a:srgbClr val="1A1A1A"/>
-                </a:solidFill>
-                <a:latin typeface="Arial"/>
-              </a:rPr>
-              <a:t>Beispiel: Umsatzwachstum +3,0 Mio. EUR, CCC 58 Tage → Betriebsmittelbedarf: 3.000 TEUR × 58/365 = ca. 477 TEUR…</a:t>
-            </a:r>
-          </a:p>
-        </p:txBody>
-      </p:sp>
-      <p:sp>
-        <p:nvSpPr>
-          <p:cNvPr id="6" name="TextBox 5"/>
-          <p:cNvSpPr txBox="1"/>
-          <p:nvPr/>
-        </p:nvSpPr>
-        <p:spPr>
-          <a:xfrm>
-            <a:off x="11704320" y="6492240"/>
-            <a:ext cx="365760" cy="274320"/>
-          </a:xfrm>
-          <a:prstGeom prst="rect">
-            <a:avLst/>
-          </a:prstGeom>
-          <a:noFill/>
-        </p:spPr>
-        <p:txBody>
-          <a:bodyPr wrap="square">
-            <a:spAutoFit/>
-          </a:bodyPr>
-          <a:lstStyle/>
-          <a:p>
-            <a:pPr algn="r"/>
-            <a:r>
-              <a:rPr sz="1000" b="0">
-                <a:solidFill>
-                  <a:srgbClr val="6B7280"/>
-                </a:solidFill>
-                <a:latin typeface="Arial"/>
-              </a:rPr>
-              <a:t>4</a:t>
-            </a:r>
-          </a:p>
-        </p:txBody>
-      </p:sp>
+        </p:nvGraphicFramePr>
+        <p:xfrm>
+          <a:off x="365760" y="1143000"/>
+          <a:ext cx="11430000" cy="3328416"/>
+        </p:xfrm>
+        <a:graphic>
+          <a:graphicData uri="http://schemas.openxmlformats.org/drawingml/2006/table">
+            <a:tbl>
+              <a:tblPr firstRow="1" bandRow="1">
+                <a:tableStyleId>{5C22544A-7EE6-4342-B048-85BDC9FD1C3A}</a:tableStyleId>
+              </a:tblPr>
+              <a:tblGrid>
+                <a:gridCol w="3810000"/>
+                <a:gridCol w="3810000"/>
+                <a:gridCol w="3810000"/>
+              </a:tblGrid>
+              <a:tr h="475488">
+                <a:tc>
+                  <a:txBody>
+                    <a:bodyPr wrap="square"/>
+                    <a:lstStyle/>
+                    <a:p>
+                      <a:r>
+                        <a:rPr sz="1100" b="1">
+                          <a:solidFill>
+                            <a:srgbClr val="FFFFFF"/>
+                          </a:solidFill>
+                          <a:latin typeface="Arial"/>
+                        </a:rPr>
+                        <a:t>Werttreiber</a:t>
+                      </a:r>
+                    </a:p>
+                  </a:txBody>
+                  <a:tcPr>
+                    <a:solidFill>
+                      <a:srgbClr val="003DA5"/>
+                    </a:solidFill>
+                  </a:tcPr>
+                </a:tc>
+                <a:tc>
+                  <a:txBody>
+                    <a:bodyPr wrap="square"/>
+                    <a:lstStyle/>
+                    <a:p>
+                      <a:r>
+                        <a:rPr sz="1100" b="1">
+                          <a:solidFill>
+                            <a:srgbClr val="FFFFFF"/>
+                          </a:solidFill>
+                          <a:latin typeface="Arial"/>
+                        </a:rPr>
+                        <a:t>Definition / KPI</a:t>
+                      </a:r>
+                    </a:p>
+                  </a:txBody>
+                  <a:tcPr>
+                    <a:solidFill>
+                      <a:srgbClr val="003DA5"/>
+                    </a:solidFill>
+                  </a:tcPr>
+                </a:tc>
+                <a:tc>
+                  <a:txBody>
+                    <a:bodyPr wrap="square"/>
+                    <a:lstStyle/>
+                    <a:p>
+                      <a:r>
+                        <a:rPr sz="1100" b="1">
+                          <a:solidFill>
+                            <a:srgbClr val="FFFFFF"/>
+                          </a:solidFill>
+                          <a:latin typeface="Arial"/>
+                        </a:rPr>
+                        <a:t>Strategische Relevanz</a:t>
+                      </a:r>
+                    </a:p>
+                  </a:txBody>
+                  <a:tcPr>
+                    <a:solidFill>
+                      <a:srgbClr val="003DA5"/>
+                    </a:solidFill>
+                  </a:tcPr>
+                </a:tc>
+              </a:tr>
+              <a:tr h="475488">
+                <a:tc>
+                  <a:txBody>
+                    <a:bodyPr wrap="square"/>
+                    <a:lstStyle/>
+                    <a:p>
+                      <a:r>
+                        <a:rPr sz="1100" b="0">
+                          <a:solidFill>
+                            <a:srgbClr val="1A1A1A"/>
+                          </a:solidFill>
+                          <a:latin typeface="Arial"/>
+                        </a:rPr>
+                        <a:t>Umsatzwachstum</a:t>
+                      </a:r>
+                    </a:p>
+                  </a:txBody>
+                  <a:tcPr>
+                    <a:solidFill>
+                      <a:srgbClr val="FFFFFF"/>
+                    </a:solidFill>
+                  </a:tcPr>
+                </a:tc>
+                <a:tc>
+                  <a:txBody>
+                    <a:bodyPr wrap="square"/>
+                    <a:lstStyle/>
+                    <a:p>
+                      <a:r>
+                        <a:rPr sz="1100" b="0">
+                          <a:solidFill>
+                            <a:srgbClr val="1A1A1A"/>
+                          </a:solidFill>
+                          <a:latin typeface="Arial"/>
+                        </a:rPr>
+                        <a:t>YoY-Wachstumsrate (%)</a:t>
+                      </a:r>
+                    </a:p>
+                  </a:txBody>
+                  <a:tcPr>
+                    <a:solidFill>
+                      <a:srgbClr val="FFFFFF"/>
+                    </a:solidFill>
+                  </a:tcPr>
+                </a:tc>
+                <a:tc>
+                  <a:txBody>
+                    <a:bodyPr wrap="square"/>
+                    <a:lstStyle/>
+                    <a:p>
+                      <a:r>
+                        <a:rPr sz="1100" b="0">
+                          <a:solidFill>
+                            <a:srgbClr val="1A1A1A"/>
+                          </a:solidFill>
+                          <a:latin typeface="Arial"/>
+                        </a:rPr>
+                        <a:t>Wachstumsstrategie: organisch vs. akquisitorisch</a:t>
+                      </a:r>
+                    </a:p>
+                  </a:txBody>
+                  <a:tcPr>
+                    <a:solidFill>
+                      <a:srgbClr val="FFFFFF"/>
+                    </a:solidFill>
+                  </a:tcPr>
+                </a:tc>
+              </a:tr>
+              <a:tr h="475488">
+                <a:tc>
+                  <a:txBody>
+                    <a:bodyPr wrap="square"/>
+                    <a:lstStyle/>
+                    <a:p>
+                      <a:r>
+                        <a:rPr sz="1100" b="0">
+                          <a:solidFill>
+                            <a:srgbClr val="1A1A1A"/>
+                          </a:solidFill>
+                          <a:latin typeface="Arial"/>
+                        </a:rPr>
+                        <a:t>EBITDA-Marge</a:t>
+                      </a:r>
+                    </a:p>
+                  </a:txBody>
+                  <a:tcPr>
+                    <a:solidFill>
+                      <a:srgbClr val="F4F6FA"/>
+                    </a:solidFill>
+                  </a:tcPr>
+                </a:tc>
+                <a:tc>
+                  <a:txBody>
+                    <a:bodyPr wrap="square"/>
+                    <a:lstStyle/>
+                    <a:p>
+                      <a:r>
+                        <a:rPr sz="1100" b="0">
+                          <a:solidFill>
+                            <a:srgbClr val="1A1A1A"/>
+                          </a:solidFill>
+                          <a:latin typeface="Arial"/>
+                        </a:rPr>
+                        <a:t>EBITDA / Umsatz (%)</a:t>
+                      </a:r>
+                    </a:p>
+                  </a:txBody>
+                  <a:tcPr>
+                    <a:solidFill>
+                      <a:srgbClr val="F4F6FA"/>
+                    </a:solidFill>
+                  </a:tcPr>
+                </a:tc>
+                <a:tc>
+                  <a:txBody>
+                    <a:bodyPr wrap="square"/>
+                    <a:lstStyle/>
+                    <a:p>
+                      <a:r>
+                        <a:rPr sz="1100" b="0">
+                          <a:solidFill>
+                            <a:srgbClr val="1A1A1A"/>
+                          </a:solidFill>
+                          <a:latin typeface="Arial"/>
+                        </a:rPr>
+                        <a:t>Profitabilität, Debt-Service-Fähigkeit</a:t>
+                      </a:r>
+                    </a:p>
+                  </a:txBody>
+                  <a:tcPr>
+                    <a:solidFill>
+                      <a:srgbClr val="F4F6FA"/>
+                    </a:solidFill>
+                  </a:tcPr>
+                </a:tc>
+              </a:tr>
+              <a:tr h="475488">
+                <a:tc>
+                  <a:txBody>
+                    <a:bodyPr wrap="square"/>
+                    <a:lstStyle/>
+                    <a:p>
+                      <a:r>
+                        <a:rPr sz="1100" b="0">
+                          <a:solidFill>
+                            <a:srgbClr val="1A1A1A"/>
+                          </a:solidFill>
+                          <a:latin typeface="Arial"/>
+                        </a:rPr>
+                        <a:t>Kapitaleffizienz (ROCE)</a:t>
+                      </a:r>
+                    </a:p>
+                  </a:txBody>
+                  <a:tcPr>
+                    <a:solidFill>
+                      <a:srgbClr val="FFFFFF"/>
+                    </a:solidFill>
+                  </a:tcPr>
+                </a:tc>
+                <a:tc>
+                  <a:txBody>
+                    <a:bodyPr wrap="square"/>
+                    <a:lstStyle/>
+                    <a:p>
+                      <a:r>
+                        <a:rPr sz="1100" b="0">
+                          <a:solidFill>
+                            <a:srgbClr val="1A1A1A"/>
+                          </a:solidFill>
+                          <a:latin typeface="Arial"/>
+                        </a:rPr>
+                        <a:t>EBIT / eingesetztes Kapital (%)</a:t>
+                      </a:r>
+                    </a:p>
+                  </a:txBody>
+                  <a:tcPr>
+                    <a:solidFill>
+                      <a:srgbClr val="FFFFFF"/>
+                    </a:solidFill>
+                  </a:tcPr>
+                </a:tc>
+                <a:tc>
+                  <a:txBody>
+                    <a:bodyPr wrap="square"/>
+                    <a:lstStyle/>
+                    <a:p>
+                      <a:r>
+                        <a:rPr sz="1100" b="0">
+                          <a:solidFill>
+                            <a:srgbClr val="1A1A1A"/>
+                          </a:solidFill>
+                          <a:latin typeface="Arial"/>
+                        </a:rPr>
+                        <a:t>Qualität der Investitionen, Asset-Intensität</a:t>
+                      </a:r>
+                    </a:p>
+                  </a:txBody>
+                  <a:tcPr>
+                    <a:solidFill>
+                      <a:srgbClr val="FFFFFF"/>
+                    </a:solidFill>
+                  </a:tcPr>
+                </a:tc>
+              </a:tr>
+              <a:tr h="475488">
+                <a:tc>
+                  <a:txBody>
+                    <a:bodyPr wrap="square"/>
+                    <a:lstStyle/>
+                    <a:p>
+                      <a:r>
+                        <a:rPr sz="1100" b="0">
+                          <a:solidFill>
+                            <a:srgbClr val="1A1A1A"/>
+                          </a:solidFill>
+                          <a:latin typeface="Arial"/>
+                        </a:rPr>
+                        <a:t>Eigenkapitalquote</a:t>
+                      </a:r>
+                    </a:p>
+                  </a:txBody>
+                  <a:tcPr>
+                    <a:solidFill>
+                      <a:srgbClr val="F4F6FA"/>
+                    </a:solidFill>
+                  </a:tcPr>
+                </a:tc>
+                <a:tc>
+                  <a:txBody>
+                    <a:bodyPr wrap="square"/>
+                    <a:lstStyle/>
+                    <a:p>
+                      <a:r>
+                        <a:rPr sz="1100" b="0">
+                          <a:solidFill>
+                            <a:srgbClr val="1A1A1A"/>
+                          </a:solidFill>
+                          <a:latin typeface="Arial"/>
+                        </a:rPr>
+                        <a:t>EK / Bilanzsumme (%)</a:t>
+                      </a:r>
+                    </a:p>
+                  </a:txBody>
+                  <a:tcPr>
+                    <a:solidFill>
+                      <a:srgbClr val="F4F6FA"/>
+                    </a:solidFill>
+                  </a:tcPr>
+                </a:tc>
+                <a:tc>
+                  <a:txBody>
+                    <a:bodyPr wrap="square"/>
+                    <a:lstStyle/>
+                    <a:p>
+                      <a:r>
+                        <a:rPr sz="1100" b="0">
+                          <a:solidFill>
+                            <a:srgbClr val="1A1A1A"/>
+                          </a:solidFill>
+                          <a:latin typeface="Arial"/>
+                        </a:rPr>
+                        <a:t>Krisenpuffer, Ratingrelevanz (MaRisk), Kreditkonditionen</a:t>
+                      </a:r>
+                    </a:p>
+                  </a:txBody>
+                  <a:tcPr>
+                    <a:solidFill>
+                      <a:srgbClr val="F4F6FA"/>
+                    </a:solidFill>
+                  </a:tcPr>
+                </a:tc>
+              </a:tr>
+              <a:tr h="475488">
+                <a:tc>
+                  <a:txBody>
+                    <a:bodyPr wrap="square"/>
+                    <a:lstStyle/>
+                    <a:p>
+                      <a:r>
+                        <a:rPr sz="1100" b="0">
+                          <a:solidFill>
+                            <a:srgbClr val="1A1A1A"/>
+                          </a:solidFill>
+                          <a:latin typeface="Arial"/>
+                        </a:rPr>
+                        <a:t>Free Cashflow</a:t>
+                      </a:r>
+                    </a:p>
+                  </a:txBody>
+                  <a:tcPr>
+                    <a:solidFill>
+                      <a:srgbClr val="FFFFFF"/>
+                    </a:solidFill>
+                  </a:tcPr>
+                </a:tc>
+                <a:tc>
+                  <a:txBody>
+                    <a:bodyPr wrap="square"/>
+                    <a:lstStyle/>
+                    <a:p>
+                      <a:r>
+                        <a:rPr sz="1100" b="0">
+                          <a:solidFill>
+                            <a:srgbClr val="1A1A1A"/>
+                          </a:solidFill>
+                          <a:latin typeface="Arial"/>
+                        </a:rPr>
+                        <a:t>Operativer CF − Investitionen</a:t>
+                      </a:r>
+                    </a:p>
+                  </a:txBody>
+                  <a:tcPr>
+                    <a:solidFill>
+                      <a:srgbClr val="FFFFFF"/>
+                    </a:solidFill>
+                  </a:tcPr>
+                </a:tc>
+                <a:tc>
+                  <a:txBody>
+                    <a:bodyPr wrap="square"/>
+                    <a:lstStyle/>
+                    <a:p>
+                      <a:r>
+                        <a:rPr sz="1100" b="0">
+                          <a:solidFill>
+                            <a:srgbClr val="1A1A1A"/>
+                          </a:solidFill>
+                          <a:latin typeface="Arial"/>
+                        </a:rPr>
+                        <a:t>Tilgungskapazität, Investitionsspielraum</a:t>
+                      </a:r>
+                    </a:p>
+                  </a:txBody>
+                  <a:tcPr>
+                    <a:solidFill>
+                      <a:srgbClr val="FFFFFF"/>
+                    </a:solidFill>
+                  </a:tcPr>
+                </a:tc>
+              </a:tr>
+              <a:tr h="475488">
+                <a:tc>
+                  <a:txBody>
+                    <a:bodyPr wrap="square"/>
+                    <a:lstStyle/>
+                    <a:p>
+                      <a:r>
+                        <a:rPr sz="1100" b="0">
+                          <a:solidFill>
+                            <a:srgbClr val="1A1A1A"/>
+                          </a:solidFill>
+                          <a:latin typeface="Arial"/>
+                        </a:rPr>
+                        <a:t>Verschuldungsgrad (Leverage)</a:t>
+                      </a:r>
+                    </a:p>
+                  </a:txBody>
+                  <a:tcPr>
+                    <a:solidFill>
+                      <a:srgbClr val="F4F6FA"/>
+                    </a:solidFill>
+                  </a:tcPr>
+                </a:tc>
+                <a:tc>
+                  <a:txBody>
+                    <a:bodyPr wrap="square"/>
+                    <a:lstStyle/>
+                    <a:p>
+                      <a:r>
+                        <a:rPr sz="1100" b="0">
+                          <a:solidFill>
+                            <a:srgbClr val="1A1A1A"/>
+                          </a:solidFill>
+                          <a:latin typeface="Arial"/>
+                        </a:rPr>
+                        <a:t>Nettofinanzverbindlichkeiten / EBITDA</a:t>
+                      </a:r>
+                    </a:p>
+                  </a:txBody>
+                  <a:tcPr>
+                    <a:solidFill>
+                      <a:srgbClr val="F4F6FA"/>
+                    </a:solidFill>
+                  </a:tcPr>
+                </a:tc>
+                <a:tc>
+                  <a:txBody>
+                    <a:bodyPr wrap="square"/>
+                    <a:lstStyle/>
+                    <a:p>
+                      <a:r>
+                        <a:rPr sz="1100" b="0">
+                          <a:solidFill>
+                            <a:srgbClr val="1A1A1A"/>
+                          </a:solidFill>
+                          <a:latin typeface="Arial"/>
+                        </a:rPr>
+                        <a:t>Standard-Covenant bei strukturierten Finanzierungen</a:t>
+                      </a:r>
+                    </a:p>
+                  </a:txBody>
+                  <a:tcPr>
+                    <a:solidFill>
+                      <a:srgbClr val="F4F6FA"/>
+                    </a:solidFill>
+                  </a:tcPr>
+                </a:tc>
+              </a:tr>
+            </a:tbl>
+          </a:graphicData>
+        </a:graphic>
+      </p:graphicFrame>
     </p:spTree>
   </p:cSld>
   <p:clrMapOvr>
@@ -5178,8 +9335,8 @@
         </p:nvSpPr>
         <p:spPr>
           <a:xfrm>
-            <a:off x="365760" y="274320"/>
-            <a:ext cx="11430000" cy="822960"/>
+            <a:off x="228600" y="182880"/>
+            <a:ext cx="11430000" cy="320040"/>
           </a:xfrm>
           <a:prstGeom prst="rect">
             <a:avLst/>
@@ -5194,33 +9351,68 @@
           <a:p>
             <a:pPr algn="l"/>
             <a:r>
-              <a:rPr sz="2200" b="1">
+              <a:rPr sz="900" b="0" i="0">
+                <a:solidFill>
+                  <a:srgbClr val="556575"/>
+                </a:solidFill>
+                <a:latin typeface="Arial"/>
+              </a:rPr>
+              <a:t>M03 · Modulinhalte</a:t>
+            </a:r>
+          </a:p>
+        </p:txBody>
+      </p:sp>
+      <p:sp>
+        <p:nvSpPr>
+          <p:cNvPr id="4" name="TextBox 3"/>
+          <p:cNvSpPr txBox="1"/>
+          <p:nvPr/>
+        </p:nvSpPr>
+        <p:spPr>
+          <a:xfrm>
+            <a:off x="365760" y="274320"/>
+            <a:ext cx="11430000" cy="777240"/>
+          </a:xfrm>
+          <a:prstGeom prst="rect">
+            <a:avLst/>
+          </a:prstGeom>
+          <a:noFill/>
+        </p:spPr>
+        <p:txBody>
+          <a:bodyPr wrap="square">
+            <a:spAutoFit/>
+          </a:bodyPr>
+          <a:lstStyle/>
+          <a:p>
+            <a:pPr algn="l"/>
+            <a:r>
+              <a:rPr sz="2200" b="1" i="0">
                 <a:solidFill>
                   <a:srgbClr val="003DA5"/>
                 </a:solidFill>
                 <a:latin typeface="Arial"/>
               </a:rPr>
-              <a:t>Instrumente der Wachstumsfinanzierung</a:t>
-            </a:r>
-          </a:p>
-        </p:txBody>
-      </p:sp>
-      <p:sp>
-        <p:nvSpPr>
-          <p:cNvPr id="4" name="Rectangle 3"/>
+              <a:t>Finanzierungsoptionen im strategischen Vergleich</a:t>
+            </a:r>
+          </a:p>
+        </p:txBody>
+      </p:sp>
+      <p:sp>
+        <p:nvSpPr>
+          <p:cNvPr id="5" name="Rectangle 4"/>
           <p:cNvSpPr/>
           <p:nvPr/>
         </p:nvSpPr>
         <p:spPr>
           <a:xfrm>
-            <a:off x="365760" y="1051560"/>
+            <a:off x="365760" y="1005840"/>
             <a:ext cx="11430000" cy="27432"/>
           </a:xfrm>
           <a:prstGeom prst="rect">
             <a:avLst/>
           </a:prstGeom>
           <a:solidFill>
-            <a:srgbClr val="E5E7EB"/>
+            <a:srgbClr val="D1D5DB"/>
           </a:solidFill>
           <a:ln>
             <a:noFill/>
@@ -5248,89 +9440,574 @@
           </a:p>
         </p:txBody>
       </p:sp>
-      <p:sp>
-        <p:nvSpPr>
-          <p:cNvPr id="5" name="TextBox 4"/>
-          <p:cNvSpPr txBox="1"/>
+      <p:graphicFrame>
+        <p:nvGraphicFramePr>
+          <p:cNvPr id="6" name="Table 5"/>
+          <p:cNvGraphicFramePr>
+            <a:graphicFrameLocks noGrp="1"/>
+          </p:cNvGraphicFramePr>
           <p:nvPr/>
-        </p:nvSpPr>
-        <p:spPr>
-          <a:xfrm>
-            <a:off x="365760" y="1234440"/>
-            <a:ext cx="11430000" cy="5212080"/>
-          </a:xfrm>
-          <a:prstGeom prst="rect">
-            <a:avLst/>
-          </a:prstGeom>
-          <a:noFill/>
-        </p:spPr>
-        <p:txBody>
-          <a:bodyPr wrap="square">
-            <a:spAutoFit/>
-          </a:bodyPr>
-          <a:lstStyle/>
-          <a:p>
-            <a:pPr>
-              <a:spcBef>
-                <a:spcPts val="400"/>
-              </a:spcBef>
-            </a:pPr>
-            <a:r>
-              <a:rPr sz="1500">
-                <a:solidFill>
-                  <a:srgbClr val="003DA5"/>
-                </a:solidFill>
-                <a:latin typeface="Arial"/>
-              </a:rPr>
-              <a:t>▪  </a:t>
-            </a:r>
-            <a:r>
-              <a:rPr sz="1700">
-                <a:solidFill>
-                  <a:srgbClr val="1A1A1A"/>
-                </a:solidFill>
-                <a:latin typeface="Arial"/>
-              </a:rPr>
-              <a:t>Praxistransfer</a:t>
-            </a:r>
-          </a:p>
-        </p:txBody>
-      </p:sp>
-      <p:sp>
-        <p:nvSpPr>
-          <p:cNvPr id="6" name="TextBox 5"/>
-          <p:cNvSpPr txBox="1"/>
-          <p:nvPr/>
-        </p:nvSpPr>
-        <p:spPr>
-          <a:xfrm>
-            <a:off x="11704320" y="6492240"/>
-            <a:ext cx="365760" cy="274320"/>
-          </a:xfrm>
-          <a:prstGeom prst="rect">
-            <a:avLst/>
-          </a:prstGeom>
-          <a:noFill/>
-        </p:spPr>
-        <p:txBody>
-          <a:bodyPr wrap="square">
-            <a:spAutoFit/>
-          </a:bodyPr>
-          <a:lstStyle/>
-          <a:p>
-            <a:pPr algn="r"/>
-            <a:r>
-              <a:rPr sz="1000" b="0">
-                <a:solidFill>
-                  <a:srgbClr val="6B7280"/>
-                </a:solidFill>
-                <a:latin typeface="Arial"/>
-              </a:rPr>
-              <a:t>5</a:t>
-            </a:r>
-          </a:p>
-        </p:txBody>
-      </p:sp>
+        </p:nvGraphicFramePr>
+        <p:xfrm>
+          <a:off x="365760" y="1143000"/>
+          <a:ext cx="11430000" cy="2852928"/>
+        </p:xfrm>
+        <a:graphic>
+          <a:graphicData uri="http://schemas.openxmlformats.org/drawingml/2006/table">
+            <a:tbl>
+              <a:tblPr firstRow="1" bandRow="1">
+                <a:tableStyleId>{5C22544A-7EE6-4342-B048-85BDC9FD1C3A}</a:tableStyleId>
+              </a:tblPr>
+              <a:tblGrid>
+                <a:gridCol w="2857500"/>
+                <a:gridCol w="2857500"/>
+                <a:gridCol w="2857500"/>
+                <a:gridCol w="2857500"/>
+              </a:tblGrid>
+              <a:tr h="475488">
+                <a:tc>
+                  <a:txBody>
+                    <a:bodyPr wrap="square"/>
+                    <a:lstStyle/>
+                    <a:p>
+                      <a:r>
+                        <a:rPr sz="1100" b="1">
+                          <a:solidFill>
+                            <a:srgbClr val="FFFFFF"/>
+                          </a:solidFill>
+                          <a:latin typeface="Arial"/>
+                        </a:rPr>
+                        <a:t>Instrument</a:t>
+                      </a:r>
+                    </a:p>
+                  </a:txBody>
+                  <a:tcPr>
+                    <a:solidFill>
+                      <a:srgbClr val="003DA5"/>
+                    </a:solidFill>
+                  </a:tcPr>
+                </a:tc>
+                <a:tc>
+                  <a:txBody>
+                    <a:bodyPr wrap="square"/>
+                    <a:lstStyle/>
+                    <a:p>
+                      <a:r>
+                        <a:rPr sz="1100" b="1">
+                          <a:solidFill>
+                            <a:srgbClr val="FFFFFF"/>
+                          </a:solidFill>
+                          <a:latin typeface="Arial"/>
+                        </a:rPr>
+                        <a:t>Vorteile</a:t>
+                      </a:r>
+                    </a:p>
+                  </a:txBody>
+                  <a:tcPr>
+                    <a:solidFill>
+                      <a:srgbClr val="003DA5"/>
+                    </a:solidFill>
+                  </a:tcPr>
+                </a:tc>
+                <a:tc>
+                  <a:txBody>
+                    <a:bodyPr wrap="square"/>
+                    <a:lstStyle/>
+                    <a:p>
+                      <a:r>
+                        <a:rPr sz="1100" b="1">
+                          <a:solidFill>
+                            <a:srgbClr val="FFFFFF"/>
+                          </a:solidFill>
+                          <a:latin typeface="Arial"/>
+                        </a:rPr>
+                        <a:t>Nachteile / Risiken</a:t>
+                      </a:r>
+                    </a:p>
+                  </a:txBody>
+                  <a:tcPr>
+                    <a:solidFill>
+                      <a:srgbClr val="003DA5"/>
+                    </a:solidFill>
+                  </a:tcPr>
+                </a:tc>
+                <a:tc>
+                  <a:txBody>
+                    <a:bodyPr wrap="square"/>
+                    <a:lstStyle/>
+                    <a:p>
+                      <a:r>
+                        <a:rPr sz="1100" b="1">
+                          <a:solidFill>
+                            <a:srgbClr val="FFFFFF"/>
+                          </a:solidFill>
+                          <a:latin typeface="Arial"/>
+                        </a:rPr>
+                        <a:t>Geeignet für</a:t>
+                      </a:r>
+                    </a:p>
+                  </a:txBody>
+                  <a:tcPr>
+                    <a:solidFill>
+                      <a:srgbClr val="003DA5"/>
+                    </a:solidFill>
+                  </a:tcPr>
+                </a:tc>
+              </a:tr>
+              <a:tr h="475488">
+                <a:tc>
+                  <a:txBody>
+                    <a:bodyPr wrap="square"/>
+                    <a:lstStyle/>
+                    <a:p>
+                      <a:r>
+                        <a:rPr sz="1100" b="0">
+                          <a:solidFill>
+                            <a:srgbClr val="1A1A1A"/>
+                          </a:solidFill>
+                          <a:latin typeface="Arial"/>
+                        </a:rPr>
+                        <a:t>Bankkredit (klassisch)</a:t>
+                      </a:r>
+                    </a:p>
+                  </a:txBody>
+                  <a:tcPr>
+                    <a:solidFill>
+                      <a:srgbClr val="FFFFFF"/>
+                    </a:solidFill>
+                  </a:tcPr>
+                </a:tc>
+                <a:tc>
+                  <a:txBody>
+                    <a:bodyPr wrap="square"/>
+                    <a:lstStyle/>
+                    <a:p>
+                      <a:r>
+                        <a:rPr sz="1100" b="0">
+                          <a:solidFill>
+                            <a:srgbClr val="1A1A1A"/>
+                          </a:solidFill>
+                          <a:latin typeface="Arial"/>
+                        </a:rPr>
+                        <a:t>Günstig, strukturiert, bekannt</a:t>
+                      </a:r>
+                    </a:p>
+                  </a:txBody>
+                  <a:tcPr>
+                    <a:solidFill>
+                      <a:srgbClr val="FFFFFF"/>
+                    </a:solidFill>
+                  </a:tcPr>
+                </a:tc>
+                <a:tc>
+                  <a:txBody>
+                    <a:bodyPr wrap="square"/>
+                    <a:lstStyle/>
+                    <a:p>
+                      <a:r>
+                        <a:rPr sz="1100" b="0">
+                          <a:solidFill>
+                            <a:srgbClr val="1A1A1A"/>
+                          </a:solidFill>
+                          <a:latin typeface="Arial"/>
+                        </a:rPr>
+                        <a:t>Sicherheitenerfordernisse, Covenant-Pflichten</a:t>
+                      </a:r>
+                    </a:p>
+                  </a:txBody>
+                  <a:tcPr>
+                    <a:solidFill>
+                      <a:srgbClr val="FFFFFF"/>
+                    </a:solidFill>
+                  </a:tcPr>
+                </a:tc>
+                <a:tc>
+                  <a:txBody>
+                    <a:bodyPr wrap="square"/>
+                    <a:lstStyle/>
+                    <a:p>
+                      <a:r>
+                        <a:rPr sz="1100" b="0">
+                          <a:solidFill>
+                            <a:srgbClr val="1A1A1A"/>
+                          </a:solidFill>
+                          <a:latin typeface="Arial"/>
+                        </a:rPr>
+                        <a:t>Investitionen, Betriebsmittel</a:t>
+                      </a:r>
+                    </a:p>
+                  </a:txBody>
+                  <a:tcPr>
+                    <a:solidFill>
+                      <a:srgbClr val="FFFFFF"/>
+                    </a:solidFill>
+                  </a:tcPr>
+                </a:tc>
+              </a:tr>
+              <a:tr h="475488">
+                <a:tc>
+                  <a:txBody>
+                    <a:bodyPr wrap="square"/>
+                    <a:lstStyle/>
+                    <a:p>
+                      <a:r>
+                        <a:rPr sz="1100" b="0">
+                          <a:solidFill>
+                            <a:srgbClr val="1A1A1A"/>
+                          </a:solidFill>
+                          <a:latin typeface="Arial"/>
+                        </a:rPr>
+                        <a:t>Förderkredit (KfW/L-Bank)</a:t>
+                      </a:r>
+                    </a:p>
+                  </a:txBody>
+                  <a:tcPr>
+                    <a:solidFill>
+                      <a:srgbClr val="F4F6FA"/>
+                    </a:solidFill>
+                  </a:tcPr>
+                </a:tc>
+                <a:tc>
+                  <a:txBody>
+                    <a:bodyPr wrap="square"/>
+                    <a:lstStyle/>
+                    <a:p>
+                      <a:r>
+                        <a:rPr sz="1100" b="0">
+                          <a:solidFill>
+                            <a:srgbClr val="1A1A1A"/>
+                          </a:solidFill>
+                          <a:latin typeface="Arial"/>
+                        </a:rPr>
+                        <a:t>Subventionierter Zins, Haftungsfreistellung</a:t>
+                      </a:r>
+                    </a:p>
+                  </a:txBody>
+                  <a:tcPr>
+                    <a:solidFill>
+                      <a:srgbClr val="F4F6FA"/>
+                    </a:solidFill>
+                  </a:tcPr>
+                </a:tc>
+                <a:tc>
+                  <a:txBody>
+                    <a:bodyPr wrap="square"/>
+                    <a:lstStyle/>
+                    <a:p>
+                      <a:r>
+                        <a:rPr sz="1100" b="0">
+                          <a:solidFill>
+                            <a:srgbClr val="1A1A1A"/>
+                          </a:solidFill>
+                          <a:latin typeface="Arial"/>
+                        </a:rPr>
+                        <a:t>Antragsprozess, Verwendungsbindung; Antrag muss vor Kreditauszahlung gestellt sein</a:t>
+                      </a:r>
+                    </a:p>
+                  </a:txBody>
+                  <a:tcPr>
+                    <a:solidFill>
+                      <a:srgbClr val="F4F6FA"/>
+                    </a:solidFill>
+                  </a:tcPr>
+                </a:tc>
+                <a:tc>
+                  <a:txBody>
+                    <a:bodyPr wrap="square"/>
+                    <a:lstStyle/>
+                    <a:p>
+                      <a:r>
+                        <a:rPr sz="1100" b="0">
+                          <a:solidFill>
+                            <a:srgbClr val="1A1A1A"/>
+                          </a:solidFill>
+                          <a:latin typeface="Arial"/>
+                        </a:rPr>
+                        <a:t>Wachstum, Innovation</a:t>
+                      </a:r>
+                    </a:p>
+                  </a:txBody>
+                  <a:tcPr>
+                    <a:solidFill>
+                      <a:srgbClr val="F4F6FA"/>
+                    </a:solidFill>
+                  </a:tcPr>
+                </a:tc>
+              </a:tr>
+              <a:tr h="475488">
+                <a:tc>
+                  <a:txBody>
+                    <a:bodyPr wrap="square"/>
+                    <a:lstStyle/>
+                    <a:p>
+                      <a:r>
+                        <a:rPr sz="1100" b="0">
+                          <a:solidFill>
+                            <a:srgbClr val="1A1A1A"/>
+                          </a:solidFill>
+                          <a:latin typeface="Arial"/>
+                        </a:rPr>
+                        <a:t>Mezzanine-Kapital</a:t>
+                      </a:r>
+                    </a:p>
+                  </a:txBody>
+                  <a:tcPr>
+                    <a:solidFill>
+                      <a:srgbClr val="FFFFFF"/>
+                    </a:solidFill>
+                  </a:tcPr>
+                </a:tc>
+                <a:tc>
+                  <a:txBody>
+                    <a:bodyPr wrap="square"/>
+                    <a:lstStyle/>
+                    <a:p>
+                      <a:r>
+                        <a:rPr sz="1100" b="0">
+                          <a:solidFill>
+                            <a:srgbClr val="1A1A1A"/>
+                          </a:solidFill>
+                          <a:latin typeface="Arial"/>
+                        </a:rPr>
+                        <a:t>EK-ähnliche Wirkung, keine Verwässerung</a:t>
+                      </a:r>
+                    </a:p>
+                  </a:txBody>
+                  <a:tcPr>
+                    <a:solidFill>
+                      <a:srgbClr val="FFFFFF"/>
+                    </a:solidFill>
+                  </a:tcPr>
+                </a:tc>
+                <a:tc>
+                  <a:txBody>
+                    <a:bodyPr wrap="square"/>
+                    <a:lstStyle/>
+                    <a:p>
+                      <a:r>
+                        <a:rPr sz="1100" b="0">
+                          <a:solidFill>
+                            <a:srgbClr val="1A1A1A"/>
+                          </a:solidFill>
+                          <a:latin typeface="Arial"/>
+                        </a:rPr>
+                        <a:t>Teurer als FK, begrenzte Laufzeit</a:t>
+                      </a:r>
+                    </a:p>
+                  </a:txBody>
+                  <a:tcPr>
+                    <a:solidFill>
+                      <a:srgbClr val="FFFFFF"/>
+                    </a:solidFill>
+                  </a:tcPr>
+                </a:tc>
+                <a:tc>
+                  <a:txBody>
+                    <a:bodyPr wrap="square"/>
+                    <a:lstStyle/>
+                    <a:p>
+                      <a:r>
+                        <a:rPr sz="1100" b="0">
+                          <a:solidFill>
+                            <a:srgbClr val="1A1A1A"/>
+                          </a:solidFill>
+                          <a:latin typeface="Arial"/>
+                        </a:rPr>
+                        <a:t>Wachstum, Nachfolge</a:t>
+                      </a:r>
+                    </a:p>
+                  </a:txBody>
+                  <a:tcPr>
+                    <a:solidFill>
+                      <a:srgbClr val="FFFFFF"/>
+                    </a:solidFill>
+                  </a:tcPr>
+                </a:tc>
+              </a:tr>
+              <a:tr h="475488">
+                <a:tc>
+                  <a:txBody>
+                    <a:bodyPr wrap="square"/>
+                    <a:lstStyle/>
+                    <a:p>
+                      <a:r>
+                        <a:rPr sz="1100" b="0">
+                          <a:solidFill>
+                            <a:srgbClr val="1A1A1A"/>
+                          </a:solidFill>
+                          <a:latin typeface="Arial"/>
+                        </a:rPr>
+                        <a:t>Private Equity / Beteiligung</a:t>
+                      </a:r>
+                    </a:p>
+                  </a:txBody>
+                  <a:tcPr>
+                    <a:solidFill>
+                      <a:srgbClr val="F4F6FA"/>
+                    </a:solidFill>
+                  </a:tcPr>
+                </a:tc>
+                <a:tc>
+                  <a:txBody>
+                    <a:bodyPr wrap="square"/>
+                    <a:lstStyle/>
+                    <a:p>
+                      <a:r>
+                        <a:rPr sz="1100" b="0">
+                          <a:solidFill>
+                            <a:srgbClr val="1A1A1A"/>
+                          </a:solidFill>
+                          <a:latin typeface="Arial"/>
+                        </a:rPr>
+                        <a:t>Starkes EK, Netzwerk, Management-Know-how</a:t>
+                      </a:r>
+                    </a:p>
+                  </a:txBody>
+                  <a:tcPr>
+                    <a:solidFill>
+                      <a:srgbClr val="F4F6FA"/>
+                    </a:solidFill>
+                  </a:tcPr>
+                </a:tc>
+                <a:tc>
+                  <a:txBody>
+                    <a:bodyPr wrap="square"/>
+                    <a:lstStyle/>
+                    <a:p>
+                      <a:r>
+                        <a:rPr sz="1100" b="0">
+                          <a:solidFill>
+                            <a:srgbClr val="1A1A1A"/>
+                          </a:solidFill>
+                          <a:latin typeface="Arial"/>
+                        </a:rPr>
+                        <a:t>Kontrollverlust, Exit-Druck</a:t>
+                      </a:r>
+                    </a:p>
+                  </a:txBody>
+                  <a:tcPr>
+                    <a:solidFill>
+                      <a:srgbClr val="F4F6FA"/>
+                    </a:solidFill>
+                  </a:tcPr>
+                </a:tc>
+                <a:tc>
+                  <a:txBody>
+                    <a:bodyPr wrap="square"/>
+                    <a:lstStyle/>
+                    <a:p>
+                      <a:r>
+                        <a:rPr sz="1100" b="0">
+                          <a:solidFill>
+                            <a:srgbClr val="1A1A1A"/>
+                          </a:solidFill>
+                          <a:latin typeface="Arial"/>
+                        </a:rPr>
+                        <a:t>Skalierung, MBO/MBI</a:t>
+                      </a:r>
+                    </a:p>
+                  </a:txBody>
+                  <a:tcPr>
+                    <a:solidFill>
+                      <a:srgbClr val="F4F6FA"/>
+                    </a:solidFill>
+                  </a:tcPr>
+                </a:tc>
+              </a:tr>
+              <a:tr h="475488">
+                <a:tc>
+                  <a:txBody>
+                    <a:bodyPr wrap="square"/>
+                    <a:lstStyle/>
+                    <a:p>
+                      <a:r>
+                        <a:rPr sz="1100" b="0">
+                          <a:solidFill>
+                            <a:srgbClr val="1A1A1A"/>
+                          </a:solidFill>
+                          <a:latin typeface="Arial"/>
+                        </a:rPr>
+                        <a:t>Innenfinanzierung / Thesaurierung</a:t>
+                      </a:r>
+                    </a:p>
+                  </a:txBody>
+                  <a:tcPr>
+                    <a:solidFill>
+                      <a:srgbClr val="FFFFFF"/>
+                    </a:solidFill>
+                  </a:tcPr>
+                </a:tc>
+                <a:tc>
+                  <a:txBody>
+                    <a:bodyPr wrap="square"/>
+                    <a:lstStyle/>
+                    <a:p>
+                      <a:r>
+                        <a:rPr sz="1100" b="0">
+                          <a:solidFill>
+                            <a:srgbClr val="1A1A1A"/>
+                          </a:solidFill>
+                          <a:latin typeface="Arial"/>
+                        </a:rPr>
+                        <a:t>Keine Abhängigkeiten, günstig</a:t>
+                      </a:r>
+                    </a:p>
+                  </a:txBody>
+                  <a:tcPr>
+                    <a:solidFill>
+                      <a:srgbClr val="FFFFFF"/>
+                    </a:solidFill>
+                  </a:tcPr>
+                </a:tc>
+                <a:tc>
+                  <a:txBody>
+                    <a:bodyPr wrap="square"/>
+                    <a:lstStyle/>
+                    <a:p>
+                      <a:r>
+                        <a:rPr sz="1100" b="0">
+                          <a:solidFill>
+                            <a:srgbClr val="1A1A1A"/>
+                          </a:solidFill>
+                          <a:latin typeface="Arial"/>
+                        </a:rPr>
+                        <a:t>Begrenzt durch Ertragsstärke</a:t>
+                      </a:r>
+                    </a:p>
+                  </a:txBody>
+                  <a:tcPr>
+                    <a:solidFill>
+                      <a:srgbClr val="FFFFFF"/>
+                    </a:solidFill>
+                  </a:tcPr>
+                </a:tc>
+                <a:tc>
+                  <a:txBody>
+                    <a:bodyPr wrap="square"/>
+                    <a:lstStyle/>
+                    <a:p>
+                      <a:r>
+                        <a:rPr sz="1100" b="0">
+                          <a:solidFill>
+                            <a:srgbClr val="1A1A1A"/>
+                          </a:solidFill>
+                          <a:latin typeface="Arial"/>
+                        </a:rPr>
+                        <a:t>Konsolidierung, Eigenkapitalaufbau</a:t>
+                      </a:r>
+                    </a:p>
+                  </a:txBody>
+                  <a:tcPr>
+                    <a:solidFill>
+                      <a:srgbClr val="FFFFFF"/>
+                    </a:solidFill>
+                  </a:tcPr>
+                </a:tc>
+              </a:tr>
+            </a:tbl>
+          </a:graphicData>
+        </a:graphic>
+      </p:graphicFrame>
     </p:spTree>
   </p:cSld>
   <p:clrMapOvr>
@@ -5408,8 +10085,8 @@
         </p:nvSpPr>
         <p:spPr>
           <a:xfrm>
-            <a:off x="365760" y="2286000"/>
-            <a:ext cx="11430000" cy="1828800"/>
+            <a:off x="365760" y="2011680"/>
+            <a:ext cx="11430000" cy="2011680"/>
           </a:xfrm>
           <a:prstGeom prst="rect">
             <a:avLst/>
@@ -5424,13 +10101,13 @@
           <a:p>
             <a:pPr algn="l"/>
             <a:r>
-              <a:rPr sz="3600" b="1">
+              <a:rPr sz="3600" b="1" i="0">
                 <a:solidFill>
                   <a:srgbClr val="FFFFFF"/>
                 </a:solidFill>
                 <a:latin typeface="Arial"/>
               </a:rPr>
-              <a:t>Transferaufgabe (innerhalb von 4 Wochen)</a:t>
+              <a:t>Strategische Szenarien in der Beratungspraxis</a:t>
             </a:r>
           </a:p>
         </p:txBody>
@@ -5449,7 +10126,7 @@
     <p:bg>
       <p:bgPr>
         <a:solidFill>
-          <a:srgbClr val="1A1A1A"/>
+          <a:srgbClr val="FFFFFF"/>
         </a:solidFill>
         <a:effectLst/>
       </p:bgPr>
@@ -5476,7 +10153,7 @@
             <a:avLst/>
           </a:prstGeom>
           <a:solidFill>
-            <a:srgbClr val="E05B00"/>
+            <a:srgbClr val="003DA5"/>
           </a:solidFill>
           <a:ln>
             <a:noFill/>
@@ -5512,8 +10189,8 @@
         </p:nvSpPr>
         <p:spPr>
           <a:xfrm>
-            <a:off x="365760" y="2286000"/>
-            <a:ext cx="11430000" cy="1828800"/>
+            <a:off x="228600" y="182880"/>
+            <a:ext cx="11430000" cy="320040"/>
           </a:xfrm>
           <a:prstGeom prst="rect">
             <a:avLst/>
@@ -5528,17 +10205,530 @@
           <a:p>
             <a:pPr algn="l"/>
             <a:r>
-              <a:rPr sz="3600" b="1">
+              <a:rPr sz="900" b="0" i="0">
                 <a:solidFill>
-                  <a:srgbClr val="FFFFFF"/>
+                  <a:srgbClr val="556575"/>
                 </a:solidFill>
                 <a:latin typeface="Arial"/>
               </a:rPr>
-              <a:t>Strategiememo-Vorlage (1 Seite, zum Ausfüllen)</a:t>
-            </a:r>
-          </a:p>
-        </p:txBody>
-      </p:sp>
+              <a:t>M03 · Modulinhalte</a:t>
+            </a:r>
+          </a:p>
+        </p:txBody>
+      </p:sp>
+      <p:sp>
+        <p:nvSpPr>
+          <p:cNvPr id="4" name="TextBox 3"/>
+          <p:cNvSpPr txBox="1"/>
+          <p:nvPr/>
+        </p:nvSpPr>
+        <p:spPr>
+          <a:xfrm>
+            <a:off x="365760" y="274320"/>
+            <a:ext cx="11430000" cy="777240"/>
+          </a:xfrm>
+          <a:prstGeom prst="rect">
+            <a:avLst/>
+          </a:prstGeom>
+          <a:noFill/>
+        </p:spPr>
+        <p:txBody>
+          <a:bodyPr wrap="square">
+            <a:spAutoFit/>
+          </a:bodyPr>
+          <a:lstStyle/>
+          <a:p>
+            <a:pPr algn="l"/>
+            <a:r>
+              <a:rPr sz="2200" b="1" i="0">
+                <a:solidFill>
+                  <a:srgbClr val="003DA5"/>
+                </a:solidFill>
+                <a:latin typeface="Arial"/>
+              </a:rPr>
+              <a:t>Die fünf Kernszenarien</a:t>
+            </a:r>
+          </a:p>
+        </p:txBody>
+      </p:sp>
+      <p:sp>
+        <p:nvSpPr>
+          <p:cNvPr id="5" name="Rectangle 4"/>
+          <p:cNvSpPr/>
+          <p:nvPr/>
+        </p:nvSpPr>
+        <p:spPr>
+          <a:xfrm>
+            <a:off x="365760" y="1005840"/>
+            <a:ext cx="11430000" cy="27432"/>
+          </a:xfrm>
+          <a:prstGeom prst="rect">
+            <a:avLst/>
+          </a:prstGeom>
+          <a:solidFill>
+            <a:srgbClr val="D1D5DB"/>
+          </a:solidFill>
+          <a:ln>
+            <a:noFill/>
+          </a:ln>
+        </p:spPr>
+        <p:style>
+          <a:lnRef idx="1">
+            <a:schemeClr val="accent1"/>
+          </a:lnRef>
+          <a:fillRef idx="3">
+            <a:schemeClr val="accent1"/>
+          </a:fillRef>
+          <a:effectRef idx="2">
+            <a:schemeClr val="accent1"/>
+          </a:effectRef>
+          <a:fontRef idx="minor">
+            <a:schemeClr val="lt1"/>
+          </a:fontRef>
+        </p:style>
+        <p:txBody>
+          <a:bodyPr rtlCol="0" anchor="ctr"/>
+          <a:lstStyle/>
+          <a:p>
+            <a:pPr algn="ctr"/>
+          </a:p>
+        </p:txBody>
+      </p:sp>
+      <p:graphicFrame>
+        <p:nvGraphicFramePr>
+          <p:cNvPr id="6" name="Table 5"/>
+          <p:cNvGraphicFramePr>
+            <a:graphicFrameLocks noGrp="1"/>
+          </p:cNvGraphicFramePr>
+          <p:nvPr/>
+        </p:nvGraphicFramePr>
+        <p:xfrm>
+          <a:off x="365760" y="1143000"/>
+          <a:ext cx="11430000" cy="2852928"/>
+        </p:xfrm>
+        <a:graphic>
+          <a:graphicData uri="http://schemas.openxmlformats.org/drawingml/2006/table">
+            <a:tbl>
+              <a:tblPr firstRow="1" bandRow="1">
+                <a:tableStyleId>{5C22544A-7EE6-4342-B048-85BDC9FD1C3A}</a:tableStyleId>
+              </a:tblPr>
+              <a:tblGrid>
+                <a:gridCol w="3810000"/>
+                <a:gridCol w="3810000"/>
+                <a:gridCol w="3810000"/>
+              </a:tblGrid>
+              <a:tr h="475488">
+                <a:tc>
+                  <a:txBody>
+                    <a:bodyPr wrap="square"/>
+                    <a:lstStyle/>
+                    <a:p>
+                      <a:r>
+                        <a:rPr sz="1100" b="1">
+                          <a:solidFill>
+                            <a:srgbClr val="FFFFFF"/>
+                          </a:solidFill>
+                          <a:latin typeface="Arial"/>
+                        </a:rPr>
+                        <a:t>Szenario</a:t>
+                      </a:r>
+                    </a:p>
+                  </a:txBody>
+                  <a:tcPr>
+                    <a:solidFill>
+                      <a:srgbClr val="003DA5"/>
+                    </a:solidFill>
+                  </a:tcPr>
+                </a:tc>
+                <a:tc>
+                  <a:txBody>
+                    <a:bodyPr wrap="square"/>
+                    <a:lstStyle/>
+                    <a:p>
+                      <a:r>
+                        <a:rPr sz="1100" b="1">
+                          <a:solidFill>
+                            <a:srgbClr val="FFFFFF"/>
+                          </a:solidFill>
+                          <a:latin typeface="Arial"/>
+                        </a:rPr>
+                        <a:t>Charakteristik</a:t>
+                      </a:r>
+                    </a:p>
+                  </a:txBody>
+                  <a:tcPr>
+                    <a:solidFill>
+                      <a:srgbClr val="003DA5"/>
+                    </a:solidFill>
+                  </a:tcPr>
+                </a:tc>
+                <a:tc>
+                  <a:txBody>
+                    <a:bodyPr wrap="square"/>
+                    <a:lstStyle/>
+                    <a:p>
+                      <a:r>
+                        <a:rPr sz="1100" b="1">
+                          <a:solidFill>
+                            <a:srgbClr val="FFFFFF"/>
+                          </a:solidFill>
+                          <a:latin typeface="Arial"/>
+                        </a:rPr>
+                        <a:t>Relevante Verbundpartner</a:t>
+                      </a:r>
+                    </a:p>
+                  </a:txBody>
+                  <a:tcPr>
+                    <a:solidFill>
+                      <a:srgbClr val="003DA5"/>
+                    </a:solidFill>
+                  </a:tcPr>
+                </a:tc>
+              </a:tr>
+              <a:tr h="475488">
+                <a:tc>
+                  <a:txBody>
+                    <a:bodyPr wrap="square"/>
+                    <a:lstStyle/>
+                    <a:p>
+                      <a:r>
+                        <a:rPr sz="1100" b="0">
+                          <a:solidFill>
+                            <a:srgbClr val="1A1A1A"/>
+                          </a:solidFill>
+                          <a:latin typeface="Arial"/>
+                        </a:rPr>
+                        <a:t>1 Wachstumsfinanzierung</a:t>
+                      </a:r>
+                    </a:p>
+                  </a:txBody>
+                  <a:tcPr>
+                    <a:solidFill>
+                      <a:srgbClr val="FFFFFF"/>
+                    </a:solidFill>
+                  </a:tcPr>
+                </a:tc>
+                <a:tc>
+                  <a:txBody>
+                    <a:bodyPr wrap="square"/>
+                    <a:lstStyle/>
+                    <a:p>
+                      <a:r>
+                        <a:rPr sz="1100" b="0">
+                          <a:solidFill>
+                            <a:srgbClr val="1A1A1A"/>
+                          </a:solidFill>
+                          <a:latin typeface="Arial"/>
+                        </a:rPr>
+                        <a:t>Investitionsbedarf übersteigt Innenfinanzierungskraft; Skalierung geplant</a:t>
+                      </a:r>
+                    </a:p>
+                  </a:txBody>
+                  <a:tcPr>
+                    <a:solidFill>
+                      <a:srgbClr val="FFFFFF"/>
+                    </a:solidFill>
+                  </a:tcPr>
+                </a:tc>
+                <a:tc>
+                  <a:txBody>
+                    <a:bodyPr wrap="square"/>
+                    <a:lstStyle/>
+                    <a:p>
+                      <a:r>
+                        <a:rPr sz="1100" b="0">
+                          <a:solidFill>
+                            <a:srgbClr val="1A1A1A"/>
+                          </a:solidFill>
+                          <a:latin typeface="Arial"/>
+                        </a:rPr>
+                        <a:t>DZ BANK (Fördermittel), L-Bank, ggf. Private Equity</a:t>
+                      </a:r>
+                    </a:p>
+                  </a:txBody>
+                  <a:tcPr>
+                    <a:solidFill>
+                      <a:srgbClr val="FFFFFF"/>
+                    </a:solidFill>
+                  </a:tcPr>
+                </a:tc>
+              </a:tr>
+              <a:tr h="475488">
+                <a:tc>
+                  <a:txBody>
+                    <a:bodyPr wrap="square"/>
+                    <a:lstStyle/>
+                    <a:p>
+                      <a:r>
+                        <a:rPr sz="1100" b="0">
+                          <a:solidFill>
+                            <a:srgbClr val="1A1A1A"/>
+                          </a:solidFill>
+                          <a:latin typeface="Arial"/>
+                        </a:rPr>
+                        <a:t>2 Unternehmensverkauf / M&amp;A</a:t>
+                      </a:r>
+                    </a:p>
+                  </a:txBody>
+                  <a:tcPr>
+                    <a:solidFill>
+                      <a:srgbClr val="F4F6FA"/>
+                    </a:solidFill>
+                  </a:tcPr>
+                </a:tc>
+                <a:tc>
+                  <a:txBody>
+                    <a:bodyPr wrap="square"/>
+                    <a:lstStyle/>
+                    <a:p>
+                      <a:r>
+                        <a:rPr sz="1100" b="0">
+                          <a:solidFill>
+                            <a:srgbClr val="1A1A1A"/>
+                          </a:solidFill>
+                          <a:latin typeface="Arial"/>
+                        </a:rPr>
+                        <a:t>Nachfolge durch externen Käufer, MBO, strategische Akquisition</a:t>
+                      </a:r>
+                    </a:p>
+                  </a:txBody>
+                  <a:tcPr>
+                    <a:solidFill>
+                      <a:srgbClr val="F4F6FA"/>
+                    </a:solidFill>
+                  </a:tcPr>
+                </a:tc>
+                <a:tc>
+                  <a:txBody>
+                    <a:bodyPr wrap="square"/>
+                    <a:lstStyle/>
+                    <a:p>
+                      <a:r>
+                        <a:rPr sz="1100" b="0">
+                          <a:solidFill>
+                            <a:srgbClr val="1A1A1A"/>
+                          </a:solidFill>
+                          <a:latin typeface="Arial"/>
+                        </a:rPr>
+                        <a:t>DZ BANK Corporate Finance (primär, über FK-Regionalverantwortlichen), Steuerberater, Notar</a:t>
+                      </a:r>
+                    </a:p>
+                  </a:txBody>
+                  <a:tcPr>
+                    <a:solidFill>
+                      <a:srgbClr val="F4F6FA"/>
+                    </a:solidFill>
+                  </a:tcPr>
+                </a:tc>
+              </a:tr>
+              <a:tr h="475488">
+                <a:tc>
+                  <a:txBody>
+                    <a:bodyPr wrap="square"/>
+                    <a:lstStyle/>
+                    <a:p>
+                      <a:r>
+                        <a:rPr sz="1100" b="0">
+                          <a:solidFill>
+                            <a:srgbClr val="1A1A1A"/>
+                          </a:solidFill>
+                          <a:latin typeface="Arial"/>
+                        </a:rPr>
+                        <a:t>3 Gesellschafterwechsel / Erbschaftsfall</a:t>
+                      </a:r>
+                    </a:p>
+                  </a:txBody>
+                  <a:tcPr>
+                    <a:solidFill>
+                      <a:srgbClr val="FFFFFF"/>
+                    </a:solidFill>
+                  </a:tcPr>
+                </a:tc>
+                <a:tc>
+                  <a:txBody>
+                    <a:bodyPr wrap="square"/>
+                    <a:lstStyle/>
+                    <a:p>
+                      <a:r>
+                        <a:rPr sz="1100" b="0">
+                          <a:solidFill>
+                            <a:srgbClr val="1A1A1A"/>
+                          </a:solidFill>
+                          <a:latin typeface="Arial"/>
+                        </a:rPr>
+                        <a:t>Anteilsübertragung, Erbauseinandersetzung, GbR-Umwandlung, Bewertungsbedarf</a:t>
+                      </a:r>
+                    </a:p>
+                  </a:txBody>
+                  <a:tcPr>
+                    <a:solidFill>
+                      <a:srgbClr val="FFFFFF"/>
+                    </a:solidFill>
+                  </a:tcPr>
+                </a:tc>
+                <a:tc>
+                  <a:txBody>
+                    <a:bodyPr wrap="square"/>
+                    <a:lstStyle/>
+                    <a:p>
+                      <a:r>
+                        <a:rPr sz="1100" b="0">
+                          <a:solidFill>
+                            <a:srgbClr val="1A1A1A"/>
+                          </a:solidFill>
+                          <a:latin typeface="Arial"/>
+                        </a:rPr>
+                        <a:t>Steuerberater, Notar, DZ BANK (Bewertung), R+V (Absicherung)</a:t>
+                      </a:r>
+                    </a:p>
+                  </a:txBody>
+                  <a:tcPr>
+                    <a:solidFill>
+                      <a:srgbClr val="FFFFFF"/>
+                    </a:solidFill>
+                  </a:tcPr>
+                </a:tc>
+              </a:tr>
+              <a:tr h="475488">
+                <a:tc>
+                  <a:txBody>
+                    <a:bodyPr wrap="square"/>
+                    <a:lstStyle/>
+                    <a:p>
+                      <a:r>
+                        <a:rPr sz="1100" b="0">
+                          <a:solidFill>
+                            <a:srgbClr val="1A1A1A"/>
+                          </a:solidFill>
+                          <a:latin typeface="Arial"/>
+                        </a:rPr>
+                        <a:t>4 Kapitalstrukturoptimierung</a:t>
+                      </a:r>
+                    </a:p>
+                  </a:txBody>
+                  <a:tcPr>
+                    <a:solidFill>
+                      <a:srgbClr val="F4F6FA"/>
+                    </a:solidFill>
+                  </a:tcPr>
+                </a:tc>
+                <a:tc>
+                  <a:txBody>
+                    <a:bodyPr wrap="square"/>
+                    <a:lstStyle/>
+                    <a:p>
+                      <a:r>
+                        <a:rPr sz="1100" b="0">
+                          <a:solidFill>
+                            <a:srgbClr val="1A1A1A"/>
+                          </a:solidFill>
+                          <a:latin typeface="Arial"/>
+                        </a:rPr>
+                        <a:t>EK-Stärkung, Schuldenabbau, Rating-Verbesserung vor Investitionszyklus</a:t>
+                      </a:r>
+                    </a:p>
+                  </a:txBody>
+                  <a:tcPr>
+                    <a:solidFill>
+                      <a:srgbClr val="F4F6FA"/>
+                    </a:solidFill>
+                  </a:tcPr>
+                </a:tc>
+                <a:tc>
+                  <a:txBody>
+                    <a:bodyPr wrap="square"/>
+                    <a:lstStyle/>
+                    <a:p>
+                      <a:r>
+                        <a:rPr sz="1100" b="0">
+                          <a:solidFill>
+                            <a:srgbClr val="1A1A1A"/>
+                          </a:solidFill>
+                          <a:latin typeface="Arial"/>
+                        </a:rPr>
+                        <a:t>Intern (Strukturierungsexpertise), ggf. Mezzanine-Anbieter</a:t>
+                      </a:r>
+                    </a:p>
+                  </a:txBody>
+                  <a:tcPr>
+                    <a:solidFill>
+                      <a:srgbClr val="F4F6FA"/>
+                    </a:solidFill>
+                  </a:tcPr>
+                </a:tc>
+              </a:tr>
+              <a:tr h="475488">
+                <a:tc>
+                  <a:txBody>
+                    <a:bodyPr wrap="square"/>
+                    <a:lstStyle/>
+                    <a:p>
+                      <a:r>
+                        <a:rPr sz="1100" b="0">
+                          <a:solidFill>
+                            <a:srgbClr val="1A1A1A"/>
+                          </a:solidFill>
+                          <a:latin typeface="Arial"/>
+                        </a:rPr>
+                        <a:t>5 Restrukturierung / Krise</a:t>
+                      </a:r>
+                    </a:p>
+                  </a:txBody>
+                  <a:tcPr>
+                    <a:solidFill>
+                      <a:srgbClr val="FFFFFF"/>
+                    </a:solidFill>
+                  </a:tcPr>
+                </a:tc>
+                <a:tc>
+                  <a:txBody>
+                    <a:bodyPr wrap="square"/>
+                    <a:lstStyle/>
+                    <a:p>
+                      <a:r>
+                        <a:rPr sz="1100" b="0">
+                          <a:solidFill>
+                            <a:srgbClr val="1A1A1A"/>
+                          </a:solidFill>
+                          <a:latin typeface="Arial"/>
+                        </a:rPr>
+                        <a:t>Liquiditätsengpass, Covenant-Verletzung, drohende Insolvenz</a:t>
+                      </a:r>
+                    </a:p>
+                  </a:txBody>
+                  <a:tcPr>
+                    <a:solidFill>
+                      <a:srgbClr val="FFFFFF"/>
+                    </a:solidFill>
+                  </a:tcPr>
+                </a:tc>
+                <a:tc>
+                  <a:txBody>
+                    <a:bodyPr wrap="square"/>
+                    <a:lstStyle/>
+                    <a:p>
+                      <a:r>
+                        <a:rPr sz="1100" b="0">
+                          <a:solidFill>
+                            <a:srgbClr val="1A1A1A"/>
+                          </a:solidFill>
+                          <a:latin typeface="Arial"/>
+                        </a:rPr>
+                        <a:t>Restrukturierungsberater, Insolvenzverwalter (präventiv), DZ BANK</a:t>
+                      </a:r>
+                    </a:p>
+                  </a:txBody>
+                  <a:tcPr>
+                    <a:solidFill>
+                      <a:srgbClr val="FFFFFF"/>
+                    </a:solidFill>
+                  </a:tcPr>
+                </a:tc>
+              </a:tr>
+            </a:tbl>
+          </a:graphicData>
+        </a:graphic>
+      </p:graphicFrame>
     </p:spTree>
   </p:cSld>
   <p:clrMapOvr>

--- a/public/downloads/praesentation/M03.pptx
+++ b/public/downloads/praesentation/M03.pptx
@@ -22,6 +22,7 @@
     <p:sldId id="270" r:id="rId21"/>
     <p:sldId id="271" r:id="rId22"/>
     <p:sldId id="272" r:id="rId23"/>
+    <p:sldId id="273" r:id="rId24"/>
   </p:sldIdLst>
   <p:sldSz cx="12191695" cy="6858000" type="screen4x3"/>
   <p:notesSz cx="6858000" cy="9144000"/>
@@ -3721,7 +3722,7 @@
                   </a:txBody>
                   <a:tcPr>
                     <a:solidFill>
-                      <a:srgbClr val="191D2E"/>
+                      <a:srgbClr val="1F2B56"/>
                     </a:solidFill>
                   </a:tcPr>
                 </a:tc>
@@ -3743,7 +3744,7 @@
                   </a:txBody>
                   <a:tcPr>
                     <a:solidFill>
-                      <a:srgbClr val="191D2E"/>
+                      <a:srgbClr val="1F2B56"/>
                     </a:solidFill>
                   </a:tcPr>
                 </a:tc>
@@ -3765,7 +3766,7 @@
                   </a:txBody>
                   <a:tcPr>
                     <a:solidFill>
-                      <a:srgbClr val="191D2E"/>
+                      <a:srgbClr val="1F2B56"/>
                     </a:solidFill>
                   </a:tcPr>
                 </a:tc>
@@ -4991,7 +4992,7 @@
     <p:bg>
       <p:bgPr>
         <a:solidFill>
-          <a:srgbClr val="191D2E"/>
+          <a:srgbClr val="1F2B56"/>
         </a:solidFill>
         <a:effectLst/>
       </p:bgPr>
@@ -6280,7 +6281,7 @@
                   </a:txBody>
                   <a:tcPr>
                     <a:solidFill>
-                      <a:srgbClr val="191D2E"/>
+                      <a:srgbClr val="1F2B56"/>
                     </a:solidFill>
                   </a:tcPr>
                 </a:tc>
@@ -6302,7 +6303,7 @@
                   </a:txBody>
                   <a:tcPr>
                     <a:solidFill>
-                      <a:srgbClr val="191D2E"/>
+                      <a:srgbClr val="1F2B56"/>
                     </a:solidFill>
                   </a:tcPr>
                 </a:tc>
@@ -6908,7 +6909,7 @@
         <p:spPr>
           <a:xfrm>
             <a:off x="609600" y="920750"/>
-            <a:ext cx="10972800" cy="1270000"/>
+            <a:ext cx="4826000" cy="1778000"/>
           </a:xfrm>
           <a:prstGeom prst="rect">
             <a:avLst/>
@@ -6929,20 +6930,586 @@
                 </a:solidFill>
                 <a:latin typeface="Georgia"/>
               </a:rPr>
-              <a:t>Vertiefungsliteratur</a:t>
-            </a:r>
-          </a:p>
-        </p:txBody>
-      </p:sp>
-      <p:sp>
-        <p:nvSpPr>
-          <p:cNvPr id="7" name="Rectangle 6"/>
+              <a:t>Selbstcheck nach 4 Wochen</a:t>
+            </a:r>
+          </a:p>
+        </p:txBody>
+      </p:sp>
+      <p:graphicFrame>
+        <p:nvGraphicFramePr>
+          <p:cNvPr id="7" name="Table 6"/>
+          <p:cNvGraphicFramePr>
+            <a:graphicFrameLocks noGrp="1"/>
+          </p:cNvGraphicFramePr>
+          <p:nvPr/>
+        </p:nvGraphicFramePr>
+        <p:xfrm>
+          <a:off x="5715000" y="920750"/>
+          <a:ext cx="5867400" cy="2286000"/>
+        </p:xfrm>
+        <a:graphic>
+          <a:graphicData uri="http://schemas.openxmlformats.org/drawingml/2006/table">
+            <a:tbl>
+              <a:tblPr firstRow="1" bandRow="1">
+                <a:tableStyleId>{5C22544A-7EE6-4342-B048-85BDC9FD1C3A}</a:tableStyleId>
+              </a:tblPr>
+              <a:tblGrid>
+                <a:gridCol w="1955800"/>
+                <a:gridCol w="1955800"/>
+                <a:gridCol w="1955800"/>
+              </a:tblGrid>
+              <a:tr h="381000">
+                <a:tc>
+                  <a:txBody>
+                    <a:bodyPr wrap="square"/>
+                    <a:lstStyle/>
+                    <a:p>
+                      <a:r>
+                        <a:rPr sz="1000" b="1">
+                          <a:solidFill>
+                            <a:srgbClr val="F8F8FA"/>
+                          </a:solidFill>
+                          <a:latin typeface="Courier New"/>
+                        </a:rPr>
+                        <a:t>Aussage</a:t>
+                      </a:r>
+                    </a:p>
+                  </a:txBody>
+                  <a:tcPr>
+                    <a:solidFill>
+                      <a:srgbClr val="1F2B56"/>
+                    </a:solidFill>
+                  </a:tcPr>
+                </a:tc>
+                <a:tc>
+                  <a:txBody>
+                    <a:bodyPr wrap="square"/>
+                    <a:lstStyle/>
+                    <a:p>
+                      <a:r>
+                        <a:rPr sz="1000" b="1">
+                          <a:solidFill>
+                            <a:srgbClr val="F8F8FA"/>
+                          </a:solidFill>
+                          <a:latin typeface="Courier New"/>
+                        </a:rPr>
+                        <a:t>Trifft zu</a:t>
+                      </a:r>
+                    </a:p>
+                  </a:txBody>
+                  <a:tcPr>
+                    <a:solidFill>
+                      <a:srgbClr val="1F2B56"/>
+                    </a:solidFill>
+                  </a:tcPr>
+                </a:tc>
+                <a:tc>
+                  <a:txBody>
+                    <a:bodyPr wrap="square"/>
+                    <a:lstStyle/>
+                    <a:p>
+                      <a:r>
+                        <a:rPr sz="1000" b="1">
+                          <a:solidFill>
+                            <a:srgbClr val="F8F8FA"/>
+                          </a:solidFill>
+                          <a:latin typeface="Courier New"/>
+                        </a:rPr>
+                        <a:t>Teilweise</a:t>
+                      </a:r>
+                    </a:p>
+                  </a:txBody>
+                  <a:tcPr>
+                    <a:solidFill>
+                      <a:srgbClr val="1F2B56"/>
+                    </a:solidFill>
+                  </a:tcPr>
+                </a:tc>
+              </a:tr>
+              <a:tr h="381000">
+                <a:tc>
+                  <a:txBody>
+                    <a:bodyPr wrap="square"/>
+                    <a:lstStyle/>
+                    <a:p>
+                      <a:r>
+                        <a:rPr sz="1000" b="0">
+                          <a:solidFill>
+                            <a:srgbClr val="191D2E"/>
+                          </a:solidFill>
+                          <a:latin typeface="Courier New"/>
+                        </a:rPr>
+                        <a:t>Ich habe bei mindestens einem Kunden die Werttreiber vollständig berechnet.</a:t>
+                      </a:r>
+                    </a:p>
+                  </a:txBody>
+                  <a:tcPr>
+                    <a:solidFill>
+                      <a:srgbClr val="F8F8FA"/>
+                    </a:solidFill>
+                  </a:tcPr>
+                </a:tc>
+                <a:tc>
+                  <a:txBody>
+                    <a:bodyPr wrap="square"/>
+                    <a:lstStyle/>
+                    <a:p>
+                      <a:r>
+                        <a:rPr sz="1000" b="0">
+                          <a:solidFill>
+                            <a:srgbClr val="191D2E"/>
+                          </a:solidFill>
+                          <a:latin typeface="Courier New"/>
+                        </a:rPr>
+                        <a:t>☐</a:t>
+                      </a:r>
+                    </a:p>
+                  </a:txBody>
+                  <a:tcPr>
+                    <a:solidFill>
+                      <a:srgbClr val="F8F8FA"/>
+                    </a:solidFill>
+                  </a:tcPr>
+                </a:tc>
+                <a:tc>
+                  <a:txBody>
+                    <a:bodyPr wrap="square"/>
+                    <a:lstStyle/>
+                    <a:p>
+                      <a:r>
+                        <a:rPr sz="1000" b="0">
+                          <a:solidFill>
+                            <a:srgbClr val="191D2E"/>
+                          </a:solidFill>
+                          <a:latin typeface="Courier New"/>
+                        </a:rPr>
+                        <a:t>☐</a:t>
+                      </a:r>
+                    </a:p>
+                  </a:txBody>
+                  <a:tcPr>
+                    <a:solidFill>
+                      <a:srgbClr val="F8F8FA"/>
+                    </a:solidFill>
+                  </a:tcPr>
+                </a:tc>
+              </a:tr>
+              <a:tr h="381000">
+                <a:tc>
+                  <a:txBody>
+                    <a:bodyPr wrap="square"/>
+                    <a:lstStyle/>
+                    <a:p>
+                      <a:r>
+                        <a:rPr sz="1000" b="0">
+                          <a:solidFill>
+                            <a:srgbClr val="191D2E"/>
+                          </a:solidFill>
+                          <a:latin typeface="Courier New"/>
+                        </a:rPr>
+                        <a:t>Ich habe in einem Jahresgespräch mindestens 2 strategische Fragen eingesetzt.</a:t>
+                      </a:r>
+                    </a:p>
+                  </a:txBody>
+                  <a:tcPr>
+                    <a:solidFill>
+                      <a:srgbClr val="F0F0F5"/>
+                    </a:solidFill>
+                  </a:tcPr>
+                </a:tc>
+                <a:tc>
+                  <a:txBody>
+                    <a:bodyPr wrap="square"/>
+                    <a:lstStyle/>
+                    <a:p>
+                      <a:r>
+                        <a:rPr sz="1000" b="0">
+                          <a:solidFill>
+                            <a:srgbClr val="191D2E"/>
+                          </a:solidFill>
+                          <a:latin typeface="Courier New"/>
+                        </a:rPr>
+                        <a:t>☐</a:t>
+                      </a:r>
+                    </a:p>
+                  </a:txBody>
+                  <a:tcPr>
+                    <a:solidFill>
+                      <a:srgbClr val="F0F0F5"/>
+                    </a:solidFill>
+                  </a:tcPr>
+                </a:tc>
+                <a:tc>
+                  <a:txBody>
+                    <a:bodyPr wrap="square"/>
+                    <a:lstStyle/>
+                    <a:p>
+                      <a:r>
+                        <a:rPr sz="1000" b="0">
+                          <a:solidFill>
+                            <a:srgbClr val="191D2E"/>
+                          </a:solidFill>
+                          <a:latin typeface="Courier New"/>
+                        </a:rPr>
+                        <a:t>☐</a:t>
+                      </a:r>
+                    </a:p>
+                  </a:txBody>
+                  <a:tcPr>
+                    <a:solidFill>
+                      <a:srgbClr val="F0F0F5"/>
+                    </a:solidFill>
+                  </a:tcPr>
+                </a:tc>
+              </a:tr>
+              <a:tr h="381000">
+                <a:tc>
+                  <a:txBody>
+                    <a:bodyPr wrap="square"/>
+                    <a:lstStyle/>
+                    <a:p>
+                      <a:r>
+                        <a:rPr sz="1000" b="0">
+                          <a:solidFill>
+                            <a:srgbClr val="191D2E"/>
+                          </a:solidFill>
+                          <a:latin typeface="Courier New"/>
+                        </a:rPr>
+                        <a:t>Ich habe das passende Finanzierungsinstrument für ein konkretes Szenario identifiziert.</a:t>
+                      </a:r>
+                    </a:p>
+                  </a:txBody>
+                  <a:tcPr>
+                    <a:solidFill>
+                      <a:srgbClr val="F8F8FA"/>
+                    </a:solidFill>
+                  </a:tcPr>
+                </a:tc>
+                <a:tc>
+                  <a:txBody>
+                    <a:bodyPr wrap="square"/>
+                    <a:lstStyle/>
+                    <a:p>
+                      <a:r>
+                        <a:rPr sz="1000" b="0">
+                          <a:solidFill>
+                            <a:srgbClr val="191D2E"/>
+                          </a:solidFill>
+                          <a:latin typeface="Courier New"/>
+                        </a:rPr>
+                        <a:t>☐</a:t>
+                      </a:r>
+                    </a:p>
+                  </a:txBody>
+                  <a:tcPr>
+                    <a:solidFill>
+                      <a:srgbClr val="F8F8FA"/>
+                    </a:solidFill>
+                  </a:tcPr>
+                </a:tc>
+                <a:tc>
+                  <a:txBody>
+                    <a:bodyPr wrap="square"/>
+                    <a:lstStyle/>
+                    <a:p>
+                      <a:r>
+                        <a:rPr sz="1000" b="0">
+                          <a:solidFill>
+                            <a:srgbClr val="191D2E"/>
+                          </a:solidFill>
+                          <a:latin typeface="Courier New"/>
+                        </a:rPr>
+                        <a:t>☐</a:t>
+                      </a:r>
+                    </a:p>
+                  </a:txBody>
+                  <a:tcPr>
+                    <a:solidFill>
+                      <a:srgbClr val="F8F8FA"/>
+                    </a:solidFill>
+                  </a:tcPr>
+                </a:tc>
+              </a:tr>
+              <a:tr h="381000">
+                <a:tc>
+                  <a:txBody>
+                    <a:bodyPr wrap="square"/>
+                    <a:lstStyle/>
+                    <a:p>
+                      <a:r>
+                        <a:rPr sz="1000" b="0">
+                          <a:solidFill>
+                            <a:srgbClr val="191D2E"/>
+                          </a:solidFill>
+                          <a:latin typeface="Courier New"/>
+                        </a:rPr>
+                        <a:t>Ich habe ein Strategiememo erstellt und mit meiner Führungskraft besprochen.</a:t>
+                      </a:r>
+                    </a:p>
+                  </a:txBody>
+                  <a:tcPr>
+                    <a:solidFill>
+                      <a:srgbClr val="F0F0F5"/>
+                    </a:solidFill>
+                  </a:tcPr>
+                </a:tc>
+                <a:tc>
+                  <a:txBody>
+                    <a:bodyPr wrap="square"/>
+                    <a:lstStyle/>
+                    <a:p>
+                      <a:r>
+                        <a:rPr sz="1000" b="0">
+                          <a:solidFill>
+                            <a:srgbClr val="191D2E"/>
+                          </a:solidFill>
+                          <a:latin typeface="Courier New"/>
+                        </a:rPr>
+                        <a:t>☐</a:t>
+                      </a:r>
+                    </a:p>
+                  </a:txBody>
+                  <a:tcPr>
+                    <a:solidFill>
+                      <a:srgbClr val="F0F0F5"/>
+                    </a:solidFill>
+                  </a:tcPr>
+                </a:tc>
+                <a:tc>
+                  <a:txBody>
+                    <a:bodyPr wrap="square"/>
+                    <a:lstStyle/>
+                    <a:p>
+                      <a:r>
+                        <a:rPr sz="1000" b="0">
+                          <a:solidFill>
+                            <a:srgbClr val="191D2E"/>
+                          </a:solidFill>
+                          <a:latin typeface="Courier New"/>
+                        </a:rPr>
+                        <a:t>☐</a:t>
+                      </a:r>
+                    </a:p>
+                  </a:txBody>
+                  <a:tcPr>
+                    <a:solidFill>
+                      <a:srgbClr val="F0F0F5"/>
+                    </a:solidFill>
+                  </a:tcPr>
+                </a:tc>
+              </a:tr>
+              <a:tr h="381000">
+                <a:tc>
+                  <a:txBody>
+                    <a:bodyPr wrap="square"/>
+                    <a:lstStyle/>
+                    <a:p>
+                      <a:r>
+                        <a:rPr sz="1000" b="0">
+                          <a:solidFill>
+                            <a:srgbClr val="191D2E"/>
+                          </a:solidFill>
+                          <a:latin typeface="Courier New"/>
+                        </a:rPr>
+                        <a:t>Ich habe Förderoptionen geprüft und ggf. einen Antrag vorbereitet.</a:t>
+                      </a:r>
+                    </a:p>
+                  </a:txBody>
+                  <a:tcPr>
+                    <a:solidFill>
+                      <a:srgbClr val="F8F8FA"/>
+                    </a:solidFill>
+                  </a:tcPr>
+                </a:tc>
+                <a:tc>
+                  <a:txBody>
+                    <a:bodyPr wrap="square"/>
+                    <a:lstStyle/>
+                    <a:p>
+                      <a:r>
+                        <a:rPr sz="1000" b="0">
+                          <a:solidFill>
+                            <a:srgbClr val="191D2E"/>
+                          </a:solidFill>
+                          <a:latin typeface="Courier New"/>
+                        </a:rPr>
+                        <a:t>☐</a:t>
+                      </a:r>
+                    </a:p>
+                  </a:txBody>
+                  <a:tcPr>
+                    <a:solidFill>
+                      <a:srgbClr val="F8F8FA"/>
+                    </a:solidFill>
+                  </a:tcPr>
+                </a:tc>
+                <a:tc>
+                  <a:txBody>
+                    <a:bodyPr wrap="square"/>
+                    <a:lstStyle/>
+                    <a:p>
+                      <a:r>
+                        <a:rPr sz="1000" b="0">
+                          <a:solidFill>
+                            <a:srgbClr val="191D2E"/>
+                          </a:solidFill>
+                          <a:latin typeface="Courier New"/>
+                        </a:rPr>
+                        <a:t>☐</a:t>
+                      </a:r>
+                    </a:p>
+                  </a:txBody>
+                  <a:tcPr>
+                    <a:solidFill>
+                      <a:srgbClr val="F8F8FA"/>
+                    </a:solidFill>
+                  </a:tcPr>
+                </a:tc>
+              </a:tr>
+            </a:tbl>
+          </a:graphicData>
+        </a:graphic>
+      </p:graphicFrame>
+    </p:spTree>
+  </p:cSld>
+  <p:clrMapOvr>
+    <a:masterClrMapping/>
+  </p:clrMapOvr>
+</p:sld>
+</file>
+
+<file path=ppt/slides/slide16.xml><?xml version="1.0" encoding="utf-8"?>
+<p:sld xmlns:a="http://schemas.openxmlformats.org/drawingml/2006/main" xmlns:p="http://schemas.openxmlformats.org/presentationml/2006/main" xmlns:r="http://schemas.openxmlformats.org/officeDocument/2006/relationships">
+  <p:cSld>
+    <p:bg>
+      <p:bgPr>
+        <a:solidFill>
+          <a:srgbClr val="F8F8FA"/>
+        </a:solidFill>
+        <a:effectLst/>
+      </p:bgPr>
+    </p:bg>
+    <p:spTree>
+      <p:nvGrpSpPr>
+        <p:cNvPr id="1" name=""/>
+        <p:cNvGrpSpPr/>
+        <p:nvPr/>
+      </p:nvGrpSpPr>
+      <p:grpSpPr/>
+      <p:sp>
+        <p:nvSpPr>
+          <p:cNvPr id="2" name="TextBox 1"/>
+          <p:cNvSpPr txBox="1"/>
+          <p:nvPr/>
+        </p:nvSpPr>
+        <p:spPr>
+          <a:xfrm>
+            <a:off x="609600" y="279400"/>
+            <a:ext cx="2540000" cy="279400"/>
+          </a:xfrm>
+          <a:prstGeom prst="rect">
+            <a:avLst/>
+          </a:prstGeom>
+          <a:noFill/>
+        </p:spPr>
+        <p:txBody>
+          <a:bodyPr wrap="square">
+            <a:normAutofit/>
+          </a:bodyPr>
+          <a:lstStyle/>
+          <a:p>
+            <a:pPr algn="l"/>
+            <a:r>
+              <a:rPr sz="1000" b="1" i="0">
+                <a:solidFill>
+                  <a:srgbClr val="191D2E"/>
+                </a:solidFill>
+                <a:latin typeface="Arial"/>
+              </a:rPr>
+              <a:t>FKB  Campus</a:t>
+            </a:r>
+          </a:p>
+        </p:txBody>
+      </p:sp>
+      <p:sp>
+        <p:nvSpPr>
+          <p:cNvPr id="3" name="TextBox 2"/>
+          <p:cNvSpPr txBox="1"/>
+          <p:nvPr/>
+        </p:nvSpPr>
+        <p:spPr>
+          <a:xfrm>
+            <a:off x="609600" y="279400"/>
+            <a:ext cx="10972800" cy="279400"/>
+          </a:xfrm>
+          <a:prstGeom prst="rect">
+            <a:avLst/>
+          </a:prstGeom>
+          <a:noFill/>
+        </p:spPr>
+        <p:txBody>
+          <a:bodyPr wrap="square">
+            <a:normAutofit/>
+          </a:bodyPr>
+          <a:lstStyle/>
+          <a:p>
+            <a:pPr algn="r"/>
+            <a:r>
+              <a:rPr sz="900" b="0" i="0">
+                <a:solidFill>
+                  <a:srgbClr val="7B7FA0"/>
+                </a:solidFill>
+                <a:latin typeface="Courier New"/>
+              </a:rPr>
+              <a:t>§ II · PRAXISTRANSFER</a:t>
+            </a:r>
+          </a:p>
+        </p:txBody>
+      </p:sp>
+      <p:sp>
+        <p:nvSpPr>
+          <p:cNvPr id="4" name="TextBox 3"/>
+          <p:cNvSpPr txBox="1"/>
+          <p:nvPr/>
+        </p:nvSpPr>
+        <p:spPr>
+          <a:xfrm>
+            <a:off x="609600" y="6426200"/>
+            <a:ext cx="10972800" cy="228600"/>
+          </a:xfrm>
+          <a:prstGeom prst="rect">
+            <a:avLst/>
+          </a:prstGeom>
+          <a:noFill/>
+        </p:spPr>
+        <p:txBody>
+          <a:bodyPr wrap="square">
+            <a:normAutofit/>
+          </a:bodyPr>
+          <a:lstStyle/>
+          <a:p>
+            <a:pPr algn="r"/>
+            <a:r>
+              <a:rPr sz="900" b="0" i="0">
+                <a:solidFill>
+                  <a:srgbClr val="7B7FA0"/>
+                </a:solidFill>
+                <a:latin typeface="Courier New"/>
+              </a:rPr>
+              <a:t>16</a:t>
+            </a:r>
+          </a:p>
+        </p:txBody>
+      </p:sp>
+      <p:sp>
+        <p:nvSpPr>
+          <p:cNvPr id="5" name="Rectangle 4"/>
           <p:cNvSpPr/>
           <p:nvPr/>
         </p:nvSpPr>
         <p:spPr>
           <a:xfrm>
-            <a:off x="609600" y="2254250"/>
+            <a:off x="609600" y="825500"/>
             <a:ext cx="10972800" cy="6350"/>
           </a:xfrm>
           <a:prstGeom prst="rect">
@@ -6979,14 +7546,14 @@
       </p:sp>
       <p:sp>
         <p:nvSpPr>
-          <p:cNvPr id="8" name="TextBox 7"/>
+          <p:cNvPr id="6" name="TextBox 5"/>
           <p:cNvSpPr txBox="1"/>
           <p:nvPr/>
         </p:nvSpPr>
         <p:spPr>
           <a:xfrm>
-            <a:off x="609600" y="2343150"/>
-            <a:ext cx="304800" cy="254000"/>
+            <a:off x="609600" y="920750"/>
+            <a:ext cx="10972800" cy="1270000"/>
           </a:xfrm>
           <a:prstGeom prst="rect">
             <a:avLst/>
@@ -7001,68 +7568,33 @@
           <a:p>
             <a:pPr algn="l"/>
             <a:r>
-              <a:rPr sz="1000" b="0" i="0">
-                <a:solidFill>
-                  <a:srgbClr val="1F2B56"/>
-                </a:solidFill>
-                <a:latin typeface="Courier New"/>
-              </a:rPr>
-              <a:t>01</a:t>
-            </a:r>
-          </a:p>
-        </p:txBody>
-      </p:sp>
-      <p:sp>
-        <p:nvSpPr>
-          <p:cNvPr id="9" name="TextBox 8"/>
-          <p:cNvSpPr txBox="1"/>
-          <p:nvPr/>
-        </p:nvSpPr>
-        <p:spPr>
-          <a:xfrm>
-            <a:off x="990599" y="2317750"/>
-            <a:ext cx="4699000" cy="558800"/>
-          </a:xfrm>
-          <a:prstGeom prst="rect">
-            <a:avLst/>
-          </a:prstGeom>
-          <a:noFill/>
-        </p:spPr>
-        <p:txBody>
-          <a:bodyPr wrap="square">
-            <a:normAutofit/>
-          </a:bodyPr>
-          <a:lstStyle/>
-          <a:p>
-            <a:pPr algn="l"/>
-            <a:r>
-              <a:rPr sz="1400" b="0" i="0">
+              <a:rPr sz="3800" b="0" i="0">
                 <a:solidFill>
                   <a:srgbClr val="191D2E"/>
                 </a:solidFill>
                 <a:latin typeface="Georgia"/>
               </a:rPr>
-              <a:t>Rappaport, A. (1998). Creating Shareholder Value: A Guide for Managers and Investors (2. Aufl.). Free Press.</a:t>
-            </a:r>
-          </a:p>
-        </p:txBody>
-      </p:sp>
-      <p:sp>
-        <p:nvSpPr>
-          <p:cNvPr id="10" name="Rectangle 9"/>
+              <a:t>Vertiefungsliteratur</a:t>
+            </a:r>
+          </a:p>
+        </p:txBody>
+      </p:sp>
+      <p:sp>
+        <p:nvSpPr>
+          <p:cNvPr id="7" name="Rectangle 6"/>
           <p:cNvSpPr/>
           <p:nvPr/>
         </p:nvSpPr>
         <p:spPr>
           <a:xfrm>
-            <a:off x="609600" y="2889250"/>
-            <a:ext cx="5080000" cy="6350"/>
+            <a:off x="609600" y="2254250"/>
+            <a:ext cx="10972800" cy="6350"/>
           </a:xfrm>
           <a:prstGeom prst="rect">
             <a:avLst/>
           </a:prstGeom>
           <a:solidFill>
-            <a:srgbClr val="E0E0E8"/>
+            <a:srgbClr val="191D2E"/>
           </a:solidFill>
           <a:ln>
             <a:noFill/>
@@ -7092,13 +7624,13 @@
       </p:sp>
       <p:sp>
         <p:nvSpPr>
-          <p:cNvPr id="11" name="TextBox 10"/>
+          <p:cNvPr id="8" name="TextBox 7"/>
           <p:cNvSpPr txBox="1"/>
           <p:nvPr/>
         </p:nvSpPr>
         <p:spPr>
           <a:xfrm>
-            <a:off x="609600" y="2952750"/>
+            <a:off x="609600" y="2343150"/>
             <a:ext cx="304800" cy="254000"/>
           </a:xfrm>
           <a:prstGeom prst="rect">
@@ -7120,20 +7652,20 @@
                 </a:solidFill>
                 <a:latin typeface="Courier New"/>
               </a:rPr>
-              <a:t>02</a:t>
-            </a:r>
-          </a:p>
-        </p:txBody>
-      </p:sp>
-      <p:sp>
-        <p:nvSpPr>
-          <p:cNvPr id="12" name="TextBox 11"/>
+              <a:t>01</a:t>
+            </a:r>
+          </a:p>
+        </p:txBody>
+      </p:sp>
+      <p:sp>
+        <p:nvSpPr>
+          <p:cNvPr id="9" name="TextBox 8"/>
           <p:cNvSpPr txBox="1"/>
           <p:nvPr/>
         </p:nvSpPr>
         <p:spPr>
           <a:xfrm>
-            <a:off x="990599" y="2927350"/>
+            <a:off x="990599" y="2317750"/>
             <a:ext cx="4699000" cy="558800"/>
           </a:xfrm>
           <a:prstGeom prst="rect">
@@ -7155,20 +7687,20 @@
                 </a:solidFill>
                 <a:latin typeface="Georgia"/>
               </a:rPr>
-              <a:t>Rackham, N. (1988). SPIN Selling. McGraw-Hill.</a:t>
-            </a:r>
-          </a:p>
-        </p:txBody>
-      </p:sp>
-      <p:sp>
-        <p:nvSpPr>
-          <p:cNvPr id="13" name="Rectangle 12"/>
+              <a:t>Rappaport, A. (1998). Creating Shareholder Value: A Guide for Managers and Investors (2. Aufl.). Free Press.</a:t>
+            </a:r>
+          </a:p>
+        </p:txBody>
+      </p:sp>
+      <p:sp>
+        <p:nvSpPr>
+          <p:cNvPr id="10" name="Rectangle 9"/>
           <p:cNvSpPr/>
           <p:nvPr/>
         </p:nvSpPr>
         <p:spPr>
           <a:xfrm>
-            <a:off x="609600" y="3498850"/>
+            <a:off x="609600" y="2889250"/>
             <a:ext cx="5080000" cy="6350"/>
           </a:xfrm>
           <a:prstGeom prst="rect">
@@ -7205,13 +7737,13 @@
       </p:sp>
       <p:sp>
         <p:nvSpPr>
-          <p:cNvPr id="14" name="TextBox 13"/>
+          <p:cNvPr id="11" name="TextBox 10"/>
           <p:cNvSpPr txBox="1"/>
           <p:nvPr/>
         </p:nvSpPr>
         <p:spPr>
           <a:xfrm>
-            <a:off x="6502400" y="2343150"/>
+            <a:off x="609600" y="2952750"/>
             <a:ext cx="304800" cy="254000"/>
           </a:xfrm>
           <a:prstGeom prst="rect">
@@ -7233,20 +7765,20 @@
                 </a:solidFill>
                 <a:latin typeface="Courier New"/>
               </a:rPr>
-              <a:t>01</a:t>
-            </a:r>
-          </a:p>
-        </p:txBody>
-      </p:sp>
-      <p:sp>
-        <p:nvSpPr>
-          <p:cNvPr id="15" name="TextBox 14"/>
+              <a:t>02</a:t>
+            </a:r>
+          </a:p>
+        </p:txBody>
+      </p:sp>
+      <p:sp>
+        <p:nvSpPr>
+          <p:cNvPr id="12" name="TextBox 11"/>
           <p:cNvSpPr txBox="1"/>
           <p:nvPr/>
         </p:nvSpPr>
         <p:spPr>
           <a:xfrm>
-            <a:off x="6883400" y="2317750"/>
+            <a:off x="990599" y="2927350"/>
             <a:ext cx="4699000" cy="558800"/>
           </a:xfrm>
           <a:prstGeom prst="rect">
@@ -7268,20 +7800,20 @@
                 </a:solidFill>
                 <a:latin typeface="Georgia"/>
               </a:rPr>
-              <a:t>Brealey, R. A., Myers, S. C. &amp; Allen, F. (2020). Principles of Corporate Finance (13. Aufl.). McGraw-Hill.</a:t>
-            </a:r>
-          </a:p>
-        </p:txBody>
-      </p:sp>
-      <p:sp>
-        <p:nvSpPr>
-          <p:cNvPr id="16" name="Rectangle 15"/>
+              <a:t>Rackham, N. (1988). SPIN Selling. McGraw-Hill.</a:t>
+            </a:r>
+          </a:p>
+        </p:txBody>
+      </p:sp>
+      <p:sp>
+        <p:nvSpPr>
+          <p:cNvPr id="13" name="Rectangle 12"/>
           <p:cNvSpPr/>
           <p:nvPr/>
         </p:nvSpPr>
         <p:spPr>
           <a:xfrm>
-            <a:off x="6502400" y="2889250"/>
+            <a:off x="609600" y="3498850"/>
             <a:ext cx="5080000" cy="6350"/>
           </a:xfrm>
           <a:prstGeom prst="rect">
@@ -7318,13 +7850,13 @@
       </p:sp>
       <p:sp>
         <p:nvSpPr>
-          <p:cNvPr id="17" name="TextBox 16"/>
+          <p:cNvPr id="14" name="TextBox 13"/>
           <p:cNvSpPr txBox="1"/>
           <p:nvPr/>
         </p:nvSpPr>
         <p:spPr>
           <a:xfrm>
-            <a:off x="6502400" y="2952750"/>
+            <a:off x="6502400" y="2343150"/>
             <a:ext cx="304800" cy="254000"/>
           </a:xfrm>
           <a:prstGeom prst="rect">
@@ -7346,20 +7878,20 @@
                 </a:solidFill>
                 <a:latin typeface="Courier New"/>
               </a:rPr>
-              <a:t>02</a:t>
-            </a:r>
-          </a:p>
-        </p:txBody>
-      </p:sp>
-      <p:sp>
-        <p:nvSpPr>
-          <p:cNvPr id="18" name="TextBox 17"/>
+              <a:t>01</a:t>
+            </a:r>
+          </a:p>
+        </p:txBody>
+      </p:sp>
+      <p:sp>
+        <p:nvSpPr>
+          <p:cNvPr id="15" name="TextBox 14"/>
           <p:cNvSpPr txBox="1"/>
           <p:nvPr/>
         </p:nvSpPr>
         <p:spPr>
           <a:xfrm>
-            <a:off x="6883400" y="2927350"/>
+            <a:off x="6883400" y="2317750"/>
             <a:ext cx="4699000" cy="558800"/>
           </a:xfrm>
           <a:prstGeom prst="rect">
@@ -7381,20 +7913,20 @@
                 </a:solidFill>
                 <a:latin typeface="Georgia"/>
               </a:rPr>
-              <a:t>Damodaran, A. (2012). Investment Valuation: Tools and Techniques for Determining the Value of Any Asset (3. Aufl.). Wiley Finance.</a:t>
-            </a:r>
-          </a:p>
-        </p:txBody>
-      </p:sp>
-      <p:sp>
-        <p:nvSpPr>
-          <p:cNvPr id="19" name="Rectangle 18"/>
+              <a:t>Brealey, R. A., Myers, S. C. &amp; Allen, F. (2020). Principles of Corporate Finance (13. Aufl.). McGraw-Hill.</a:t>
+            </a:r>
+          </a:p>
+        </p:txBody>
+      </p:sp>
+      <p:sp>
+        <p:nvSpPr>
+          <p:cNvPr id="16" name="Rectangle 15"/>
           <p:cNvSpPr/>
           <p:nvPr/>
         </p:nvSpPr>
         <p:spPr>
           <a:xfrm>
-            <a:off x="6502400" y="3498850"/>
+            <a:off x="6502400" y="2889250"/>
             <a:ext cx="5080000" cy="6350"/>
           </a:xfrm>
           <a:prstGeom prst="rect">
@@ -7431,13 +7963,13 @@
       </p:sp>
       <p:sp>
         <p:nvSpPr>
-          <p:cNvPr id="20" name="TextBox 19"/>
+          <p:cNvPr id="17" name="TextBox 16"/>
           <p:cNvSpPr txBox="1"/>
           <p:nvPr/>
         </p:nvSpPr>
         <p:spPr>
           <a:xfrm>
-            <a:off x="6502400" y="3562350"/>
+            <a:off x="6502400" y="2952750"/>
             <a:ext cx="304800" cy="254000"/>
           </a:xfrm>
           <a:prstGeom prst="rect">
@@ -7459,20 +7991,20 @@
                 </a:solidFill>
                 <a:latin typeface="Courier New"/>
               </a:rPr>
-              <a:t>03</a:t>
-            </a:r>
-          </a:p>
-        </p:txBody>
-      </p:sp>
-      <p:sp>
-        <p:nvSpPr>
-          <p:cNvPr id="21" name="TextBox 20"/>
+              <a:t>02</a:t>
+            </a:r>
+          </a:p>
+        </p:txBody>
+      </p:sp>
+      <p:sp>
+        <p:nvSpPr>
+          <p:cNvPr id="18" name="TextBox 17"/>
           <p:cNvSpPr txBox="1"/>
           <p:nvPr/>
         </p:nvSpPr>
         <p:spPr>
           <a:xfrm>
-            <a:off x="6883400" y="3536950"/>
+            <a:off x="6883400" y="2927350"/>
             <a:ext cx="4699000" cy="558800"/>
           </a:xfrm>
           <a:prstGeom prst="rect">
@@ -7494,20 +8026,20 @@
                 </a:solidFill>
                 <a:latin typeface="Georgia"/>
               </a:rPr>
-              <a:t>Porter, M. E. (1985). Competitive Advantage: Creating and Sustaining Superior Performance. Free Press.</a:t>
-            </a:r>
-          </a:p>
-        </p:txBody>
-      </p:sp>
-      <p:sp>
-        <p:nvSpPr>
-          <p:cNvPr id="22" name="Rectangle 21"/>
+              <a:t>Damodaran, A. (2012). Investment Valuation: Tools and Techniques for Determining the Value of Any Asset (3. Aufl.). Wiley Finance.</a:t>
+            </a:r>
+          </a:p>
+        </p:txBody>
+      </p:sp>
+      <p:sp>
+        <p:nvSpPr>
+          <p:cNvPr id="19" name="Rectangle 18"/>
           <p:cNvSpPr/>
           <p:nvPr/>
         </p:nvSpPr>
         <p:spPr>
           <a:xfrm>
-            <a:off x="6502400" y="4108450"/>
+            <a:off x="6502400" y="3498850"/>
             <a:ext cx="5080000" cy="6350"/>
           </a:xfrm>
           <a:prstGeom prst="rect">
@@ -7542,6 +8074,119 @@
           </a:p>
         </p:txBody>
       </p:sp>
+      <p:sp>
+        <p:nvSpPr>
+          <p:cNvPr id="20" name="TextBox 19"/>
+          <p:cNvSpPr txBox="1"/>
+          <p:nvPr/>
+        </p:nvSpPr>
+        <p:spPr>
+          <a:xfrm>
+            <a:off x="6502400" y="3562350"/>
+            <a:ext cx="304800" cy="254000"/>
+          </a:xfrm>
+          <a:prstGeom prst="rect">
+            <a:avLst/>
+          </a:prstGeom>
+          <a:noFill/>
+        </p:spPr>
+        <p:txBody>
+          <a:bodyPr wrap="square">
+            <a:normAutofit/>
+          </a:bodyPr>
+          <a:lstStyle/>
+          <a:p>
+            <a:pPr algn="l"/>
+            <a:r>
+              <a:rPr sz="1000" b="0" i="0">
+                <a:solidFill>
+                  <a:srgbClr val="1F2B56"/>
+                </a:solidFill>
+                <a:latin typeface="Courier New"/>
+              </a:rPr>
+              <a:t>03</a:t>
+            </a:r>
+          </a:p>
+        </p:txBody>
+      </p:sp>
+      <p:sp>
+        <p:nvSpPr>
+          <p:cNvPr id="21" name="TextBox 20"/>
+          <p:cNvSpPr txBox="1"/>
+          <p:nvPr/>
+        </p:nvSpPr>
+        <p:spPr>
+          <a:xfrm>
+            <a:off x="6883400" y="3536950"/>
+            <a:ext cx="4699000" cy="558800"/>
+          </a:xfrm>
+          <a:prstGeom prst="rect">
+            <a:avLst/>
+          </a:prstGeom>
+          <a:noFill/>
+        </p:spPr>
+        <p:txBody>
+          <a:bodyPr wrap="square">
+            <a:normAutofit/>
+          </a:bodyPr>
+          <a:lstStyle/>
+          <a:p>
+            <a:pPr algn="l"/>
+            <a:r>
+              <a:rPr sz="1400" b="0" i="0">
+                <a:solidFill>
+                  <a:srgbClr val="191D2E"/>
+                </a:solidFill>
+                <a:latin typeface="Georgia"/>
+              </a:rPr>
+              <a:t>Porter, M. E. (1985). Competitive Advantage: Creating and Sustaining Superior Performance. Free Press.</a:t>
+            </a:r>
+          </a:p>
+        </p:txBody>
+      </p:sp>
+      <p:sp>
+        <p:nvSpPr>
+          <p:cNvPr id="22" name="Rectangle 21"/>
+          <p:cNvSpPr/>
+          <p:nvPr/>
+        </p:nvSpPr>
+        <p:spPr>
+          <a:xfrm>
+            <a:off x="6502400" y="4108450"/>
+            <a:ext cx="5080000" cy="6350"/>
+          </a:xfrm>
+          <a:prstGeom prst="rect">
+            <a:avLst/>
+          </a:prstGeom>
+          <a:solidFill>
+            <a:srgbClr val="E0E0E8"/>
+          </a:solidFill>
+          <a:ln>
+            <a:noFill/>
+          </a:ln>
+        </p:spPr>
+        <p:style>
+          <a:lnRef idx="1">
+            <a:schemeClr val="accent1"/>
+          </a:lnRef>
+          <a:fillRef idx="3">
+            <a:schemeClr val="accent1"/>
+          </a:fillRef>
+          <a:effectRef idx="2">
+            <a:schemeClr val="accent1"/>
+          </a:effectRef>
+          <a:fontRef idx="minor">
+            <a:schemeClr val="lt1"/>
+          </a:fontRef>
+        </p:style>
+        <p:txBody>
+          <a:bodyPr rtlCol="0" anchor="ctr"/>
+          <a:lstStyle/>
+          <a:p>
+            <a:pPr algn="ctr"/>
+          </a:p>
+        </p:txBody>
+      </p:sp>
     </p:spTree>
   </p:cSld>
   <p:clrMapOvr>
@@ -7550,13 +8195,13 @@
 </p:sld>
 </file>
 
-<file path=ppt/slides/slide16.xml><?xml version="1.0" encoding="utf-8"?>
+<file path=ppt/slides/slide17.xml><?xml version="1.0" encoding="utf-8"?>
 <p:sld xmlns:a="http://schemas.openxmlformats.org/drawingml/2006/main" xmlns:p="http://schemas.openxmlformats.org/presentationml/2006/main" xmlns:r="http://schemas.openxmlformats.org/officeDocument/2006/relationships">
   <p:cSld>
     <p:bg>
       <p:bgPr>
         <a:solidFill>
-          <a:srgbClr val="191D2E"/>
+          <a:srgbClr val="1F2B56"/>
         </a:solidFill>
         <a:effectLst/>
       </p:bgPr>
@@ -7668,7 +8313,7 @@
                 </a:solidFill>
                 <a:latin typeface="Courier New"/>
               </a:rPr>
-              <a:t>16</a:t>
+              <a:t>17</a:t>
             </a:r>
           </a:p>
         </p:txBody>
@@ -7751,7 +8396,7 @@
 </p:sld>
 </file>
 
-<file path=ppt/slides/slide17.xml><?xml version="1.0" encoding="utf-8"?>
+<file path=ppt/slides/slide18.xml><?xml version="1.0" encoding="utf-8"?>
 <p:sld xmlns:a="http://schemas.openxmlformats.org/drawingml/2006/main" xmlns:p="http://schemas.openxmlformats.org/presentationml/2006/main" xmlns:r="http://schemas.openxmlformats.org/officeDocument/2006/relationships">
   <p:cSld>
     <p:bg>
@@ -8353,8 +8998,8 @@
         </p:nvSpPr>
         <p:spPr>
           <a:xfrm>
-            <a:off x="4064000" y="927100"/>
-            <a:ext cx="508000" cy="647700"/>
+            <a:off x="4064000" y="939799"/>
+            <a:ext cx="762000" cy="647700"/>
           </a:xfrm>
           <a:prstGeom prst="rect">
             <a:avLst/>
@@ -8362,20 +9007,20 @@
           <a:noFill/>
         </p:spPr>
         <p:txBody>
-          <a:bodyPr wrap="square">
+          <a:bodyPr wrap="none">
             <a:normAutofit/>
           </a:bodyPr>
           <a:lstStyle/>
           <a:p>
             <a:pPr algn="l"/>
             <a:r>
-              <a:rPr sz="2600" b="0" i="1">
+              <a:rPr sz="2400" b="0" i="1">
                 <a:solidFill>
                   <a:srgbClr val="1F2B56"/>
                 </a:solidFill>
                 <a:latin typeface="Georgia"/>
               </a:rPr>
-              <a:t>I.</a:t>
+              <a:t>I</a:t>
             </a:r>
           </a:p>
         </p:txBody>
@@ -8388,8 +9033,8 @@
         </p:nvSpPr>
         <p:spPr>
           <a:xfrm>
-            <a:off x="4699000" y="952500"/>
-            <a:ext cx="6858000" cy="622300"/>
+            <a:off x="4953000" y="952500"/>
+            <a:ext cx="6629400" cy="635000"/>
           </a:xfrm>
           <a:prstGeom prst="rect">
             <a:avLst/>
@@ -8423,7 +9068,7 @@
         </p:nvSpPr>
         <p:spPr>
           <a:xfrm>
-            <a:off x="4064000" y="1574800"/>
+            <a:off x="4064000" y="1587500"/>
             <a:ext cx="7518399" cy="6350"/>
           </a:xfrm>
           <a:prstGeom prst="rect">
@@ -8466,8 +9111,8 @@
         </p:nvSpPr>
         <p:spPr>
           <a:xfrm>
-            <a:off x="4064000" y="1612900"/>
-            <a:ext cx="508000" cy="647700"/>
+            <a:off x="4064000" y="1638300"/>
+            <a:ext cx="762000" cy="647700"/>
           </a:xfrm>
           <a:prstGeom prst="rect">
             <a:avLst/>
@@ -8475,20 +9120,20 @@
           <a:noFill/>
         </p:spPr>
         <p:txBody>
-          <a:bodyPr wrap="square">
+          <a:bodyPr wrap="none">
             <a:normAutofit/>
           </a:bodyPr>
           <a:lstStyle/>
           <a:p>
             <a:pPr algn="l"/>
             <a:r>
-              <a:rPr sz="2600" b="0" i="1">
+              <a:rPr sz="2400" b="0" i="1">
                 <a:solidFill>
                   <a:srgbClr val="1F2B56"/>
                 </a:solidFill>
                 <a:latin typeface="Georgia"/>
               </a:rPr>
-              <a:t>II.</a:t>
+              <a:t>II</a:t>
             </a:r>
           </a:p>
         </p:txBody>
@@ -8501,8 +9146,8 @@
         </p:nvSpPr>
         <p:spPr>
           <a:xfrm>
-            <a:off x="4699000" y="1638300"/>
-            <a:ext cx="6858000" cy="622300"/>
+            <a:off x="4953000" y="1651000"/>
+            <a:ext cx="6629400" cy="635000"/>
           </a:xfrm>
           <a:prstGeom prst="rect">
             <a:avLst/>
@@ -8536,7 +9181,7 @@
         </p:nvSpPr>
         <p:spPr>
           <a:xfrm>
-            <a:off x="4064000" y="2260600"/>
+            <a:off x="4064000" y="2286000"/>
             <a:ext cx="7518399" cy="6350"/>
           </a:xfrm>
           <a:prstGeom prst="rect">
@@ -8579,8 +9224,8 @@
         </p:nvSpPr>
         <p:spPr>
           <a:xfrm>
-            <a:off x="4064000" y="2298700"/>
-            <a:ext cx="508000" cy="647700"/>
+            <a:off x="4064000" y="2336800"/>
+            <a:ext cx="762000" cy="647700"/>
           </a:xfrm>
           <a:prstGeom prst="rect">
             <a:avLst/>
@@ -8588,20 +9233,20 @@
           <a:noFill/>
         </p:spPr>
         <p:txBody>
-          <a:bodyPr wrap="square">
+          <a:bodyPr wrap="none">
             <a:normAutofit/>
           </a:bodyPr>
           <a:lstStyle/>
           <a:p>
             <a:pPr algn="l"/>
             <a:r>
-              <a:rPr sz="2600" b="0" i="1">
+              <a:rPr sz="2400" b="0" i="1">
                 <a:solidFill>
                   <a:srgbClr val="1F2B56"/>
                 </a:solidFill>
                 <a:latin typeface="Georgia"/>
               </a:rPr>
-              <a:t>III.</a:t>
+              <a:t>III</a:t>
             </a:r>
           </a:p>
         </p:txBody>
@@ -8614,8 +9259,8 @@
         </p:nvSpPr>
         <p:spPr>
           <a:xfrm>
-            <a:off x="4699000" y="2324100"/>
-            <a:ext cx="6858000" cy="622300"/>
+            <a:off x="4953000" y="2349500"/>
+            <a:ext cx="6629400" cy="635000"/>
           </a:xfrm>
           <a:prstGeom prst="rect">
             <a:avLst/>
@@ -8649,7 +9294,7 @@
         </p:nvSpPr>
         <p:spPr>
           <a:xfrm>
-            <a:off x="4064000" y="2946400"/>
+            <a:off x="4064000" y="2984500"/>
             <a:ext cx="7518399" cy="6350"/>
           </a:xfrm>
           <a:prstGeom prst="rect">
@@ -8692,8 +9337,8 @@
         </p:nvSpPr>
         <p:spPr>
           <a:xfrm>
-            <a:off x="4064000" y="2984500"/>
-            <a:ext cx="508000" cy="647700"/>
+            <a:off x="4064000" y="3035300"/>
+            <a:ext cx="762000" cy="647700"/>
           </a:xfrm>
           <a:prstGeom prst="rect">
             <a:avLst/>
@@ -8701,20 +9346,20 @@
           <a:noFill/>
         </p:spPr>
         <p:txBody>
-          <a:bodyPr wrap="square">
+          <a:bodyPr wrap="none">
             <a:normAutofit/>
           </a:bodyPr>
           <a:lstStyle/>
           <a:p>
             <a:pPr algn="l"/>
             <a:r>
-              <a:rPr sz="2600" b="0" i="1">
+              <a:rPr sz="2400" b="0" i="1">
                 <a:solidFill>
                   <a:srgbClr val="1F2B56"/>
                 </a:solidFill>
                 <a:latin typeface="Georgia"/>
               </a:rPr>
-              <a:t>IV.</a:t>
+              <a:t>IV</a:t>
             </a:r>
           </a:p>
         </p:txBody>
@@ -8727,8 +9372,8 @@
         </p:nvSpPr>
         <p:spPr>
           <a:xfrm>
-            <a:off x="4699000" y="3009900"/>
-            <a:ext cx="6858000" cy="622300"/>
+            <a:off x="4953000" y="3048000"/>
+            <a:ext cx="6629400" cy="635000"/>
           </a:xfrm>
           <a:prstGeom prst="rect">
             <a:avLst/>
@@ -8762,7 +9407,7 @@
         </p:nvSpPr>
         <p:spPr>
           <a:xfrm>
-            <a:off x="4064000" y="3632200"/>
+            <a:off x="4064000" y="3683000"/>
             <a:ext cx="7518399" cy="6350"/>
           </a:xfrm>
           <a:prstGeom prst="rect">
@@ -8805,8 +9450,8 @@
         </p:nvSpPr>
         <p:spPr>
           <a:xfrm>
-            <a:off x="4064000" y="3670300"/>
-            <a:ext cx="508000" cy="647700"/>
+            <a:off x="4064000" y="3733799"/>
+            <a:ext cx="762000" cy="647700"/>
           </a:xfrm>
           <a:prstGeom prst="rect">
             <a:avLst/>
@@ -8814,20 +9459,20 @@
           <a:noFill/>
         </p:spPr>
         <p:txBody>
-          <a:bodyPr wrap="square">
+          <a:bodyPr wrap="none">
             <a:normAutofit/>
           </a:bodyPr>
           <a:lstStyle/>
           <a:p>
             <a:pPr algn="l"/>
             <a:r>
-              <a:rPr sz="2600" b="0" i="1">
+              <a:rPr sz="2400" b="0" i="1">
                 <a:solidFill>
                   <a:srgbClr val="1F2B56"/>
                 </a:solidFill>
                 <a:latin typeface="Georgia"/>
               </a:rPr>
-              <a:t>V.</a:t>
+              <a:t>V</a:t>
             </a:r>
           </a:p>
         </p:txBody>
@@ -8840,8 +9485,8 @@
         </p:nvSpPr>
         <p:spPr>
           <a:xfrm>
-            <a:off x="4699000" y="3695700"/>
-            <a:ext cx="6858000" cy="622300"/>
+            <a:off x="4953000" y="3746500"/>
+            <a:ext cx="6629400" cy="635000"/>
           </a:xfrm>
           <a:prstGeom prst="rect">
             <a:avLst/>
@@ -8881,7 +9526,7 @@
     <p:bg>
       <p:bgPr>
         <a:solidFill>
-          <a:srgbClr val="191D2E"/>
+          <a:srgbClr val="1F2B56"/>
         </a:solidFill>
         <a:effectLst/>
       </p:bgPr>
@@ -9389,7 +10034,7 @@
                   </a:txBody>
                   <a:tcPr>
                     <a:solidFill>
-                      <a:srgbClr val="191D2E"/>
+                      <a:srgbClr val="1F2B56"/>
                     </a:solidFill>
                   </a:tcPr>
                 </a:tc>
@@ -9411,7 +10056,7 @@
                   </a:txBody>
                   <a:tcPr>
                     <a:solidFill>
-                      <a:srgbClr val="191D2E"/>
+                      <a:srgbClr val="1F2B56"/>
                     </a:solidFill>
                   </a:tcPr>
                 </a:tc>
@@ -9433,7 +10078,7 @@
                   </a:txBody>
                   <a:tcPr>
                     <a:solidFill>
-                      <a:srgbClr val="191D2E"/>
+                      <a:srgbClr val="1F2B56"/>
                     </a:solidFill>
                   </a:tcPr>
                 </a:tc>
@@ -9933,7 +10578,7 @@
                   </a:txBody>
                   <a:tcPr>
                     <a:solidFill>
-                      <a:srgbClr val="191D2E"/>
+                      <a:srgbClr val="1F2B56"/>
                     </a:solidFill>
                   </a:tcPr>
                 </a:tc>
@@ -9955,7 +10600,7 @@
                   </a:txBody>
                   <a:tcPr>
                     <a:solidFill>
-                      <a:srgbClr val="191D2E"/>
+                      <a:srgbClr val="1F2B56"/>
                     </a:solidFill>
                   </a:tcPr>
                 </a:tc>
@@ -9977,7 +10622,7 @@
                   </a:txBody>
                   <a:tcPr>
                     <a:solidFill>
-                      <a:srgbClr val="191D2E"/>
+                      <a:srgbClr val="1F2B56"/>
                     </a:solidFill>
                   </a:tcPr>
                 </a:tc>
@@ -9999,7 +10644,7 @@
                   </a:txBody>
                   <a:tcPr>
                     <a:solidFill>
-                      <a:srgbClr val="191D2E"/>
+                      <a:srgbClr val="1F2B56"/>
                     </a:solidFill>
                   </a:tcPr>
                 </a:tc>
@@ -11374,7 +12019,7 @@
                   </a:txBody>
                   <a:tcPr>
                     <a:solidFill>
-                      <a:srgbClr val="191D2E"/>
+                      <a:srgbClr val="1F2B56"/>
                     </a:solidFill>
                   </a:tcPr>
                 </a:tc>
@@ -11396,7 +12041,7 @@
                   </a:txBody>
                   <a:tcPr>
                     <a:solidFill>
-                      <a:srgbClr val="191D2E"/>
+                      <a:srgbClr val="1F2B56"/>
                     </a:solidFill>
                   </a:tcPr>
                 </a:tc>
@@ -11418,7 +12063,7 @@
                   </a:txBody>
                   <a:tcPr>
                     <a:solidFill>
-                      <a:srgbClr val="191D2E"/>
+                      <a:srgbClr val="1F2B56"/>
                     </a:solidFill>
                   </a:tcPr>
                 </a:tc>
@@ -12531,7 +13176,7 @@
                   </a:txBody>
                   <a:tcPr>
                     <a:solidFill>
-                      <a:srgbClr val="191D2E"/>
+                      <a:srgbClr val="1F2B56"/>
                     </a:solidFill>
                   </a:tcPr>
                 </a:tc>
@@ -12553,7 +13198,7 @@
                   </a:txBody>
                   <a:tcPr>
                     <a:solidFill>
-                      <a:srgbClr val="191D2E"/>
+                      <a:srgbClr val="1F2B56"/>
                     </a:solidFill>
                   </a:tcPr>
                 </a:tc>
@@ -12575,7 +13220,7 @@
                   </a:txBody>
                   <a:tcPr>
                     <a:solidFill>
-                      <a:srgbClr val="191D2E"/>
+                      <a:srgbClr val="1F2B56"/>
                     </a:solidFill>
                   </a:tcPr>
                 </a:tc>
